--- a/IEP/lesson4-point-slope-form-IEP.pptx
+++ b/IEP/lesson4-point-slope-form-IEP.pptx
@@ -7374,7 +7374,7 @@
                 <a:latin typeface="Segoe UI"/>
                 <a:cs typeface="Segoe UI"/>
               </a:rPr>
-              <a:t xml:space="preserve">Bell work, homework and the quiz are the same pages as the general lesson. Assign fewer items, allow notes and a calculator, and give extended time as the IEP lists.</a:t>
+              <a:t xml:space="preserve">The IEP pages have 3 answer choices, 6 homework and quiz questions, a reminder card and read-aloud. Allow notes and a calculator, and give extended time as the IEP lists.</a:t>
             </a:r>
             <a:endParaRPr lang="en-US" sz="1575" dirty="0"/>
           </a:p>

--- a/IEP/lesson4-point-slope-form-IEP.pptx
+++ b/IEP/lesson4-point-slope-form-IEP.pptx
@@ -21,6 +21,8 @@
     <p:sldId id="266" r:id="rId21"/>
     <p:sldId id="267" r:id="rId22"/>
     <p:sldId id="268" r:id="rId23"/>
+    <p:sldId id="269" r:id="rId24"/>
+    <p:sldId id="270" r:id="rId25"/>
   </p:sldIdLst>
   <p:sldSz cx="12192000" cy="6858000"/>
   <p:notesSz cx="6858000" cy="9144000"/>
@@ -170,7 +172,7 @@
           <a:p>
             <a:r>
               <a:rPr lang="en-US" dirty="0"/>
-              <a:t>IEP version of Lesson 4: a modified lesson that keeps the core skills and cuts the number of items. Each skill follows I do (teacher models), We do (together, with sentence frames), You do (student tries, then reveal). Click to reveal each answer. Apply each student's IEP accommodations too: extended time, read-aloud, breaks, calculator, small group.</a:t>
+              <a:t>IEP version of Lesson 4: a modified lesson that keeps the core skills and cuts the number of items. Each skill follows I do (teacher models), We do (together, with sentence frames), You do (student tries, then reveal). Click to reveal each answer. The bell work for every day follows this slide (the same questions as the online bell work); skip to the current day. Apply each student's IEP accommodations too: extended time, read-aloud, breaks, calculator, small group.</a:t>
             </a:r>
           </a:p>
         </p:txBody>
@@ -229,7 +231,7 @@
           <a:p>
             <a:r>
               <a:rPr lang="en-US" dirty="0"/>
-              <a:t>Memory trick from the lesson: HOY VUX. Horizontal, zerO slope, y = a number. Vertical, Undefined slope, x = a number.</a:t>
+              <a:t>Same line, two forms. Slope-intercept form shows where it crosses the y-axis: (0, −1).</a:t>
             </a:r>
           </a:p>
         </p:txBody>
@@ -344,7 +346,7 @@
           <a:p>
             <a:r>
               <a:rPr lang="en-US" dirty="0"/>
-              <a:t>Give students time to try all items before revealing. Students may use the steps slide and their notes.</a:t>
+              <a:t>Memory trick from the lesson: HOY VUX. Horizontal, zerO slope, y = a number. Vertical, Undefined slope, x = a number.</a:t>
             </a:r>
           </a:p>
         </p:txBody>
@@ -413,6 +415,121 @@
 </p:notes>
 </file>
 
+<file path=ppt/notesSlides/notesSlide14.xml><?xml version="1.0" encoding="utf-8"?>
+<p:notes xmlns:a="http://schemas.openxmlformats.org/drawingml/2006/main" xmlns:r="http://schemas.openxmlformats.org/officeDocument/2006/relationships" xmlns:p="http://schemas.openxmlformats.org/presentationml/2006/main">
+  <p:cSld>
+    <p:spTree>
+      <p:nvGrpSpPr>
+        <p:cNvPr id="1" name=""/>
+        <p:cNvGrpSpPr/>
+        <p:nvPr/>
+      </p:nvGrpSpPr>
+      <p:grpSpPr>
+        <a:xfrm>
+          <a:off x="0" y="0"/>
+          <a:ext cx="0" cy="0"/>
+          <a:chOff x="0" y="0"/>
+          <a:chExt cx="0" cy="0"/>
+        </a:xfrm>
+      </p:grpSpPr>
+      <p:sp>
+        <p:nvSpPr>
+          <p:cNvPr id="2" name="Slide Image Placeholder 1"/>
+          <p:cNvSpPr>
+            <a:spLocks noGrp="1" noRot="1" noChangeAspect="1"/>
+          </p:cNvSpPr>
+          <p:nvPr>
+            <p:ph type="sldImg"/>
+          </p:nvPr>
+        </p:nvSpPr>
+        <p:spPr/>
+      </p:sp>
+      <p:sp>
+        <p:nvSpPr>
+          <p:cNvPr id="3" name="Notes Placeholder 2"/>
+          <p:cNvSpPr>
+            <a:spLocks noGrp="1"/>
+          </p:cNvSpPr>
+          <p:nvPr>
+            <p:ph type="body" idx="1"/>
+          </p:nvPr>
+        </p:nvSpPr>
+        <p:spPr/>
+        <p:txBody>
+          <a:bodyPr/>
+          <a:lstStyle/>
+          <a:p>
+            <a:r>
+              <a:rPr lang="en-US" dirty="0"/>
+              <a:t>Give students time to try all items before revealing. Students may use the steps slide and their notes.</a:t>
+            </a:r>
+          </a:p>
+        </p:txBody>
+      </p:sp>
+    </p:spTree>
+  </p:cSld>
+  <p:clrMapOvr>
+    <a:masterClrMapping/>
+  </p:clrMapOvr>
+</p:notes>
+</file>
+
+<file path=ppt/notesSlides/notesSlide15.xml><?xml version="1.0" encoding="utf-8"?>
+<p:notes xmlns:a="http://schemas.openxmlformats.org/drawingml/2006/main" xmlns:r="http://schemas.openxmlformats.org/officeDocument/2006/relationships" xmlns:p="http://schemas.openxmlformats.org/presentationml/2006/main">
+  <p:cSld>
+    <p:spTree>
+      <p:nvGrpSpPr>
+        <p:cNvPr id="1" name=""/>
+        <p:cNvGrpSpPr/>
+        <p:nvPr/>
+      </p:nvGrpSpPr>
+      <p:grpSpPr>
+        <a:xfrm>
+          <a:off x="0" y="0"/>
+          <a:ext cx="0" cy="0"/>
+          <a:chOff x="0" y="0"/>
+          <a:chExt cx="0" cy="0"/>
+        </a:xfrm>
+      </p:grpSpPr>
+      <p:sp>
+        <p:nvSpPr>
+          <p:cNvPr id="2" name="Slide Image Placeholder 1"/>
+          <p:cNvSpPr>
+            <a:spLocks noGrp="1" noRot="1" noChangeAspect="1"/>
+          </p:cNvSpPr>
+          <p:nvPr>
+            <p:ph type="sldImg"/>
+          </p:nvPr>
+        </p:nvSpPr>
+        <p:spPr/>
+      </p:sp>
+      <p:sp>
+        <p:nvSpPr>
+          <p:cNvPr id="3" name="Notes Placeholder 2"/>
+          <p:cNvSpPr>
+            <a:spLocks noGrp="1"/>
+          </p:cNvSpPr>
+          <p:nvPr>
+            <p:ph type="body" idx="1"/>
+          </p:nvPr>
+        </p:nvSpPr>
+        <p:spPr/>
+        <p:txBody>
+          <a:bodyPr/>
+          <a:lstStyle/>
+          <a:p>
+            <a:endParaRPr lang="en-US"/>
+          </a:p>
+        </p:txBody>
+      </p:sp>
+    </p:spTree>
+  </p:cSld>
+  <p:clrMapOvr>
+    <a:masterClrMapping/>
+  </p:clrMapOvr>
+</p:notes>
+</file>
+
 <file path=ppt/notesSlides/notesSlide2.xml><?xml version="1.0" encoding="utf-8"?>
 <p:notes xmlns:a="http://schemas.openxmlformats.org/drawingml/2006/main" xmlns:r="http://schemas.openxmlformats.org/officeDocument/2006/relationships" xmlns:p="http://schemas.openxmlformats.org/presentationml/2006/main">
   <p:cSld>
@@ -459,7 +576,7 @@
           <a:p>
             <a:r>
               <a:rPr lang="en-US" dirty="0"/>
-              <a:t>Read each word aloud. Students copy them onto their vocabulary card.</a:t>
+              <a:t>Added for this deck; not from the textbook. Have this up as students walk in; they work silently while you take attendance (about 5 minutes). These review the skills today's lesson builds on: the slope formula, slope-intercept form, and distributing a negative, which students will need when they rewrite point-slope form. Reveal the answers one at a time. Watch #4: −2 times +3 is −6. Answer key: 1. Slope through (1, 3) and (4, 9): m = (9 − 3)/(4 − 1) = 6/3 = 2. 2. Slope and y-intercept of y = −3x + 5: m = −3, y-intercept (0, 5). 3. Line with slope 4 and y-intercept (0, −2): y = 4x − 2. 4. Distribute −2(x + 3): −2x − 6.</a:t>
             </a:r>
           </a:p>
         </p:txBody>
@@ -518,7 +635,7 @@
           <a:p>
             <a:r>
               <a:rPr lang="en-US" dirty="0"/>
-              <a:t>Leave this slide up, or give students a printed copy, while they work.</a:t>
+              <a:t>Added for this deck; not from the textbook. Have this up as students walk in; they work silently while you take attendance (about 5 minutes). It reviews Day 1. For #1, the signs flip: the point (3, −1) gives x − 3 and y + 1. For #3, distribute and add 5: y − 5 = 3x − 6, so y = 3x − 1. For #4, horizontal keeps the y-value (y = 8) and vertical keeps the x-value (x = −3): HOY VUX. Answer key: 1. Slope −4 through (3, −1): y + 1 = −4(x − 3). 2. Through (2, 5) and (4, 11): m = (11 − 5)/(4 − 2) = 3, so y − 5 = 3(x − 2). 3. #2 in slope-intercept form: y = 3x − 1. 4. Through (−3, 8): horizontal y = 8; vertical x = −3.</a:t>
             </a:r>
           </a:p>
         </p:txBody>
@@ -577,7 +694,7 @@
           <a:p>
             <a:r>
               <a:rPr lang="en-US" dirty="0"/>
-              <a:t>Think aloud: orange is the slope, blue is the point. The point goes in with a minus sign.</a:t>
+              <a:t>Read each word aloud. Students copy them onto their vocabulary card.</a:t>
             </a:r>
           </a:p>
         </p:txBody>
@@ -636,7 +753,7 @@
           <a:p>
             <a:r>
               <a:rPr lang="en-US" dirty="0"/>
-              <a:t>Students fill in the blanks on their paper first, then reveal.</a:t>
+              <a:t>Leave this slide up, or give students a printed copy, while they work.</a:t>
             </a:r>
           </a:p>
         </p:txBody>
@@ -693,7 +810,10 @@
           <a:bodyPr/>
           <a:lstStyle/>
           <a:p>
-            <a:endParaRPr lang="en-US"/>
+            <a:r>
+              <a:rPr lang="en-US" dirty="0"/>
+              <a:t>Think aloud: orange is the slope, blue is the point. The point goes in with a minus sign.</a:t>
+            </a:r>
           </a:p>
         </p:txBody>
       </p:sp>
@@ -751,7 +871,7 @@
           <a:p>
             <a:r>
               <a:rPr lang="en-US" dirty="0"/>
-              <a:t>When there is no slope given, find it first with the slope formula.</a:t>
+              <a:t>Students fill in the blanks on their paper first, then reveal.</a:t>
             </a:r>
           </a:p>
         </p:txBody>
@@ -808,10 +928,7 @@
           <a:bodyPr/>
           <a:lstStyle/>
           <a:p>
-            <a:r>
-              <a:rPr lang="en-US" dirty="0"/>
-              <a:t>Same line, two forms. Slope-intercept form shows where it crosses the y-axis: (0, −1).</a:t>
-            </a:r>
+            <a:endParaRPr lang="en-US"/>
           </a:p>
         </p:txBody>
       </p:sp>
@@ -867,7 +984,10 @@
           <a:bodyPr/>
           <a:lstStyle/>
           <a:p>
-            <a:endParaRPr lang="en-US"/>
+            <a:r>
+              <a:rPr lang="en-US" dirty="0"/>
+              <a:t>When there is no slope given, find it first with the slope formula.</a:t>
+            </a:r>
           </a:p>
         </p:txBody>
       </p:sp>
@@ -1908,6 +2028,1510 @@
                 <a:latin typeface="Segoe UI"/>
                 <a:cs typeface="Segoe UI"/>
               </a:rPr>
+              <a:t xml:space="preserve">I do · Change the form</a:t>
+            </a:r>
+            <a:endParaRPr lang="en-US" sz="1200" dirty="0"/>
+          </a:p>
+        </p:txBody>
+      </p:sp>
+      <p:sp>
+        <p:nvSpPr>
+          <p:cNvPr id="3" name="Shape 3"/>
+          <p:cNvSpPr txBox="1"/>
+          <p:nvPr/>
+        </p:nvSpPr>
+        <p:spPr>
+          <a:xfrm>
+            <a:off x="685800" y="866394"/>
+            <a:ext cx="10820095" cy="580644"/>
+          </a:xfrm>
+          <a:prstGeom prst="rect">
+            <a:avLst/>
+          </a:prstGeom>
+          <a:noFill/>
+          <a:ln>
+            <a:noFill/>
+          </a:ln>
+        </p:spPr>
+        <p:txBody>
+          <a:bodyPr wrap="square" lIns="36576" tIns="27432" rIns="36576" bIns="27432" anchor="t">
+            <a:noAutofit/>
+          </a:bodyPr>
+          <a:lstStyle/>
+          <a:p>
+            <a:pPr algn="l">
+              <a:lnSpc>
+                <a:spcPct val="100000"/>
+              </a:lnSpc>
+            </a:pPr>
+            <a:r>
+              <a:rPr lang="en-US" sz="3450" dirty="0" b="1">
+                <a:solidFill>
+                  <a:srgbClr val="16171D"/>
+                </a:solidFill>
+                <a:latin typeface="Segoe UI"/>
+                <a:cs typeface="Segoe UI"/>
+              </a:rPr>
+              <a:t xml:space="preserve">Rewrite as </a:t>
+            </a:r>
+            <a:r>
+              <a:rPr lang="en-US" sz="3450" dirty="0" b="1" i="1">
+                <a:solidFill>
+                  <a:srgbClr val="16171D"/>
+                </a:solidFill>
+                <a:latin typeface="Segoe UI"/>
+                <a:cs typeface="Segoe UI"/>
+              </a:rPr>
+              <a:t xml:space="preserve">y</a:t>
+            </a:r>
+            <a:r>
+              <a:rPr lang="en-US" sz="3450" dirty="0" b="1">
+                <a:solidFill>
+                  <a:srgbClr val="16171D"/>
+                </a:solidFill>
+                <a:latin typeface="Segoe UI"/>
+                <a:cs typeface="Segoe UI"/>
+              </a:rPr>
+              <a:t xml:space="preserve"> = </a:t>
+            </a:r>
+            <a:r>
+              <a:rPr lang="en-US" sz="3450" dirty="0" b="1" i="1">
+                <a:solidFill>
+                  <a:srgbClr val="16171D"/>
+                </a:solidFill>
+                <a:latin typeface="Segoe UI"/>
+                <a:cs typeface="Segoe UI"/>
+              </a:rPr>
+              <a:t xml:space="preserve">mx</a:t>
+            </a:r>
+            <a:r>
+              <a:rPr lang="en-US" sz="3450" dirty="0" b="1">
+                <a:solidFill>
+                  <a:srgbClr val="16171D"/>
+                </a:solidFill>
+                <a:latin typeface="Segoe UI"/>
+                <a:cs typeface="Segoe UI"/>
+              </a:rPr>
+              <a:t xml:space="preserve"> + </a:t>
+            </a:r>
+            <a:r>
+              <a:rPr lang="en-US" sz="3450" dirty="0" b="1" i="1">
+                <a:solidFill>
+                  <a:srgbClr val="16171D"/>
+                </a:solidFill>
+                <a:latin typeface="Segoe UI"/>
+                <a:cs typeface="Segoe UI"/>
+              </a:rPr>
+              <a:t xml:space="preserve">b</a:t>
+            </a:r>
+            <a:endParaRPr lang="en-US" sz="3450" dirty="0"/>
+          </a:p>
+        </p:txBody>
+      </p:sp>
+      <p:sp>
+        <p:nvSpPr>
+          <p:cNvPr id="4" name="Shape 4"/>
+          <p:cNvSpPr txBox="1"/>
+          <p:nvPr/>
+        </p:nvSpPr>
+        <p:spPr>
+          <a:xfrm>
+            <a:off x="685800" y="1618488"/>
+            <a:ext cx="10820095" cy="489204"/>
+          </a:xfrm>
+          <a:prstGeom prst="rect">
+            <a:avLst/>
+          </a:prstGeom>
+          <a:noFill/>
+          <a:ln>
+            <a:noFill/>
+          </a:ln>
+        </p:spPr>
+        <p:txBody>
+          <a:bodyPr wrap="square" lIns="36576" tIns="27432" rIns="36576" bIns="27432" anchor="t">
+            <a:noAutofit/>
+          </a:bodyPr>
+          <a:lstStyle/>
+          <a:p>
+            <a:pPr algn="l">
+              <a:lnSpc>
+                <a:spcPct val="100000"/>
+              </a:lnSpc>
+            </a:pPr>
+            <a:r>
+              <a:rPr lang="en-US" sz="2850" dirty="0" i="1">
+                <a:solidFill>
+                  <a:srgbClr val="16171D"/>
+                </a:solidFill>
+                <a:latin typeface="Cambria"/>
+                <a:cs typeface="Cambria"/>
+              </a:rPr>
+              <a:t xml:space="preserve">y</a:t>
+            </a:r>
+            <a:r>
+              <a:rPr lang="en-US" sz="2850" dirty="0">
+                <a:solidFill>
+                  <a:srgbClr val="16171D"/>
+                </a:solidFill>
+                <a:latin typeface="Cambria"/>
+                <a:cs typeface="Cambria"/>
+              </a:rPr>
+              <a:t xml:space="preserve"> − 5 = 3(</a:t>
+            </a:r>
+            <a:r>
+              <a:rPr lang="en-US" sz="2850" dirty="0" i="1">
+                <a:solidFill>
+                  <a:srgbClr val="16171D"/>
+                </a:solidFill>
+                <a:latin typeface="Cambria"/>
+                <a:cs typeface="Cambria"/>
+              </a:rPr>
+              <a:t xml:space="preserve">x</a:t>
+            </a:r>
+            <a:r>
+              <a:rPr lang="en-US" sz="2850" dirty="0">
+                <a:solidFill>
+                  <a:srgbClr val="16171D"/>
+                </a:solidFill>
+                <a:latin typeface="Cambria"/>
+                <a:cs typeface="Cambria"/>
+              </a:rPr>
+              <a:t xml:space="preserve"> − 2)</a:t>
+            </a:r>
+            <a:endParaRPr lang="en-US" sz="2850" dirty="0"/>
+          </a:p>
+        </p:txBody>
+      </p:sp>
+      <p:sp>
+        <p:nvSpPr>
+          <p:cNvPr id="5" name="Shape 5"/>
+          <p:cNvSpPr txBox="1"/>
+          <p:nvPr/>
+        </p:nvSpPr>
+        <p:spPr>
+          <a:xfrm>
+            <a:off x="685800" y="2279142"/>
+            <a:ext cx="10820095" cy="352044"/>
+          </a:xfrm>
+          <a:prstGeom prst="rect">
+            <a:avLst/>
+          </a:prstGeom>
+          <a:noFill/>
+          <a:ln>
+            <a:noFill/>
+          </a:ln>
+        </p:spPr>
+        <p:txBody>
+          <a:bodyPr wrap="square" lIns="36576" tIns="27432" rIns="36576" bIns="27432" anchor="t">
+            <a:noAutofit/>
+          </a:bodyPr>
+          <a:lstStyle/>
+          <a:p>
+            <a:pPr algn="l">
+              <a:lnSpc>
+                <a:spcPct val="100000"/>
+              </a:lnSpc>
+            </a:pPr>
+            <a:r>
+              <a:rPr lang="en-US" sz="1950" dirty="0">
+                <a:solidFill>
+                  <a:srgbClr val="16171D"/>
+                </a:solidFill>
+                <a:latin typeface="Segoe UI"/>
+                <a:cs typeface="Segoe UI"/>
+              </a:rPr>
+              <a:t xml:space="preserve">Step 1: distribute the 3.</a:t>
+            </a:r>
+            <a:endParaRPr lang="en-US" sz="1950" dirty="0"/>
+          </a:p>
+        </p:txBody>
+      </p:sp>
+      <p:sp>
+        <p:nvSpPr>
+          <p:cNvPr id="6" name="Shape 6"/>
+          <p:cNvSpPr txBox="1"/>
+          <p:nvPr/>
+        </p:nvSpPr>
+        <p:spPr>
+          <a:xfrm>
+            <a:off x="685800" y="2802636"/>
+            <a:ext cx="4234632" cy="518922"/>
+          </a:xfrm>
+          <a:prstGeom prst="roundRect">
+            <a:avLst>
+              <a:gd name="adj" fmla="val 8000"/>
+            </a:avLst>
+          </a:prstGeom>
+          <a:solidFill>
+            <a:srgbClr val="EDF5E9"/>
+          </a:solidFill>
+          <a:ln>
+            <a:noFill/>
+          </a:ln>
+        </p:spPr>
+        <p:txBody>
+          <a:bodyPr wrap="square" lIns="164592" tIns="64008" rIns="164592" bIns="64008" anchor="ctr">
+            <a:noAutofit/>
+          </a:bodyPr>
+          <a:lstStyle/>
+          <a:p>
+            <a:pPr algn="l">
+              <a:lnSpc>
+                <a:spcPct val="100000"/>
+              </a:lnSpc>
+            </a:pPr>
+            <a:r>
+              <a:rPr lang="en-US" sz="1125" dirty="0" b="1" spc="100">
+                <a:solidFill>
+                  <a:srgbClr val="4F8A3C"/>
+                </a:solidFill>
+                <a:latin typeface="Segoe UI"/>
+                <a:cs typeface="Segoe UI"/>
+              </a:rPr>
+              <a:t xml:space="preserve">ANSWER   </a:t>
+            </a:r>
+            <a:r>
+              <a:rPr lang="en-US" sz="2325" dirty="0" i="1">
+                <a:solidFill>
+                  <a:srgbClr val="16171D"/>
+                </a:solidFill>
+                <a:latin typeface="Cambria"/>
+                <a:cs typeface="Cambria"/>
+              </a:rPr>
+              <a:t xml:space="preserve">y</a:t>
+            </a:r>
+            <a:r>
+              <a:rPr lang="en-US" sz="2325" dirty="0">
+                <a:solidFill>
+                  <a:srgbClr val="16171D"/>
+                </a:solidFill>
+                <a:latin typeface="Cambria"/>
+                <a:cs typeface="Cambria"/>
+              </a:rPr>
+              <a:t xml:space="preserve"> − 5 = 3</a:t>
+            </a:r>
+            <a:r>
+              <a:rPr lang="en-US" sz="2325" dirty="0" i="1">
+                <a:solidFill>
+                  <a:srgbClr val="16171D"/>
+                </a:solidFill>
+                <a:latin typeface="Cambria"/>
+                <a:cs typeface="Cambria"/>
+              </a:rPr>
+              <a:t xml:space="preserve">x</a:t>
+            </a:r>
+            <a:r>
+              <a:rPr lang="en-US" sz="2325" dirty="0">
+                <a:solidFill>
+                  <a:srgbClr val="16171D"/>
+                </a:solidFill>
+                <a:latin typeface="Cambria"/>
+                <a:cs typeface="Cambria"/>
+              </a:rPr>
+              <a:t xml:space="preserve"> − 6</a:t>
+            </a:r>
+            <a:endParaRPr lang="en-US" sz="2325" dirty="0"/>
+          </a:p>
+        </p:txBody>
+      </p:sp>
+      <p:sp>
+        <p:nvSpPr>
+          <p:cNvPr id="7" name="Shape 7"/>
+          <p:cNvSpPr txBox="1"/>
+          <p:nvPr/>
+        </p:nvSpPr>
+        <p:spPr>
+          <a:xfrm>
+            <a:off x="685800" y="3493008"/>
+            <a:ext cx="10820095" cy="352044"/>
+          </a:xfrm>
+          <a:prstGeom prst="rect">
+            <a:avLst/>
+          </a:prstGeom>
+          <a:noFill/>
+          <a:ln>
+            <a:noFill/>
+          </a:ln>
+        </p:spPr>
+        <p:txBody>
+          <a:bodyPr wrap="square" lIns="36576" tIns="27432" rIns="36576" bIns="27432" anchor="t">
+            <a:noAutofit/>
+          </a:bodyPr>
+          <a:lstStyle/>
+          <a:p>
+            <a:pPr algn="l">
+              <a:lnSpc>
+                <a:spcPct val="100000"/>
+              </a:lnSpc>
+            </a:pPr>
+            <a:r>
+              <a:rPr lang="en-US" sz="1950" dirty="0">
+                <a:solidFill>
+                  <a:srgbClr val="16171D"/>
+                </a:solidFill>
+                <a:latin typeface="Segoe UI"/>
+                <a:cs typeface="Segoe UI"/>
+              </a:rPr>
+              <a:t xml:space="preserve">Step 2: add 5 to both sides.</a:t>
+            </a:r>
+            <a:endParaRPr lang="en-US" sz="1950" dirty="0"/>
+          </a:p>
+        </p:txBody>
+      </p:sp>
+      <p:sp>
+        <p:nvSpPr>
+          <p:cNvPr id="8" name="Shape 8"/>
+          <p:cNvSpPr txBox="1"/>
+          <p:nvPr/>
+        </p:nvSpPr>
+        <p:spPr>
+          <a:xfrm>
+            <a:off x="685800" y="4016502"/>
+            <a:ext cx="3571326" cy="518922"/>
+          </a:xfrm>
+          <a:prstGeom prst="roundRect">
+            <a:avLst>
+              <a:gd name="adj" fmla="val 8000"/>
+            </a:avLst>
+          </a:prstGeom>
+          <a:solidFill>
+            <a:srgbClr val="EDF5E9"/>
+          </a:solidFill>
+          <a:ln>
+            <a:noFill/>
+          </a:ln>
+        </p:spPr>
+        <p:txBody>
+          <a:bodyPr wrap="square" lIns="164592" tIns="64008" rIns="164592" bIns="64008" anchor="ctr">
+            <a:noAutofit/>
+          </a:bodyPr>
+          <a:lstStyle/>
+          <a:p>
+            <a:pPr algn="l">
+              <a:lnSpc>
+                <a:spcPct val="100000"/>
+              </a:lnSpc>
+            </a:pPr>
+            <a:r>
+              <a:rPr lang="en-US" sz="1125" dirty="0" b="1" spc="100">
+                <a:solidFill>
+                  <a:srgbClr val="4F8A3C"/>
+                </a:solidFill>
+                <a:latin typeface="Segoe UI"/>
+                <a:cs typeface="Segoe UI"/>
+              </a:rPr>
+              <a:t xml:space="preserve">ANSWER   </a:t>
+            </a:r>
+            <a:r>
+              <a:rPr lang="en-US" sz="2325" dirty="0" i="1">
+                <a:solidFill>
+                  <a:srgbClr val="16171D"/>
+                </a:solidFill>
+                <a:latin typeface="Cambria"/>
+                <a:cs typeface="Cambria"/>
+              </a:rPr>
+              <a:t xml:space="preserve">y</a:t>
+            </a:r>
+            <a:r>
+              <a:rPr lang="en-US" sz="2325" dirty="0">
+                <a:solidFill>
+                  <a:srgbClr val="16171D"/>
+                </a:solidFill>
+                <a:latin typeface="Cambria"/>
+                <a:cs typeface="Cambria"/>
+              </a:rPr>
+              <a:t xml:space="preserve"> = 3</a:t>
+            </a:r>
+            <a:r>
+              <a:rPr lang="en-US" sz="2325" dirty="0" i="1">
+                <a:solidFill>
+                  <a:srgbClr val="16171D"/>
+                </a:solidFill>
+                <a:latin typeface="Cambria"/>
+                <a:cs typeface="Cambria"/>
+              </a:rPr>
+              <a:t xml:space="preserve">x</a:t>
+            </a:r>
+            <a:r>
+              <a:rPr lang="en-US" sz="2325" dirty="0">
+                <a:solidFill>
+                  <a:srgbClr val="16171D"/>
+                </a:solidFill>
+                <a:latin typeface="Cambria"/>
+                <a:cs typeface="Cambria"/>
+              </a:rPr>
+              <a:t xml:space="preserve"> − 1</a:t>
+            </a:r>
+            <a:endParaRPr lang="en-US" sz="2325" dirty="0"/>
+          </a:p>
+        </p:txBody>
+      </p:sp>
+    </p:spTree>
+  </p:cSld>
+  <p:clrMapOvr>
+    <a:masterClrMapping/>
+  </p:clrMapOvr>
+  <p:transition spd="med">
+    <p:fade/>
+  </p:transition>
+  <p:timing>
+    <p:tnLst>
+      <p:par>
+        <p:cTn id="1" dur="indefinite" restart="never" nodeType="tmRoot">
+          <p:childTnLst>
+            <p:seq concurrent="1" nextAc="seek">
+              <p:cTn id="2" dur="indefinite" nodeType="mainSeq">
+                <p:childTnLst>
+                  <p:par>
+                    <p:cTn id="8" fill="hold">
+                      <p:stCondLst>
+                        <p:cond delay="indefinite"/>
+                      </p:stCondLst>
+                      <p:childTnLst>
+                        <p:par>
+                          <p:cTn id="9" fill="hold">
+                            <p:stCondLst>
+                              <p:cond delay="0"/>
+                            </p:stCondLst>
+                            <p:childTnLst>
+                              <p:par>
+                                <p:cTn id="7" presetID="53" presetClass="entr" presetSubtype="16" fill="hold" nodeType="clickEffect">
+                                  <p:stCondLst>
+                                    <p:cond delay="0"/>
+                                  </p:stCondLst>
+                                  <p:childTnLst>
+                                    <p:set>
+                                      <p:cBhvr>
+                                        <p:cTn id="3" dur="1" fill="hold">
+                                          <p:stCondLst>
+                                            <p:cond delay="0"/>
+                                          </p:stCondLst>
+                                        </p:cTn>
+                                        <p:tgtEl>
+                                          <p:spTgt spid="6"/>
+                                        </p:tgtEl>
+                                        <p:attrNameLst>
+                                          <p:attrName>style.visibility</p:attrName>
+                                        </p:attrNameLst>
+                                      </p:cBhvr>
+                                      <p:to>
+                                        <p:strVal val="visible"/>
+                                      </p:to>
+                                    </p:set>
+                                    <p:animEffect transition="in" filter="fade">
+                                      <p:cBhvr>
+                                        <p:cTn id="4" dur="500"/>
+                                        <p:tgtEl>
+                                          <p:spTgt spid="6"/>
+                                        </p:tgtEl>
+                                      </p:cBhvr>
+                                    </p:animEffect>
+                                    <p:anim calcmode="lin" valueType="num">
+                                      <p:cBhvr>
+                                        <p:cTn id="5" dur="500" fill="hold"/>
+                                        <p:tgtEl>
+                                          <p:spTgt spid="6"/>
+                                        </p:tgtEl>
+                                        <p:attrNameLst>
+                                          <p:attrName>ppt_w</p:attrName>
+                                        </p:attrNameLst>
+                                      </p:cBhvr>
+                                      <p:tavLst>
+                                        <p:tav tm="0">
+                                          <p:val>
+                                            <p:fltVal val="0"/>
+                                          </p:val>
+                                        </p:tav>
+                                        <p:tav tm="100000">
+                                          <p:val>
+                                            <p:strVal val="#ppt_w"/>
+                                          </p:val>
+                                        </p:tav>
+                                      </p:tavLst>
+                                    </p:anim>
+                                    <p:anim calcmode="lin" valueType="num">
+                                      <p:cBhvr>
+                                        <p:cTn id="6" dur="500" fill="hold"/>
+                                        <p:tgtEl>
+                                          <p:spTgt spid="6"/>
+                                        </p:tgtEl>
+                                        <p:attrNameLst>
+                                          <p:attrName>ppt_h</p:attrName>
+                                        </p:attrNameLst>
+                                      </p:cBhvr>
+                                      <p:tavLst>
+                                        <p:tav tm="0">
+                                          <p:val>
+                                            <p:fltVal val="0"/>
+                                          </p:val>
+                                        </p:tav>
+                                        <p:tav tm="100000">
+                                          <p:val>
+                                            <p:strVal val="#ppt_h"/>
+                                          </p:val>
+                                        </p:tav>
+                                      </p:tavLst>
+                                    </p:anim>
+                                  </p:childTnLst>
+                                </p:cTn>
+                              </p:par>
+                            </p:childTnLst>
+                          </p:cTn>
+                        </p:par>
+                      </p:childTnLst>
+                    </p:cTn>
+                  </p:par>
+                  <p:par>
+                    <p:cTn id="15" fill="hold">
+                      <p:stCondLst>
+                        <p:cond delay="indefinite"/>
+                      </p:stCondLst>
+                      <p:childTnLst>
+                        <p:par>
+                          <p:cTn id="16" fill="hold">
+                            <p:stCondLst>
+                              <p:cond delay="0"/>
+                            </p:stCondLst>
+                            <p:childTnLst>
+                              <p:par>
+                                <p:cTn id="14" presetID="53" presetClass="entr" presetSubtype="16" fill="hold" nodeType="clickEffect">
+                                  <p:stCondLst>
+                                    <p:cond delay="0"/>
+                                  </p:stCondLst>
+                                  <p:childTnLst>
+                                    <p:set>
+                                      <p:cBhvr>
+                                        <p:cTn id="10" dur="1" fill="hold">
+                                          <p:stCondLst>
+                                            <p:cond delay="0"/>
+                                          </p:stCondLst>
+                                        </p:cTn>
+                                        <p:tgtEl>
+                                          <p:spTgt spid="8"/>
+                                        </p:tgtEl>
+                                        <p:attrNameLst>
+                                          <p:attrName>style.visibility</p:attrName>
+                                        </p:attrNameLst>
+                                      </p:cBhvr>
+                                      <p:to>
+                                        <p:strVal val="visible"/>
+                                      </p:to>
+                                    </p:set>
+                                    <p:animEffect transition="in" filter="fade">
+                                      <p:cBhvr>
+                                        <p:cTn id="11" dur="500"/>
+                                        <p:tgtEl>
+                                          <p:spTgt spid="8"/>
+                                        </p:tgtEl>
+                                      </p:cBhvr>
+                                    </p:animEffect>
+                                    <p:anim calcmode="lin" valueType="num">
+                                      <p:cBhvr>
+                                        <p:cTn id="12" dur="500" fill="hold"/>
+                                        <p:tgtEl>
+                                          <p:spTgt spid="8"/>
+                                        </p:tgtEl>
+                                        <p:attrNameLst>
+                                          <p:attrName>ppt_w</p:attrName>
+                                        </p:attrNameLst>
+                                      </p:cBhvr>
+                                      <p:tavLst>
+                                        <p:tav tm="0">
+                                          <p:val>
+                                            <p:fltVal val="0"/>
+                                          </p:val>
+                                        </p:tav>
+                                        <p:tav tm="100000">
+                                          <p:val>
+                                            <p:strVal val="#ppt_w"/>
+                                          </p:val>
+                                        </p:tav>
+                                      </p:tavLst>
+                                    </p:anim>
+                                    <p:anim calcmode="lin" valueType="num">
+                                      <p:cBhvr>
+                                        <p:cTn id="13" dur="500" fill="hold"/>
+                                        <p:tgtEl>
+                                          <p:spTgt spid="8"/>
+                                        </p:tgtEl>
+                                        <p:attrNameLst>
+                                          <p:attrName>ppt_h</p:attrName>
+                                        </p:attrNameLst>
+                                      </p:cBhvr>
+                                      <p:tavLst>
+                                        <p:tav tm="0">
+                                          <p:val>
+                                            <p:fltVal val="0"/>
+                                          </p:val>
+                                        </p:tav>
+                                        <p:tav tm="100000">
+                                          <p:val>
+                                            <p:strVal val="#ppt_h"/>
+                                          </p:val>
+                                        </p:tav>
+                                      </p:tavLst>
+                                    </p:anim>
+                                  </p:childTnLst>
+                                </p:cTn>
+                              </p:par>
+                            </p:childTnLst>
+                          </p:cTn>
+                        </p:par>
+                      </p:childTnLst>
+                    </p:cTn>
+                  </p:par>
+                </p:childTnLst>
+              </p:cTn>
+              <p:prevCondLst>
+                <p:cond evt="onPrev" delay="0">
+                  <p:tgtEl>
+                    <p:sldTgt/>
+                  </p:tgtEl>
+                </p:cond>
+              </p:prevCondLst>
+              <p:nextCondLst>
+                <p:cond evt="onNext" delay="0">
+                  <p:tgtEl>
+                    <p:sldTgt/>
+                  </p:tgtEl>
+                </p:cond>
+              </p:nextCondLst>
+            </p:seq>
+          </p:childTnLst>
+        </p:cTn>
+      </p:par>
+    </p:tnLst>
+  </p:timing>
+</p:sld>
+</file>
+
+<file path=ppt/slides/slide11.xml><?xml version="1.0" encoding="utf-8"?>
+<p:sld xmlns:a="http://schemas.openxmlformats.org/drawingml/2006/main" xmlns:r="http://schemas.openxmlformats.org/officeDocument/2006/relationships" xmlns:p="http://schemas.openxmlformats.org/presentationml/2006/main">
+  <p:cSld>
+    <p:spTree>
+      <p:nvGrpSpPr>
+        <p:cNvPr id="1" name=""/>
+        <p:cNvGrpSpPr/>
+        <p:nvPr/>
+      </p:nvGrpSpPr>
+      <p:grpSpPr>
+        <a:xfrm>
+          <a:off x="0" y="0"/>
+          <a:ext cx="0" cy="0"/>
+          <a:chOff x="0" y="0"/>
+          <a:chExt cx="0" cy="0"/>
+        </a:xfrm>
+      </p:grpSpPr>
+      <p:sp>
+        <p:nvSpPr>
+          <p:cNvPr id="2" name="Shape 2"/>
+          <p:cNvSpPr txBox="1"/>
+          <p:nvPr/>
+        </p:nvSpPr>
+        <p:spPr>
+          <a:xfrm>
+            <a:off x="685800" y="457200"/>
+            <a:ext cx="10820095" cy="237744"/>
+          </a:xfrm>
+          <a:prstGeom prst="rect">
+            <a:avLst/>
+          </a:prstGeom>
+          <a:noFill/>
+          <a:ln>
+            <a:noFill/>
+          </a:ln>
+        </p:spPr>
+        <p:txBody>
+          <a:bodyPr wrap="square" lIns="36576" tIns="27432" rIns="36576" bIns="27432" anchor="t">
+            <a:noAutofit/>
+          </a:bodyPr>
+          <a:lstStyle/>
+          <a:p>
+            <a:pPr algn="l">
+              <a:lnSpc>
+                <a:spcPct val="100000"/>
+              </a:lnSpc>
+            </a:pPr>
+            <a:r>
+              <a:rPr lang="en-US" sz="1200" dirty="0" b="1" spc="150" cap="all">
+                <a:solidFill>
+                  <a:srgbClr val="5F6272"/>
+                </a:solidFill>
+                <a:latin typeface="Segoe UI"/>
+                <a:cs typeface="Segoe UI"/>
+              </a:rPr>
+              <a:t xml:space="preserve">You do · Try it</a:t>
+            </a:r>
+            <a:endParaRPr lang="en-US" sz="1200" dirty="0"/>
+          </a:p>
+        </p:txBody>
+      </p:sp>
+      <p:sp>
+        <p:nvSpPr>
+          <p:cNvPr id="3" name="Shape 3"/>
+          <p:cNvSpPr txBox="1"/>
+          <p:nvPr/>
+        </p:nvSpPr>
+        <p:spPr>
+          <a:xfrm>
+            <a:off x="685800" y="866394"/>
+            <a:ext cx="10820095" cy="580644"/>
+          </a:xfrm>
+          <a:prstGeom prst="rect">
+            <a:avLst/>
+          </a:prstGeom>
+          <a:noFill/>
+          <a:ln>
+            <a:noFill/>
+          </a:ln>
+        </p:spPr>
+        <p:txBody>
+          <a:bodyPr wrap="square" lIns="36576" tIns="27432" rIns="36576" bIns="27432" anchor="t">
+            <a:noAutofit/>
+          </a:bodyPr>
+          <a:lstStyle/>
+          <a:p>
+            <a:pPr algn="l">
+              <a:lnSpc>
+                <a:spcPct val="100000"/>
+              </a:lnSpc>
+            </a:pPr>
+            <a:r>
+              <a:rPr lang="en-US" sz="3450" dirty="0" b="1">
+                <a:solidFill>
+                  <a:srgbClr val="16171D"/>
+                </a:solidFill>
+                <a:latin typeface="Segoe UI"/>
+                <a:cs typeface="Segoe UI"/>
+              </a:rPr>
+              <a:t xml:space="preserve">Rewrite as </a:t>
+            </a:r>
+            <a:r>
+              <a:rPr lang="en-US" sz="3450" dirty="0" b="1" i="1">
+                <a:solidFill>
+                  <a:srgbClr val="16171D"/>
+                </a:solidFill>
+                <a:latin typeface="Segoe UI"/>
+                <a:cs typeface="Segoe UI"/>
+              </a:rPr>
+              <a:t xml:space="preserve">y</a:t>
+            </a:r>
+            <a:r>
+              <a:rPr lang="en-US" sz="3450" dirty="0" b="1">
+                <a:solidFill>
+                  <a:srgbClr val="16171D"/>
+                </a:solidFill>
+                <a:latin typeface="Segoe UI"/>
+                <a:cs typeface="Segoe UI"/>
+              </a:rPr>
+              <a:t xml:space="preserve"> = </a:t>
+            </a:r>
+            <a:r>
+              <a:rPr lang="en-US" sz="3450" dirty="0" b="1" i="1">
+                <a:solidFill>
+                  <a:srgbClr val="16171D"/>
+                </a:solidFill>
+                <a:latin typeface="Segoe UI"/>
+                <a:cs typeface="Segoe UI"/>
+              </a:rPr>
+              <a:t xml:space="preserve">mx</a:t>
+            </a:r>
+            <a:r>
+              <a:rPr lang="en-US" sz="3450" dirty="0" b="1">
+                <a:solidFill>
+                  <a:srgbClr val="16171D"/>
+                </a:solidFill>
+                <a:latin typeface="Segoe UI"/>
+                <a:cs typeface="Segoe UI"/>
+              </a:rPr>
+              <a:t xml:space="preserve"> + </a:t>
+            </a:r>
+            <a:r>
+              <a:rPr lang="en-US" sz="3450" dirty="0" b="1" i="1">
+                <a:solidFill>
+                  <a:srgbClr val="16171D"/>
+                </a:solidFill>
+                <a:latin typeface="Segoe UI"/>
+                <a:cs typeface="Segoe UI"/>
+              </a:rPr>
+              <a:t xml:space="preserve">b</a:t>
+            </a:r>
+            <a:endParaRPr lang="en-US" sz="3450" dirty="0"/>
+          </a:p>
+        </p:txBody>
+      </p:sp>
+      <p:sp>
+        <p:nvSpPr>
+          <p:cNvPr id="4" name="Shape 4"/>
+          <p:cNvSpPr txBox="1"/>
+          <p:nvPr/>
+        </p:nvSpPr>
+        <p:spPr>
+          <a:xfrm>
+            <a:off x="685800" y="1618488"/>
+            <a:ext cx="10820095" cy="489204"/>
+          </a:xfrm>
+          <a:prstGeom prst="rect">
+            <a:avLst/>
+          </a:prstGeom>
+          <a:noFill/>
+          <a:ln>
+            <a:noFill/>
+          </a:ln>
+        </p:spPr>
+        <p:txBody>
+          <a:bodyPr wrap="square" lIns="36576" tIns="27432" rIns="36576" bIns="27432" anchor="t">
+            <a:noAutofit/>
+          </a:bodyPr>
+          <a:lstStyle/>
+          <a:p>
+            <a:pPr algn="l">
+              <a:lnSpc>
+                <a:spcPct val="100000"/>
+              </a:lnSpc>
+            </a:pPr>
+            <a:r>
+              <a:rPr lang="en-US" sz="2850" dirty="0" i="1">
+                <a:solidFill>
+                  <a:srgbClr val="16171D"/>
+                </a:solidFill>
+                <a:latin typeface="Cambria"/>
+                <a:cs typeface="Cambria"/>
+              </a:rPr>
+              <a:t xml:space="preserve">y</a:t>
+            </a:r>
+            <a:r>
+              <a:rPr lang="en-US" sz="2850" dirty="0">
+                <a:solidFill>
+                  <a:srgbClr val="16171D"/>
+                </a:solidFill>
+                <a:latin typeface="Cambria"/>
+                <a:cs typeface="Cambria"/>
+              </a:rPr>
+              <a:t xml:space="preserve"> − 3 = 5(</a:t>
+            </a:r>
+            <a:r>
+              <a:rPr lang="en-US" sz="2850" dirty="0" i="1">
+                <a:solidFill>
+                  <a:srgbClr val="16171D"/>
+                </a:solidFill>
+                <a:latin typeface="Cambria"/>
+                <a:cs typeface="Cambria"/>
+              </a:rPr>
+              <a:t xml:space="preserve">x</a:t>
+            </a:r>
+            <a:r>
+              <a:rPr lang="en-US" sz="2850" dirty="0">
+                <a:solidFill>
+                  <a:srgbClr val="16171D"/>
+                </a:solidFill>
+                <a:latin typeface="Cambria"/>
+                <a:cs typeface="Cambria"/>
+              </a:rPr>
+              <a:t xml:space="preserve"> + 2)</a:t>
+            </a:r>
+            <a:endParaRPr lang="en-US" sz="2850" dirty="0"/>
+          </a:p>
+        </p:txBody>
+      </p:sp>
+      <p:sp>
+        <p:nvSpPr>
+          <p:cNvPr id="5" name="Shape 5"/>
+          <p:cNvSpPr txBox="1"/>
+          <p:nvPr/>
+        </p:nvSpPr>
+        <p:spPr>
+          <a:xfrm>
+            <a:off x="685800" y="2279142"/>
+            <a:ext cx="10820095" cy="352044"/>
+          </a:xfrm>
+          <a:prstGeom prst="rect">
+            <a:avLst/>
+          </a:prstGeom>
+          <a:noFill/>
+          <a:ln>
+            <a:noFill/>
+          </a:ln>
+        </p:spPr>
+        <p:txBody>
+          <a:bodyPr wrap="square" lIns="36576" tIns="27432" rIns="36576" bIns="27432" anchor="t">
+            <a:noAutofit/>
+          </a:bodyPr>
+          <a:lstStyle/>
+          <a:p>
+            <a:pPr algn="l">
+              <a:lnSpc>
+                <a:spcPct val="100000"/>
+              </a:lnSpc>
+            </a:pPr>
+            <a:r>
+              <a:rPr lang="en-US" sz="1950" dirty="0">
+                <a:solidFill>
+                  <a:srgbClr val="16171D"/>
+                </a:solidFill>
+                <a:latin typeface="Segoe UI"/>
+                <a:cs typeface="Segoe UI"/>
+              </a:rPr>
+              <a:t xml:space="preserve">Step 1: distribute. </a:t>
+            </a:r>
+            <a:r>
+              <a:rPr lang="en-US" sz="1950" dirty="0" i="1">
+                <a:solidFill>
+                  <a:srgbClr val="16171D"/>
+                </a:solidFill>
+                <a:latin typeface="Segoe UI"/>
+                <a:cs typeface="Segoe UI"/>
+              </a:rPr>
+              <a:t xml:space="preserve">y</a:t>
+            </a:r>
+            <a:r>
+              <a:rPr lang="en-US" sz="1950" dirty="0">
+                <a:solidFill>
+                  <a:srgbClr val="16171D"/>
+                </a:solidFill>
+                <a:latin typeface="Segoe UI"/>
+                <a:cs typeface="Segoe UI"/>
+              </a:rPr>
+              <a:t xml:space="preserve"> − 3 = ____</a:t>
+            </a:r>
+            <a:endParaRPr lang="en-US" sz="1950" dirty="0"/>
+          </a:p>
+        </p:txBody>
+      </p:sp>
+      <p:sp>
+        <p:nvSpPr>
+          <p:cNvPr id="6" name="Shape 6"/>
+          <p:cNvSpPr txBox="1"/>
+          <p:nvPr/>
+        </p:nvSpPr>
+        <p:spPr>
+          <a:xfrm>
+            <a:off x="685800" y="2802636"/>
+            <a:ext cx="4400459" cy="518922"/>
+          </a:xfrm>
+          <a:prstGeom prst="roundRect">
+            <a:avLst>
+              <a:gd name="adj" fmla="val 8000"/>
+            </a:avLst>
+          </a:prstGeom>
+          <a:solidFill>
+            <a:srgbClr val="EDF5E9"/>
+          </a:solidFill>
+          <a:ln>
+            <a:noFill/>
+          </a:ln>
+        </p:spPr>
+        <p:txBody>
+          <a:bodyPr wrap="square" lIns="164592" tIns="64008" rIns="164592" bIns="64008" anchor="ctr">
+            <a:noAutofit/>
+          </a:bodyPr>
+          <a:lstStyle/>
+          <a:p>
+            <a:pPr algn="l">
+              <a:lnSpc>
+                <a:spcPct val="100000"/>
+              </a:lnSpc>
+            </a:pPr>
+            <a:r>
+              <a:rPr lang="en-US" sz="1125" dirty="0" b="1" spc="100">
+                <a:solidFill>
+                  <a:srgbClr val="4F8A3C"/>
+                </a:solidFill>
+                <a:latin typeface="Segoe UI"/>
+                <a:cs typeface="Segoe UI"/>
+              </a:rPr>
+              <a:t xml:space="preserve">ANSWER   </a:t>
+            </a:r>
+            <a:r>
+              <a:rPr lang="en-US" sz="2325" dirty="0" i="1">
+                <a:solidFill>
+                  <a:srgbClr val="16171D"/>
+                </a:solidFill>
+                <a:latin typeface="Cambria"/>
+                <a:cs typeface="Cambria"/>
+              </a:rPr>
+              <a:t xml:space="preserve">y</a:t>
+            </a:r>
+            <a:r>
+              <a:rPr lang="en-US" sz="2325" dirty="0">
+                <a:solidFill>
+                  <a:srgbClr val="16171D"/>
+                </a:solidFill>
+                <a:latin typeface="Cambria"/>
+                <a:cs typeface="Cambria"/>
+              </a:rPr>
+              <a:t xml:space="preserve"> − 3 = 5</a:t>
+            </a:r>
+            <a:r>
+              <a:rPr lang="en-US" sz="2325" dirty="0" i="1">
+                <a:solidFill>
+                  <a:srgbClr val="16171D"/>
+                </a:solidFill>
+                <a:latin typeface="Cambria"/>
+                <a:cs typeface="Cambria"/>
+              </a:rPr>
+              <a:t xml:space="preserve">x</a:t>
+            </a:r>
+            <a:r>
+              <a:rPr lang="en-US" sz="2325" dirty="0">
+                <a:solidFill>
+                  <a:srgbClr val="16171D"/>
+                </a:solidFill>
+                <a:latin typeface="Cambria"/>
+                <a:cs typeface="Cambria"/>
+              </a:rPr>
+              <a:t xml:space="preserve"> + 10</a:t>
+            </a:r>
+            <a:endParaRPr lang="en-US" sz="2325" dirty="0"/>
+          </a:p>
+        </p:txBody>
+      </p:sp>
+      <p:sp>
+        <p:nvSpPr>
+          <p:cNvPr id="7" name="Shape 7"/>
+          <p:cNvSpPr txBox="1"/>
+          <p:nvPr/>
+        </p:nvSpPr>
+        <p:spPr>
+          <a:xfrm>
+            <a:off x="685800" y="3493008"/>
+            <a:ext cx="10820095" cy="352044"/>
+          </a:xfrm>
+          <a:prstGeom prst="rect">
+            <a:avLst/>
+          </a:prstGeom>
+          <a:noFill/>
+          <a:ln>
+            <a:noFill/>
+          </a:ln>
+        </p:spPr>
+        <p:txBody>
+          <a:bodyPr wrap="square" lIns="36576" tIns="27432" rIns="36576" bIns="27432" anchor="t">
+            <a:noAutofit/>
+          </a:bodyPr>
+          <a:lstStyle/>
+          <a:p>
+            <a:pPr algn="l">
+              <a:lnSpc>
+                <a:spcPct val="100000"/>
+              </a:lnSpc>
+            </a:pPr>
+            <a:r>
+              <a:rPr lang="en-US" sz="1950" dirty="0">
+                <a:solidFill>
+                  <a:srgbClr val="16171D"/>
+                </a:solidFill>
+                <a:latin typeface="Segoe UI"/>
+                <a:cs typeface="Segoe UI"/>
+              </a:rPr>
+              <a:t xml:space="preserve">Step 2: add 3. </a:t>
+            </a:r>
+            <a:r>
+              <a:rPr lang="en-US" sz="1950" dirty="0" i="1">
+                <a:solidFill>
+                  <a:srgbClr val="16171D"/>
+                </a:solidFill>
+                <a:latin typeface="Segoe UI"/>
+                <a:cs typeface="Segoe UI"/>
+              </a:rPr>
+              <a:t xml:space="preserve">y</a:t>
+            </a:r>
+            <a:r>
+              <a:rPr lang="en-US" sz="1950" dirty="0">
+                <a:solidFill>
+                  <a:srgbClr val="16171D"/>
+                </a:solidFill>
+                <a:latin typeface="Segoe UI"/>
+                <a:cs typeface="Segoe UI"/>
+              </a:rPr>
+              <a:t xml:space="preserve"> = ____</a:t>
+            </a:r>
+            <a:endParaRPr lang="en-US" sz="1950" dirty="0"/>
+          </a:p>
+        </p:txBody>
+      </p:sp>
+      <p:sp>
+        <p:nvSpPr>
+          <p:cNvPr id="8" name="Shape 8"/>
+          <p:cNvSpPr txBox="1"/>
+          <p:nvPr/>
+        </p:nvSpPr>
+        <p:spPr>
+          <a:xfrm>
+            <a:off x="685800" y="4016502"/>
+            <a:ext cx="3737153" cy="518922"/>
+          </a:xfrm>
+          <a:prstGeom prst="roundRect">
+            <a:avLst>
+              <a:gd name="adj" fmla="val 8000"/>
+            </a:avLst>
+          </a:prstGeom>
+          <a:solidFill>
+            <a:srgbClr val="EDF5E9"/>
+          </a:solidFill>
+          <a:ln>
+            <a:noFill/>
+          </a:ln>
+        </p:spPr>
+        <p:txBody>
+          <a:bodyPr wrap="square" lIns="164592" tIns="64008" rIns="164592" bIns="64008" anchor="ctr">
+            <a:noAutofit/>
+          </a:bodyPr>
+          <a:lstStyle/>
+          <a:p>
+            <a:pPr algn="l">
+              <a:lnSpc>
+                <a:spcPct val="100000"/>
+              </a:lnSpc>
+            </a:pPr>
+            <a:r>
+              <a:rPr lang="en-US" sz="1125" dirty="0" b="1" spc="100">
+                <a:solidFill>
+                  <a:srgbClr val="4F8A3C"/>
+                </a:solidFill>
+                <a:latin typeface="Segoe UI"/>
+                <a:cs typeface="Segoe UI"/>
+              </a:rPr>
+              <a:t xml:space="preserve">ANSWER   </a:t>
+            </a:r>
+            <a:r>
+              <a:rPr lang="en-US" sz="2325" dirty="0" i="1">
+                <a:solidFill>
+                  <a:srgbClr val="16171D"/>
+                </a:solidFill>
+                <a:latin typeface="Cambria"/>
+                <a:cs typeface="Cambria"/>
+              </a:rPr>
+              <a:t xml:space="preserve">y</a:t>
+            </a:r>
+            <a:r>
+              <a:rPr lang="en-US" sz="2325" dirty="0">
+                <a:solidFill>
+                  <a:srgbClr val="16171D"/>
+                </a:solidFill>
+                <a:latin typeface="Cambria"/>
+                <a:cs typeface="Cambria"/>
+              </a:rPr>
+              <a:t xml:space="preserve"> = 5</a:t>
+            </a:r>
+            <a:r>
+              <a:rPr lang="en-US" sz="2325" dirty="0" i="1">
+                <a:solidFill>
+                  <a:srgbClr val="16171D"/>
+                </a:solidFill>
+                <a:latin typeface="Cambria"/>
+                <a:cs typeface="Cambria"/>
+              </a:rPr>
+              <a:t xml:space="preserve">x</a:t>
+            </a:r>
+            <a:r>
+              <a:rPr lang="en-US" sz="2325" dirty="0">
+                <a:solidFill>
+                  <a:srgbClr val="16171D"/>
+                </a:solidFill>
+                <a:latin typeface="Cambria"/>
+                <a:cs typeface="Cambria"/>
+              </a:rPr>
+              <a:t xml:space="preserve"> + 13</a:t>
+            </a:r>
+            <a:endParaRPr lang="en-US" sz="2325" dirty="0"/>
+          </a:p>
+        </p:txBody>
+      </p:sp>
+    </p:spTree>
+  </p:cSld>
+  <p:clrMapOvr>
+    <a:masterClrMapping/>
+  </p:clrMapOvr>
+  <p:transition spd="med">
+    <p:fade/>
+  </p:transition>
+  <p:timing>
+    <p:tnLst>
+      <p:par>
+        <p:cTn id="1" dur="indefinite" restart="never" nodeType="tmRoot">
+          <p:childTnLst>
+            <p:seq concurrent="1" nextAc="seek">
+              <p:cTn id="2" dur="indefinite" nodeType="mainSeq">
+                <p:childTnLst>
+                  <p:par>
+                    <p:cTn id="8" fill="hold">
+                      <p:stCondLst>
+                        <p:cond delay="indefinite"/>
+                      </p:stCondLst>
+                      <p:childTnLst>
+                        <p:par>
+                          <p:cTn id="9" fill="hold">
+                            <p:stCondLst>
+                              <p:cond delay="0"/>
+                            </p:stCondLst>
+                            <p:childTnLst>
+                              <p:par>
+                                <p:cTn id="7" presetID="53" presetClass="entr" presetSubtype="16" fill="hold" nodeType="clickEffect">
+                                  <p:stCondLst>
+                                    <p:cond delay="0"/>
+                                  </p:stCondLst>
+                                  <p:childTnLst>
+                                    <p:set>
+                                      <p:cBhvr>
+                                        <p:cTn id="3" dur="1" fill="hold">
+                                          <p:stCondLst>
+                                            <p:cond delay="0"/>
+                                          </p:stCondLst>
+                                        </p:cTn>
+                                        <p:tgtEl>
+                                          <p:spTgt spid="6"/>
+                                        </p:tgtEl>
+                                        <p:attrNameLst>
+                                          <p:attrName>style.visibility</p:attrName>
+                                        </p:attrNameLst>
+                                      </p:cBhvr>
+                                      <p:to>
+                                        <p:strVal val="visible"/>
+                                      </p:to>
+                                    </p:set>
+                                    <p:animEffect transition="in" filter="fade">
+                                      <p:cBhvr>
+                                        <p:cTn id="4" dur="500"/>
+                                        <p:tgtEl>
+                                          <p:spTgt spid="6"/>
+                                        </p:tgtEl>
+                                      </p:cBhvr>
+                                    </p:animEffect>
+                                    <p:anim calcmode="lin" valueType="num">
+                                      <p:cBhvr>
+                                        <p:cTn id="5" dur="500" fill="hold"/>
+                                        <p:tgtEl>
+                                          <p:spTgt spid="6"/>
+                                        </p:tgtEl>
+                                        <p:attrNameLst>
+                                          <p:attrName>ppt_w</p:attrName>
+                                        </p:attrNameLst>
+                                      </p:cBhvr>
+                                      <p:tavLst>
+                                        <p:tav tm="0">
+                                          <p:val>
+                                            <p:fltVal val="0"/>
+                                          </p:val>
+                                        </p:tav>
+                                        <p:tav tm="100000">
+                                          <p:val>
+                                            <p:strVal val="#ppt_w"/>
+                                          </p:val>
+                                        </p:tav>
+                                      </p:tavLst>
+                                    </p:anim>
+                                    <p:anim calcmode="lin" valueType="num">
+                                      <p:cBhvr>
+                                        <p:cTn id="6" dur="500" fill="hold"/>
+                                        <p:tgtEl>
+                                          <p:spTgt spid="6"/>
+                                        </p:tgtEl>
+                                        <p:attrNameLst>
+                                          <p:attrName>ppt_h</p:attrName>
+                                        </p:attrNameLst>
+                                      </p:cBhvr>
+                                      <p:tavLst>
+                                        <p:tav tm="0">
+                                          <p:val>
+                                            <p:fltVal val="0"/>
+                                          </p:val>
+                                        </p:tav>
+                                        <p:tav tm="100000">
+                                          <p:val>
+                                            <p:strVal val="#ppt_h"/>
+                                          </p:val>
+                                        </p:tav>
+                                      </p:tavLst>
+                                    </p:anim>
+                                  </p:childTnLst>
+                                </p:cTn>
+                              </p:par>
+                            </p:childTnLst>
+                          </p:cTn>
+                        </p:par>
+                      </p:childTnLst>
+                    </p:cTn>
+                  </p:par>
+                  <p:par>
+                    <p:cTn id="15" fill="hold">
+                      <p:stCondLst>
+                        <p:cond delay="indefinite"/>
+                      </p:stCondLst>
+                      <p:childTnLst>
+                        <p:par>
+                          <p:cTn id="16" fill="hold">
+                            <p:stCondLst>
+                              <p:cond delay="0"/>
+                            </p:stCondLst>
+                            <p:childTnLst>
+                              <p:par>
+                                <p:cTn id="14" presetID="53" presetClass="entr" presetSubtype="16" fill="hold" nodeType="clickEffect">
+                                  <p:stCondLst>
+                                    <p:cond delay="0"/>
+                                  </p:stCondLst>
+                                  <p:childTnLst>
+                                    <p:set>
+                                      <p:cBhvr>
+                                        <p:cTn id="10" dur="1" fill="hold">
+                                          <p:stCondLst>
+                                            <p:cond delay="0"/>
+                                          </p:stCondLst>
+                                        </p:cTn>
+                                        <p:tgtEl>
+                                          <p:spTgt spid="8"/>
+                                        </p:tgtEl>
+                                        <p:attrNameLst>
+                                          <p:attrName>style.visibility</p:attrName>
+                                        </p:attrNameLst>
+                                      </p:cBhvr>
+                                      <p:to>
+                                        <p:strVal val="visible"/>
+                                      </p:to>
+                                    </p:set>
+                                    <p:animEffect transition="in" filter="fade">
+                                      <p:cBhvr>
+                                        <p:cTn id="11" dur="500"/>
+                                        <p:tgtEl>
+                                          <p:spTgt spid="8"/>
+                                        </p:tgtEl>
+                                      </p:cBhvr>
+                                    </p:animEffect>
+                                    <p:anim calcmode="lin" valueType="num">
+                                      <p:cBhvr>
+                                        <p:cTn id="12" dur="500" fill="hold"/>
+                                        <p:tgtEl>
+                                          <p:spTgt spid="8"/>
+                                        </p:tgtEl>
+                                        <p:attrNameLst>
+                                          <p:attrName>ppt_w</p:attrName>
+                                        </p:attrNameLst>
+                                      </p:cBhvr>
+                                      <p:tavLst>
+                                        <p:tav tm="0">
+                                          <p:val>
+                                            <p:fltVal val="0"/>
+                                          </p:val>
+                                        </p:tav>
+                                        <p:tav tm="100000">
+                                          <p:val>
+                                            <p:strVal val="#ppt_w"/>
+                                          </p:val>
+                                        </p:tav>
+                                      </p:tavLst>
+                                    </p:anim>
+                                    <p:anim calcmode="lin" valueType="num">
+                                      <p:cBhvr>
+                                        <p:cTn id="13" dur="500" fill="hold"/>
+                                        <p:tgtEl>
+                                          <p:spTgt spid="8"/>
+                                        </p:tgtEl>
+                                        <p:attrNameLst>
+                                          <p:attrName>ppt_h</p:attrName>
+                                        </p:attrNameLst>
+                                      </p:cBhvr>
+                                      <p:tavLst>
+                                        <p:tav tm="0">
+                                          <p:val>
+                                            <p:fltVal val="0"/>
+                                          </p:val>
+                                        </p:tav>
+                                        <p:tav tm="100000">
+                                          <p:val>
+                                            <p:strVal val="#ppt_h"/>
+                                          </p:val>
+                                        </p:tav>
+                                      </p:tavLst>
+                                    </p:anim>
+                                  </p:childTnLst>
+                                </p:cTn>
+                              </p:par>
+                            </p:childTnLst>
+                          </p:cTn>
+                        </p:par>
+                      </p:childTnLst>
+                    </p:cTn>
+                  </p:par>
+                </p:childTnLst>
+              </p:cTn>
+              <p:prevCondLst>
+                <p:cond evt="onPrev" delay="0">
+                  <p:tgtEl>
+                    <p:sldTgt/>
+                  </p:tgtEl>
+                </p:cond>
+              </p:prevCondLst>
+              <p:nextCondLst>
+                <p:cond evt="onNext" delay="0">
+                  <p:tgtEl>
+                    <p:sldTgt/>
+                  </p:tgtEl>
+                </p:cond>
+              </p:nextCondLst>
+            </p:seq>
+          </p:childTnLst>
+        </p:cTn>
+      </p:par>
+    </p:tnLst>
+  </p:timing>
+</p:sld>
+</file>
+
+<file path=ppt/slides/slide12.xml><?xml version="1.0" encoding="utf-8"?>
+<p:sld xmlns:a="http://schemas.openxmlformats.org/drawingml/2006/main" xmlns:r="http://schemas.openxmlformats.org/officeDocument/2006/relationships" xmlns:p="http://schemas.openxmlformats.org/presentationml/2006/main">
+  <p:cSld>
+    <p:spTree>
+      <p:nvGrpSpPr>
+        <p:cNvPr id="1" name=""/>
+        <p:cNvGrpSpPr/>
+        <p:nvPr/>
+      </p:nvGrpSpPr>
+      <p:grpSpPr>
+        <a:xfrm>
+          <a:off x="0" y="0"/>
+          <a:ext cx="0" cy="0"/>
+          <a:chOff x="0" y="0"/>
+          <a:chExt cx="0" cy="0"/>
+        </a:xfrm>
+      </p:grpSpPr>
+      <p:sp>
+        <p:nvSpPr>
+          <p:cNvPr id="2" name="Shape 2"/>
+          <p:cNvSpPr txBox="1"/>
+          <p:nvPr/>
+        </p:nvSpPr>
+        <p:spPr>
+          <a:xfrm>
+            <a:off x="685800" y="457200"/>
+            <a:ext cx="10820095" cy="237744"/>
+          </a:xfrm>
+          <a:prstGeom prst="rect">
+            <a:avLst/>
+          </a:prstGeom>
+          <a:noFill/>
+          <a:ln>
+            <a:noFill/>
+          </a:ln>
+        </p:spPr>
+        <p:txBody>
+          <a:bodyPr wrap="square" lIns="36576" tIns="27432" rIns="36576" bIns="27432" anchor="t">
+            <a:noAutofit/>
+          </a:bodyPr>
+          <a:lstStyle/>
+          <a:p>
+            <a:pPr algn="l">
+              <a:lnSpc>
+                <a:spcPct val="100000"/>
+              </a:lnSpc>
+            </a:pPr>
+            <a:r>
+              <a:rPr lang="en-US" sz="1200" dirty="0" b="1" spc="150" cap="all">
+                <a:solidFill>
+                  <a:srgbClr val="5F6272"/>
+                </a:solidFill>
+                <a:latin typeface="Segoe UI"/>
+                <a:cs typeface="Segoe UI"/>
+              </a:rPr>
               <a:t xml:space="preserve">Lesson 4 · Horizontal and Vertical</a:t>
             </a:r>
             <a:endParaRPr lang="en-US" sz="1200" dirty="0"/>
@@ -4767,7 +6391,7 @@
 </p:sld>
 </file>
 
-<file path=ppt/slides/slide11.xml><?xml version="1.0" encoding="utf-8"?>
+<file path=ppt/slides/slide13.xml><?xml version="1.0" encoding="utf-8"?>
 <p:sld xmlns:a="http://schemas.openxmlformats.org/drawingml/2006/main" xmlns:r="http://schemas.openxmlformats.org/officeDocument/2006/relationships" xmlns:p="http://schemas.openxmlformats.org/presentationml/2006/main">
   <p:cSld>
     <p:spTree>
@@ -6114,7 +7738,7 @@
 </p:sld>
 </file>
 
-<file path=ppt/slides/slide12.xml><?xml version="1.0" encoding="utf-8"?>
+<file path=ppt/slides/slide14.xml><?xml version="1.0" encoding="utf-8"?>
 <p:sld xmlns:a="http://schemas.openxmlformats.org/drawingml/2006/main" xmlns:r="http://schemas.openxmlformats.org/officeDocument/2006/relationships" xmlns:p="http://schemas.openxmlformats.org/presentationml/2006/main">
   <p:cSld>
     <p:spTree>
@@ -7113,7 +8737,7 @@
 </p:sld>
 </file>
 
-<file path=ppt/slides/slide13.xml><?xml version="1.0" encoding="utf-8"?>
+<file path=ppt/slides/slide15.xml><?xml version="1.0" encoding="utf-8"?>
 <p:sld xmlns:a="http://schemas.openxmlformats.org/drawingml/2006/main" xmlns:r="http://schemas.openxmlformats.org/officeDocument/2006/relationships" xmlns:p="http://schemas.openxmlformats.org/presentationml/2006/main">
   <p:cSld>
     <p:spTree>
@@ -7446,7 +9070,7 @@
                 <a:latin typeface="Segoe UI"/>
                 <a:cs typeface="Segoe UI"/>
               </a:rPr>
-              <a:t xml:space="preserve">Lesson 4 · Vocabulary</a:t>
+              <a:t xml:space="preserve">Day 1 · Bell Work · Review</a:t>
             </a:r>
             <a:endParaRPr lang="en-US" sz="1200" dirty="0"/>
           </a:p>
@@ -7490,7 +9114,7 @@
                 <a:latin typeface="Segoe UI"/>
                 <a:cs typeface="Segoe UI"/>
               </a:rPr>
-              <a:t xml:space="preserve">Words we need</a:t>
+              <a:t xml:space="preserve">Warm up: work these on your own</a:t>
             </a:r>
             <a:endParaRPr lang="en-US" sz="3450" dirty="0"/>
           </a:p>
@@ -7498,14 +9122,58 @@
       </p:sp>
       <p:sp>
         <p:nvSpPr>
-          <p:cNvPr id="7" name="Shape 7"/>
-          <p:cNvSpPr txBox="1"/>
-          <p:nvPr/>
-        </p:nvSpPr>
-        <p:spPr>
-          <a:xfrm>
-            <a:off x="685800" y="1618488"/>
-            <a:ext cx="3492398" cy="1966722"/>
+          <p:cNvPr id="4" name="Shape 4"/>
+          <p:cNvSpPr txBox="1"/>
+          <p:nvPr/>
+        </p:nvSpPr>
+        <p:spPr>
+          <a:xfrm>
+            <a:off x="685800" y="1675638"/>
+            <a:ext cx="5143348" cy="352044"/>
+          </a:xfrm>
+          <a:prstGeom prst="rect">
+            <a:avLst/>
+          </a:prstGeom>
+          <a:noFill/>
+          <a:ln>
+            <a:noFill/>
+          </a:ln>
+        </p:spPr>
+        <p:txBody>
+          <a:bodyPr wrap="square" lIns="36576" tIns="27432" rIns="36576" bIns="27432" anchor="t">
+            <a:noAutofit/>
+          </a:bodyPr>
+          <a:lstStyle/>
+          <a:p>
+            <a:pPr algn="l">
+              <a:lnSpc>
+                <a:spcPct val="100000"/>
+              </a:lnSpc>
+            </a:pPr>
+            <a:r>
+              <a:rPr lang="en-US" sz="1950" dirty="0">
+                <a:solidFill>
+                  <a:srgbClr val="16171D"/>
+                </a:solidFill>
+                <a:latin typeface="Segoe UI"/>
+                <a:cs typeface="Segoe UI"/>
+              </a:rPr>
+              <a:t xml:space="preserve">1. Slope through (1, 3) and (4, 9)?</a:t>
+            </a:r>
+            <a:endParaRPr lang="en-US" sz="1950" dirty="0"/>
+          </a:p>
+        </p:txBody>
+      </p:sp>
+      <p:sp>
+        <p:nvSpPr>
+          <p:cNvPr id="5" name="Shape 5"/>
+          <p:cNvSpPr txBox="1"/>
+          <p:nvPr/>
+        </p:nvSpPr>
+        <p:spPr>
+          <a:xfrm>
+            <a:off x="685800" y="2161032"/>
+            <a:ext cx="5143348" cy="873252"/>
           </a:xfrm>
           <a:prstGeom prst="roundRect">
             <a:avLst>
@@ -7513,16 +9181,14 @@
             </a:avLst>
           </a:prstGeom>
           <a:solidFill>
-            <a:srgbClr val="FFFFFF"/>
+            <a:srgbClr val="EDF5E9"/>
           </a:solidFill>
-          <a:ln w="12700">
-            <a:solidFill>
-              <a:srgbClr val="E3E4EC"/>
-            </a:solidFill>
-          </a:ln>
-        </p:spPr>
-        <p:txBody>
-          <a:bodyPr wrap="square" lIns="36576" tIns="27432" rIns="36576" bIns="27432" anchor="t">
+          <a:ln>
+            <a:noFill/>
+          </a:ln>
+        </p:spPr>
+        <p:txBody>
+          <a:bodyPr wrap="square" lIns="164592" tIns="64008" rIns="164592" bIns="64008" anchor="ctr">
             <a:noAutofit/>
           </a:bodyPr>
           <a:lstStyle/>
@@ -7532,20 +9198,170 @@
                 <a:spcPct val="100000"/>
               </a:lnSpc>
             </a:pPr>
-            <a:endParaRPr lang="en-US" sz="1950" dirty="0"/>
-          </a:p>
-        </p:txBody>
-      </p:sp>
-      <p:sp>
-        <p:nvSpPr>
-          <p:cNvPr id="4" name="Shape 4"/>
-          <p:cNvSpPr txBox="1"/>
-          <p:nvPr/>
-        </p:nvSpPr>
-        <p:spPr>
-          <a:xfrm>
-            <a:off x="895350" y="1789938"/>
-            <a:ext cx="3073298" cy="374904"/>
+            <a:r>
+              <a:rPr lang="en-US" sz="1125" dirty="0" b="1" spc="100">
+                <a:solidFill>
+                  <a:srgbClr val="4F8A3C"/>
+                </a:solidFill>
+                <a:latin typeface="Segoe UI"/>
+                <a:cs typeface="Segoe UI"/>
+              </a:rPr>
+              <a:t xml:space="preserve">ANSWER   </a:t>
+            </a:r>
+            <a:r>
+              <a:rPr lang="en-US" sz="2325" dirty="0" i="1">
+                <a:solidFill>
+                  <a:srgbClr val="16171D"/>
+                </a:solidFill>
+                <a:latin typeface="Cambria"/>
+                <a:cs typeface="Cambria"/>
+              </a:rPr>
+              <a:t xml:space="preserve">m</a:t>
+            </a:r>
+            <a:r>
+              <a:rPr lang="en-US" sz="2325" dirty="0">
+                <a:solidFill>
+                  <a:srgbClr val="16171D"/>
+                </a:solidFill>
+                <a:latin typeface="Cambria"/>
+                <a:cs typeface="Cambria"/>
+              </a:rPr>
+              <a:t xml:space="preserve"> = </a:t>
+            </a:r>
+            <a:r>
+              <a:rPr lang="en-US" sz="2325" dirty="0">
+                <a:solidFill>
+                  <a:srgbClr val="16171D"/>
+                </a:solidFill>
+                <a:latin typeface="Cambria"/>
+                <a:cs typeface="Cambria"/>
+              </a:rPr>
+              <a:t xml:space="preserve">(</a:t>
+            </a:r>
+            <a:r>
+              <a:rPr lang="en-US" sz="2325" dirty="0">
+                <a:solidFill>
+                  <a:srgbClr val="16171D"/>
+                </a:solidFill>
+                <a:latin typeface="Cambria"/>
+                <a:cs typeface="Cambria"/>
+              </a:rPr>
+              <a:t xml:space="preserve">9 − 3</a:t>
+            </a:r>
+            <a:r>
+              <a:rPr lang="en-US" sz="2325" dirty="0">
+                <a:solidFill>
+                  <a:srgbClr val="16171D"/>
+                </a:solidFill>
+                <a:latin typeface="Cambria"/>
+                <a:cs typeface="Cambria"/>
+              </a:rPr>
+              <a:t xml:space="preserve">)</a:t>
+            </a:r>
+            <a:r>
+              <a:rPr lang="en-US" sz="2325" dirty="0">
+                <a:solidFill>
+                  <a:srgbClr val="16171D"/>
+                </a:solidFill>
+                <a:latin typeface="Cambria"/>
+                <a:cs typeface="Cambria"/>
+              </a:rPr>
+              <a:t xml:space="preserve">/</a:t>
+            </a:r>
+            <a:r>
+              <a:rPr lang="en-US" sz="2325" dirty="0">
+                <a:solidFill>
+                  <a:srgbClr val="16171D"/>
+                </a:solidFill>
+                <a:latin typeface="Cambria"/>
+                <a:cs typeface="Cambria"/>
+              </a:rPr>
+              <a:t xml:space="preserve">(</a:t>
+            </a:r>
+            <a:r>
+              <a:rPr lang="en-US" sz="2325" dirty="0">
+                <a:solidFill>
+                  <a:srgbClr val="16171D"/>
+                </a:solidFill>
+                <a:latin typeface="Cambria"/>
+                <a:cs typeface="Cambria"/>
+              </a:rPr>
+              <a:t xml:space="preserve">4 − 1</a:t>
+            </a:r>
+            <a:r>
+              <a:rPr lang="en-US" sz="2325" dirty="0">
+                <a:solidFill>
+                  <a:srgbClr val="16171D"/>
+                </a:solidFill>
+                <a:latin typeface="Cambria"/>
+                <a:cs typeface="Cambria"/>
+              </a:rPr>
+              <a:t xml:space="preserve">)</a:t>
+            </a:r>
+            <a:r>
+              <a:rPr lang="en-US" sz="2325" dirty="0">
+                <a:solidFill>
+                  <a:srgbClr val="16171D"/>
+                </a:solidFill>
+                <a:latin typeface="Cambria"/>
+                <a:cs typeface="Cambria"/>
+              </a:rPr>
+              <a:t xml:space="preserve"> = </a:t>
+            </a:r>
+            <a:r>
+              <a:rPr lang="en-US" sz="2325" dirty="0">
+                <a:solidFill>
+                  <a:srgbClr val="16171D"/>
+                </a:solidFill>
+                <a:latin typeface="Cambria"/>
+                <a:cs typeface="Cambria"/>
+              </a:rPr>
+              <a:t xml:space="preserve">6</a:t>
+            </a:r>
+            <a:r>
+              <a:rPr lang="en-US" sz="2325" dirty="0">
+                <a:solidFill>
+                  <a:srgbClr val="16171D"/>
+                </a:solidFill>
+                <a:latin typeface="Cambria"/>
+                <a:cs typeface="Cambria"/>
+              </a:rPr>
+              <a:t xml:space="preserve">/</a:t>
+            </a:r>
+            <a:r>
+              <a:rPr lang="en-US" sz="2325" dirty="0">
+                <a:solidFill>
+                  <a:srgbClr val="16171D"/>
+                </a:solidFill>
+                <a:latin typeface="Cambria"/>
+                <a:cs typeface="Cambria"/>
+              </a:rPr>
+              <a:t xml:space="preserve">3</a:t>
+            </a:r>
+            <a:r>
+              <a:rPr lang="en-US" sz="2325" dirty="0">
+                <a:solidFill>
+                  <a:srgbClr val="16171D"/>
+                </a:solidFill>
+                <a:latin typeface="Cambria"/>
+                <a:cs typeface="Cambria"/>
+              </a:rPr>
+              <a:t xml:space="preserve"> = 2</a:t>
+            </a:r>
+            <a:endParaRPr lang="en-US" sz="2325" dirty="0"/>
+          </a:p>
+        </p:txBody>
+      </p:sp>
+      <p:sp>
+        <p:nvSpPr>
+          <p:cNvPr id="6" name="Shape 6"/>
+          <p:cNvSpPr txBox="1"/>
+          <p:nvPr/>
+        </p:nvSpPr>
+        <p:spPr>
+          <a:xfrm>
+            <a:off x="685800" y="3300984"/>
+            <a:ext cx="5143348" cy="352044"/>
           </a:xfrm>
           <a:prstGeom prst="rect">
             <a:avLst/>
@@ -7567,237 +9383,89 @@
               </a:lnSpc>
             </a:pPr>
             <a:r>
-              <a:rPr lang="en-US" sz="2100" dirty="0" b="1">
-                <a:solidFill>
-                  <a:srgbClr val="16171D"/>
-                </a:solidFill>
-                <a:latin typeface="Segoe UI"/>
-                <a:cs typeface="Segoe UI"/>
-              </a:rPr>
-              <a:t xml:space="preserve">Slope (</a:t>
-            </a:r>
-            <a:r>
-              <a:rPr lang="en-US" sz="2100" dirty="0" b="1" i="1">
-                <a:solidFill>
-                  <a:srgbClr val="16171D"/>
-                </a:solidFill>
-                <a:latin typeface="Segoe UI"/>
-                <a:cs typeface="Segoe UI"/>
-              </a:rPr>
-              <a:t xml:space="preserve">m</a:t>
-            </a:r>
-            <a:r>
-              <a:rPr lang="en-US" sz="2100" dirty="0" b="1">
-                <a:solidFill>
-                  <a:srgbClr val="16171D"/>
-                </a:solidFill>
-                <a:latin typeface="Segoe UI"/>
-                <a:cs typeface="Segoe UI"/>
-              </a:rPr>
-              <a:t xml:space="preserve">)</a:t>
-            </a:r>
-            <a:endParaRPr lang="en-US" sz="2100" dirty="0"/>
-          </a:p>
-        </p:txBody>
-      </p:sp>
-      <p:sp>
-        <p:nvSpPr>
-          <p:cNvPr id="5" name="Shape 5"/>
-          <p:cNvSpPr txBox="1"/>
-          <p:nvPr/>
-        </p:nvSpPr>
-        <p:spPr>
-          <a:xfrm>
-            <a:off x="895350" y="2260092"/>
-            <a:ext cx="3073298" cy="294894"/>
-          </a:xfrm>
-          <a:prstGeom prst="rect">
-            <a:avLst/>
-          </a:prstGeom>
-          <a:noFill/>
-          <a:ln>
-            <a:noFill/>
-          </a:ln>
-        </p:spPr>
-        <p:txBody>
-          <a:bodyPr wrap="square" lIns="36576" tIns="27432" rIns="36576" bIns="27432" anchor="t">
-            <a:noAutofit/>
-          </a:bodyPr>
-          <a:lstStyle/>
-          <a:p>
-            <a:pPr algn="l">
-              <a:lnSpc>
-                <a:spcPct val="100000"/>
-              </a:lnSpc>
-            </a:pPr>
-            <a:r>
-              <a:rPr lang="en-US" sz="1575" dirty="0">
-                <a:solidFill>
-                  <a:srgbClr val="16171D"/>
-                </a:solidFill>
-                <a:latin typeface="Segoe UI"/>
-                <a:cs typeface="Segoe UI"/>
-              </a:rPr>
-              <a:t xml:space="preserve">How steep the line is.</a:t>
-            </a:r>
-            <a:endParaRPr lang="en-US" sz="1575" dirty="0"/>
-          </a:p>
-        </p:txBody>
-      </p:sp>
-      <p:sp>
-        <p:nvSpPr>
-          <p:cNvPr id="6" name="Shape 6"/>
-          <p:cNvSpPr txBox="1"/>
-          <p:nvPr/>
-        </p:nvSpPr>
-        <p:spPr>
-          <a:xfrm>
-            <a:off x="895350" y="2650236"/>
-            <a:ext cx="3073298" cy="763524"/>
-          </a:xfrm>
-          <a:prstGeom prst="rect">
-            <a:avLst/>
-          </a:prstGeom>
-          <a:noFill/>
-          <a:ln>
-            <a:noFill/>
-          </a:ln>
-        </p:spPr>
-        <p:txBody>
-          <a:bodyPr wrap="square" lIns="36576" tIns="27432" rIns="36576" bIns="27432" anchor="t">
-            <a:noAutofit/>
-          </a:bodyPr>
-          <a:lstStyle/>
-          <a:p>
-            <a:pPr algn="l">
-              <a:lnSpc>
-                <a:spcPct val="100000"/>
-              </a:lnSpc>
-            </a:pPr>
-            <a:r>
-              <a:rPr lang="en-US" sz="2325" dirty="0" i="1">
-                <a:solidFill>
-                  <a:srgbClr val="16171D"/>
-                </a:solidFill>
-                <a:latin typeface="Cambria"/>
-                <a:cs typeface="Cambria"/>
-              </a:rPr>
-              <a:t xml:space="preserve">m</a:t>
-            </a:r>
-            <a:r>
-              <a:rPr lang="en-US" sz="2325" dirty="0">
-                <a:solidFill>
-                  <a:srgbClr val="16171D"/>
-                </a:solidFill>
-                <a:latin typeface="Cambria"/>
-                <a:cs typeface="Cambria"/>
-              </a:rPr>
-              <a:t xml:space="preserve"> = </a:t>
-            </a:r>
-            <a:r>
-              <a:rPr lang="en-US" sz="2325" dirty="0">
-                <a:solidFill>
-                  <a:srgbClr val="16171D"/>
-                </a:solidFill>
-                <a:latin typeface="Cambria"/>
-                <a:cs typeface="Cambria"/>
-              </a:rPr>
-              <a:t xml:space="preserve">(</a:t>
-            </a:r>
-            <a:r>
-              <a:rPr lang="en-US" sz="2325" dirty="0">
-                <a:solidFill>
-                  <a:srgbClr val="16171D"/>
-                </a:solidFill>
-                <a:latin typeface="Cambria"/>
-                <a:cs typeface="Cambria"/>
-              </a:rPr>
-              <a:t xml:space="preserve">change in </a:t>
-            </a:r>
-            <a:r>
-              <a:rPr lang="en-US" sz="2325" dirty="0" i="1">
-                <a:solidFill>
-                  <a:srgbClr val="16171D"/>
-                </a:solidFill>
-                <a:latin typeface="Cambria"/>
-                <a:cs typeface="Cambria"/>
+              <a:rPr lang="en-US" sz="1950" dirty="0">
+                <a:solidFill>
+                  <a:srgbClr val="16171D"/>
+                </a:solidFill>
+                <a:latin typeface="Segoe UI"/>
+                <a:cs typeface="Segoe UI"/>
+              </a:rPr>
+              <a:t xml:space="preserve">2. Slope and </a:t>
+            </a:r>
+            <a:r>
+              <a:rPr lang="en-US" sz="1950" dirty="0" i="1">
+                <a:solidFill>
+                  <a:srgbClr val="16171D"/>
+                </a:solidFill>
+                <a:latin typeface="Segoe UI"/>
+                <a:cs typeface="Segoe UI"/>
               </a:rPr>
               <a:t xml:space="preserve">y</a:t>
             </a:r>
             <a:r>
-              <a:rPr lang="en-US" sz="2325" dirty="0">
-                <a:solidFill>
-                  <a:srgbClr val="16171D"/>
-                </a:solidFill>
-                <a:latin typeface="Cambria"/>
-                <a:cs typeface="Cambria"/>
-              </a:rPr>
-              <a:t xml:space="preserve">)</a:t>
-            </a:r>
-            <a:r>
-              <a:rPr lang="en-US" sz="2325" dirty="0">
-                <a:solidFill>
-                  <a:srgbClr val="16171D"/>
-                </a:solidFill>
-                <a:latin typeface="Cambria"/>
-                <a:cs typeface="Cambria"/>
-              </a:rPr>
-              <a:t xml:space="preserve">/</a:t>
-            </a:r>
-            <a:r>
-              <a:rPr lang="en-US" sz="2325" dirty="0">
-                <a:solidFill>
-                  <a:srgbClr val="16171D"/>
-                </a:solidFill>
-                <a:latin typeface="Cambria"/>
-                <a:cs typeface="Cambria"/>
-              </a:rPr>
-              <a:t xml:space="preserve">(</a:t>
-            </a:r>
-            <a:r>
-              <a:rPr lang="en-US" sz="2325" dirty="0">
-                <a:solidFill>
-                  <a:srgbClr val="16171D"/>
-                </a:solidFill>
-                <a:latin typeface="Cambria"/>
-                <a:cs typeface="Cambria"/>
-              </a:rPr>
-              <a:t xml:space="preserve">change in </a:t>
-            </a:r>
-            <a:r>
-              <a:rPr lang="en-US" sz="2325" dirty="0" i="1">
-                <a:solidFill>
-                  <a:srgbClr val="16171D"/>
-                </a:solidFill>
-                <a:latin typeface="Cambria"/>
-                <a:cs typeface="Cambria"/>
+              <a:rPr lang="en-US" sz="1950" dirty="0">
+                <a:solidFill>
+                  <a:srgbClr val="16171D"/>
+                </a:solidFill>
+                <a:latin typeface="Segoe UI"/>
+                <a:cs typeface="Segoe UI"/>
+              </a:rPr>
+              <a:t xml:space="preserve">-intercept of </a:t>
+            </a:r>
+            <a:r>
+              <a:rPr lang="en-US" sz="1950" dirty="0" i="1">
+                <a:solidFill>
+                  <a:srgbClr val="16171D"/>
+                </a:solidFill>
+                <a:latin typeface="Segoe UI"/>
+                <a:cs typeface="Segoe UI"/>
+              </a:rPr>
+              <a:t xml:space="preserve">y</a:t>
+            </a:r>
+            <a:r>
+              <a:rPr lang="en-US" sz="1950" dirty="0">
+                <a:solidFill>
+                  <a:srgbClr val="16171D"/>
+                </a:solidFill>
+                <a:latin typeface="Segoe UI"/>
+                <a:cs typeface="Segoe UI"/>
+              </a:rPr>
+              <a:t xml:space="preserve"> = −3</a:t>
+            </a:r>
+            <a:r>
+              <a:rPr lang="en-US" sz="1950" dirty="0" i="1">
+                <a:solidFill>
+                  <a:srgbClr val="16171D"/>
+                </a:solidFill>
+                <a:latin typeface="Segoe UI"/>
+                <a:cs typeface="Segoe UI"/>
               </a:rPr>
               <a:t xml:space="preserve">x</a:t>
             </a:r>
             <a:r>
-              <a:rPr lang="en-US" sz="2325" dirty="0">
-                <a:solidFill>
-                  <a:srgbClr val="16171D"/>
-                </a:solidFill>
-                <a:latin typeface="Cambria"/>
-                <a:cs typeface="Cambria"/>
-              </a:rPr>
-              <a:t xml:space="preserve">)</a:t>
-            </a:r>
-            <a:endParaRPr lang="en-US" sz="2325" dirty="0"/>
-          </a:p>
-        </p:txBody>
-      </p:sp>
-      <p:sp>
-        <p:nvSpPr>
-          <p:cNvPr id="11" name="Shape 11"/>
-          <p:cNvSpPr txBox="1"/>
-          <p:nvPr/>
-        </p:nvSpPr>
-        <p:spPr>
-          <a:xfrm>
-            <a:off x="4349648" y="1618488"/>
-            <a:ext cx="3492398" cy="1966722"/>
+              <a:rPr lang="en-US" sz="1950" dirty="0">
+                <a:solidFill>
+                  <a:srgbClr val="16171D"/>
+                </a:solidFill>
+                <a:latin typeface="Segoe UI"/>
+                <a:cs typeface="Segoe UI"/>
+              </a:rPr>
+              <a:t xml:space="preserve"> + 5?</a:t>
+            </a:r>
+            <a:endParaRPr lang="en-US" sz="1950" dirty="0"/>
+          </a:p>
+        </p:txBody>
+      </p:sp>
+      <p:sp>
+        <p:nvSpPr>
+          <p:cNvPr id="7" name="Shape 7"/>
+          <p:cNvSpPr txBox="1"/>
+          <p:nvPr/>
+        </p:nvSpPr>
+        <p:spPr>
+          <a:xfrm>
+            <a:off x="685800" y="3786378"/>
+            <a:ext cx="4234632" cy="518922"/>
           </a:xfrm>
           <a:prstGeom prst="roundRect">
             <a:avLst>
@@ -7805,16 +9473,14 @@
             </a:avLst>
           </a:prstGeom>
           <a:solidFill>
-            <a:srgbClr val="FFFFFF"/>
+            <a:srgbClr val="EDF5E9"/>
           </a:solidFill>
-          <a:ln w="12700">
-            <a:solidFill>
-              <a:srgbClr val="E3E4EC"/>
-            </a:solidFill>
-          </a:ln>
-        </p:spPr>
-        <p:txBody>
-          <a:bodyPr wrap="square" lIns="36576" tIns="27432" rIns="36576" bIns="27432" anchor="t">
+          <a:ln>
+            <a:noFill/>
+          </a:ln>
+        </p:spPr>
+        <p:txBody>
+          <a:bodyPr wrap="square" lIns="164592" tIns="64008" rIns="164592" bIns="64008" anchor="ctr">
             <a:noAutofit/>
           </a:bodyPr>
           <a:lstStyle/>
@@ -7824,7 +9490,37 @@
                 <a:spcPct val="100000"/>
               </a:lnSpc>
             </a:pPr>
-            <a:endParaRPr lang="en-US" sz="1950" dirty="0"/>
+            <a:r>
+              <a:rPr lang="en-US" sz="1125" dirty="0" b="1" spc="100">
+                <a:solidFill>
+                  <a:srgbClr val="4F8A3C"/>
+                </a:solidFill>
+                <a:latin typeface="Segoe UI"/>
+                <a:cs typeface="Segoe UI"/>
+              </a:rPr>
+              <a:t xml:space="preserve">ANSWER   </a:t>
+            </a:r>
+            <a:r>
+              <a:rPr lang="en-US" sz="2325" dirty="0" i="1">
+                <a:solidFill>
+                  <a:srgbClr val="16171D"/>
+                </a:solidFill>
+                <a:latin typeface="Cambria"/>
+                <a:cs typeface="Cambria"/>
+              </a:rPr>
+              <a:t xml:space="preserve">m</a:t>
+            </a:r>
+            <a:r>
+              <a:rPr lang="en-US" sz="2325" dirty="0">
+                <a:solidFill>
+                  <a:srgbClr val="16171D"/>
+                </a:solidFill>
+                <a:latin typeface="Cambria"/>
+                <a:cs typeface="Cambria"/>
+              </a:rPr>
+              <a:t xml:space="preserve"> = −3, (0, 5)</a:t>
+            </a:r>
+            <a:endParaRPr lang="en-US" sz="2325" dirty="0"/>
           </a:p>
         </p:txBody>
       </p:sp>
@@ -7836,8 +9532,8 @@
         </p:nvSpPr>
         <p:spPr>
           <a:xfrm>
-            <a:off x="4559198" y="1789938"/>
-            <a:ext cx="3073298" cy="374904"/>
+            <a:off x="6362548" y="1675638"/>
+            <a:ext cx="5143348" cy="649224"/>
           </a:xfrm>
           <a:prstGeom prst="rect">
             <a:avLst/>
@@ -7859,16 +9555,36 @@
               </a:lnSpc>
             </a:pPr>
             <a:r>
-              <a:rPr lang="en-US" sz="2100" dirty="0" b="1">
-                <a:solidFill>
-                  <a:srgbClr val="16171D"/>
-                </a:solidFill>
-                <a:latin typeface="Segoe UI"/>
-                <a:cs typeface="Segoe UI"/>
-              </a:rPr>
-              <a:t xml:space="preserve">A point</a:t>
-            </a:r>
-            <a:endParaRPr lang="en-US" sz="2100" dirty="0"/>
+              <a:rPr lang="en-US" sz="1950" dirty="0">
+                <a:solidFill>
+                  <a:srgbClr val="16171D"/>
+                </a:solidFill>
+                <a:latin typeface="Segoe UI"/>
+                <a:cs typeface="Segoe UI"/>
+              </a:rPr>
+              <a:t xml:space="preserve">3. Line with slope 4 and </a:t>
+            </a:r>
+            <a:r>
+              <a:rPr lang="en-US" sz="1950" dirty="0" i="1">
+                <a:solidFill>
+                  <a:srgbClr val="16171D"/>
+                </a:solidFill>
+                <a:latin typeface="Segoe UI"/>
+                <a:cs typeface="Segoe UI"/>
+              </a:rPr>
+              <a:t xml:space="preserve">y</a:t>
+            </a:r>
+            <a:r>
+              <a:rPr lang="en-US" sz="1950" dirty="0">
+                <a:solidFill>
+                  <a:srgbClr val="16171D"/>
+                </a:solidFill>
+                <a:latin typeface="Segoe UI"/>
+                <a:cs typeface="Segoe UI"/>
+              </a:rPr>
+              <a:t xml:space="preserve">-intercept (0, −2)?</a:t>
+            </a:r>
+            <a:endParaRPr lang="en-US" sz="1950" dirty="0"/>
           </a:p>
         </p:txBody>
       </p:sp>
@@ -7880,176 +9596,8 @@
         </p:nvSpPr>
         <p:spPr>
           <a:xfrm>
-            <a:off x="4559198" y="2260092"/>
-            <a:ext cx="3073298" cy="534924"/>
-          </a:xfrm>
-          <a:prstGeom prst="rect">
-            <a:avLst/>
-          </a:prstGeom>
-          <a:noFill/>
-          <a:ln>
-            <a:noFill/>
-          </a:ln>
-        </p:spPr>
-        <p:txBody>
-          <a:bodyPr wrap="square" lIns="36576" tIns="27432" rIns="36576" bIns="27432" anchor="t">
-            <a:noAutofit/>
-          </a:bodyPr>
-          <a:lstStyle/>
-          <a:p>
-            <a:pPr algn="l">
-              <a:lnSpc>
-                <a:spcPct val="100000"/>
-              </a:lnSpc>
-            </a:pPr>
-            <a:r>
-              <a:rPr lang="en-US" sz="1575" dirty="0">
-                <a:solidFill>
-                  <a:srgbClr val="16171D"/>
-                </a:solidFill>
-                <a:latin typeface="Segoe UI"/>
-                <a:cs typeface="Segoe UI"/>
-              </a:rPr>
-              <a:t xml:space="preserve">A place on the line, written (</a:t>
-            </a:r>
-            <a:r>
-              <a:rPr lang="en-US" sz="1575" dirty="0" i="1">
-                <a:solidFill>
-                  <a:srgbClr val="16171D"/>
-                </a:solidFill>
-                <a:latin typeface="Segoe UI"/>
-                <a:cs typeface="Segoe UI"/>
-              </a:rPr>
-              <a:t xml:space="preserve">x</a:t>
-            </a:r>
-            <a:r>
-              <a:rPr lang="en-US" sz="1575" dirty="0">
-                <a:solidFill>
-                  <a:srgbClr val="16171D"/>
-                </a:solidFill>
-                <a:latin typeface="Segoe UI"/>
-                <a:cs typeface="Segoe UI"/>
-              </a:rPr>
-              <a:t xml:space="preserve">, </a:t>
-            </a:r>
-            <a:r>
-              <a:rPr lang="en-US" sz="1575" dirty="0" i="1">
-                <a:solidFill>
-                  <a:srgbClr val="16171D"/>
-                </a:solidFill>
-                <a:latin typeface="Segoe UI"/>
-                <a:cs typeface="Segoe UI"/>
-              </a:rPr>
-              <a:t xml:space="preserve">y</a:t>
-            </a:r>
-            <a:r>
-              <a:rPr lang="en-US" sz="1575" dirty="0">
-                <a:solidFill>
-                  <a:srgbClr val="16171D"/>
-                </a:solidFill>
-                <a:latin typeface="Segoe UI"/>
-                <a:cs typeface="Segoe UI"/>
-              </a:rPr>
-              <a:t xml:space="preserve">).</a:t>
-            </a:r>
-            <a:endParaRPr lang="en-US" sz="1575" dirty="0"/>
-          </a:p>
-        </p:txBody>
-      </p:sp>
-      <p:sp>
-        <p:nvSpPr>
-          <p:cNvPr id="10" name="Shape 10"/>
-          <p:cNvSpPr txBox="1"/>
-          <p:nvPr/>
-        </p:nvSpPr>
-        <p:spPr>
-          <a:xfrm>
-            <a:off x="4559198" y="2890266"/>
-            <a:ext cx="3073298" cy="409194"/>
-          </a:xfrm>
-          <a:prstGeom prst="rect">
-            <a:avLst/>
-          </a:prstGeom>
-          <a:noFill/>
-          <a:ln>
-            <a:noFill/>
-          </a:ln>
-        </p:spPr>
-        <p:txBody>
-          <a:bodyPr wrap="square" lIns="36576" tIns="27432" rIns="36576" bIns="27432" anchor="t">
-            <a:noAutofit/>
-          </a:bodyPr>
-          <a:lstStyle/>
-          <a:p>
-            <a:pPr algn="l">
-              <a:lnSpc>
-                <a:spcPct val="100000"/>
-              </a:lnSpc>
-            </a:pPr>
-            <a:r>
-              <a:rPr lang="en-US" sz="2325" dirty="0">
-                <a:solidFill>
-                  <a:srgbClr val="16171D"/>
-                </a:solidFill>
-                <a:latin typeface="Cambria"/>
-                <a:cs typeface="Cambria"/>
-              </a:rPr>
-              <a:t xml:space="preserve">(</a:t>
-            </a:r>
-            <a:r>
-              <a:rPr lang="en-US" sz="2325" dirty="0" b="1">
-                <a:solidFill>
-                  <a:srgbClr val="3050B8"/>
-                </a:solidFill>
-                <a:latin typeface="Cambria"/>
-                <a:cs typeface="Cambria"/>
-              </a:rPr>
-              <a:t xml:space="preserve">1</a:t>
-            </a:r>
-            <a:r>
-              <a:rPr lang="en-US" sz="2325" dirty="0">
-                <a:solidFill>
-                  <a:srgbClr val="16171D"/>
-                </a:solidFill>
-                <a:latin typeface="Cambria"/>
-                <a:cs typeface="Cambria"/>
-              </a:rPr>
-              <a:t xml:space="preserve">, </a:t>
-            </a:r>
-            <a:r>
-              <a:rPr lang="en-US" sz="2325" dirty="0" b="1">
-                <a:solidFill>
-                  <a:srgbClr val="3050B8"/>
-                </a:solidFill>
-                <a:latin typeface="Cambria"/>
-                <a:cs typeface="Cambria"/>
-              </a:rPr>
-              <a:t xml:space="preserve">4</a:t>
-            </a:r>
-            <a:r>
-              <a:rPr lang="en-US" sz="2325" dirty="0">
-                <a:solidFill>
-                  <a:srgbClr val="16171D"/>
-                </a:solidFill>
-                <a:latin typeface="Cambria"/>
-                <a:cs typeface="Cambria"/>
-              </a:rPr>
-              <a:t xml:space="preserve">)</a:t>
-            </a:r>
-            <a:endParaRPr lang="en-US" sz="2325" dirty="0"/>
-          </a:p>
-        </p:txBody>
-      </p:sp>
-      <p:sp>
-        <p:nvSpPr>
-          <p:cNvPr id="15" name="Shape 15"/>
-          <p:cNvSpPr txBox="1"/>
-          <p:nvPr/>
-        </p:nvSpPr>
-        <p:spPr>
-          <a:xfrm>
-            <a:off x="8013497" y="1618488"/>
-            <a:ext cx="3492398" cy="1966722"/>
+            <a:off x="6362548" y="2458212"/>
+            <a:ext cx="3571326" cy="518922"/>
           </a:xfrm>
           <a:prstGeom prst="roundRect">
             <a:avLst>
@@ -8057,16 +9605,14 @@
             </a:avLst>
           </a:prstGeom>
           <a:solidFill>
-            <a:srgbClr val="FFFFFF"/>
+            <a:srgbClr val="EDF5E9"/>
           </a:solidFill>
-          <a:ln w="12700">
-            <a:solidFill>
-              <a:srgbClr val="E3E4EC"/>
-            </a:solidFill>
-          </a:ln>
-        </p:spPr>
-        <p:txBody>
-          <a:bodyPr wrap="square" lIns="36576" tIns="27432" rIns="36576" bIns="27432" anchor="t">
+          <a:ln>
+            <a:noFill/>
+          </a:ln>
+        </p:spPr>
+        <p:txBody>
+          <a:bodyPr wrap="square" lIns="164592" tIns="64008" rIns="164592" bIns="64008" anchor="ctr">
             <a:noAutofit/>
           </a:bodyPr>
           <a:lstStyle/>
@@ -8076,20 +9622,70 @@
                 <a:spcPct val="100000"/>
               </a:lnSpc>
             </a:pPr>
-            <a:endParaRPr lang="en-US" sz="1950" dirty="0"/>
-          </a:p>
-        </p:txBody>
-      </p:sp>
-      <p:sp>
-        <p:nvSpPr>
-          <p:cNvPr id="12" name="Shape 12"/>
-          <p:cNvSpPr txBox="1"/>
-          <p:nvPr/>
-        </p:nvSpPr>
-        <p:spPr>
-          <a:xfrm>
-            <a:off x="8223047" y="1789938"/>
-            <a:ext cx="3073298" cy="374904"/>
+            <a:r>
+              <a:rPr lang="en-US" sz="1125" dirty="0" b="1" spc="100">
+                <a:solidFill>
+                  <a:srgbClr val="4F8A3C"/>
+                </a:solidFill>
+                <a:latin typeface="Segoe UI"/>
+                <a:cs typeface="Segoe UI"/>
+              </a:rPr>
+              <a:t xml:space="preserve">ANSWER   </a:t>
+            </a:r>
+            <a:r>
+              <a:rPr lang="en-US" sz="2325" dirty="0" i="1">
+                <a:solidFill>
+                  <a:srgbClr val="16171D"/>
+                </a:solidFill>
+                <a:latin typeface="Cambria"/>
+                <a:cs typeface="Cambria"/>
+              </a:rPr>
+              <a:t xml:space="preserve">y</a:t>
+            </a:r>
+            <a:r>
+              <a:rPr lang="en-US" sz="2325" dirty="0">
+                <a:solidFill>
+                  <a:srgbClr val="16171D"/>
+                </a:solidFill>
+                <a:latin typeface="Cambria"/>
+                <a:cs typeface="Cambria"/>
+              </a:rPr>
+              <a:t xml:space="preserve"> = 4</a:t>
+            </a:r>
+            <a:r>
+              <a:rPr lang="en-US" sz="2325" dirty="0" i="1">
+                <a:solidFill>
+                  <a:srgbClr val="16171D"/>
+                </a:solidFill>
+                <a:latin typeface="Cambria"/>
+                <a:cs typeface="Cambria"/>
+              </a:rPr>
+              <a:t xml:space="preserve">x</a:t>
+            </a:r>
+            <a:r>
+              <a:rPr lang="en-US" sz="2325" dirty="0">
+                <a:solidFill>
+                  <a:srgbClr val="16171D"/>
+                </a:solidFill>
+                <a:latin typeface="Cambria"/>
+                <a:cs typeface="Cambria"/>
+              </a:rPr>
+              <a:t xml:space="preserve"> − 2</a:t>
+            </a:r>
+            <a:endParaRPr lang="en-US" sz="2325" dirty="0"/>
+          </a:p>
+        </p:txBody>
+      </p:sp>
+      <p:sp>
+        <p:nvSpPr>
+          <p:cNvPr id="10" name="Shape 10"/>
+          <p:cNvSpPr txBox="1"/>
+          <p:nvPr/>
+        </p:nvSpPr>
+        <p:spPr>
+          <a:xfrm>
+            <a:off x="6362548" y="3243834"/>
+            <a:ext cx="5143348" cy="352044"/>
           </a:xfrm>
           <a:prstGeom prst="rect">
             <a:avLst/>
@@ -8111,40 +9707,64 @@
               </a:lnSpc>
             </a:pPr>
             <a:r>
-              <a:rPr lang="en-US" sz="2100" dirty="0" b="1">
-                <a:solidFill>
-                  <a:srgbClr val="16171D"/>
-                </a:solidFill>
-                <a:latin typeface="Segoe UI"/>
-                <a:cs typeface="Segoe UI"/>
-              </a:rPr>
-              <a:t xml:space="preserve">Point-slope form</a:t>
-            </a:r>
-            <a:endParaRPr lang="en-US" sz="2100" dirty="0"/>
-          </a:p>
-        </p:txBody>
-      </p:sp>
-      <p:sp>
-        <p:nvSpPr>
-          <p:cNvPr id="13" name="Shape 13"/>
-          <p:cNvSpPr txBox="1"/>
-          <p:nvPr/>
-        </p:nvSpPr>
-        <p:spPr>
-          <a:xfrm>
-            <a:off x="8223047" y="2260092"/>
-            <a:ext cx="3073298" cy="534924"/>
-          </a:xfrm>
-          <a:prstGeom prst="rect">
-            <a:avLst/>
-          </a:prstGeom>
-          <a:noFill/>
+              <a:rPr lang="en-US" sz="1950" dirty="0">
+                <a:solidFill>
+                  <a:srgbClr val="16171D"/>
+                </a:solidFill>
+                <a:latin typeface="Segoe UI"/>
+                <a:cs typeface="Segoe UI"/>
+              </a:rPr>
+              <a:t xml:space="preserve">4. Distribute: −2(</a:t>
+            </a:r>
+            <a:r>
+              <a:rPr lang="en-US" sz="1950" dirty="0" i="1">
+                <a:solidFill>
+                  <a:srgbClr val="16171D"/>
+                </a:solidFill>
+                <a:latin typeface="Segoe UI"/>
+                <a:cs typeface="Segoe UI"/>
+              </a:rPr>
+              <a:t xml:space="preserve">x</a:t>
+            </a:r>
+            <a:r>
+              <a:rPr lang="en-US" sz="1950" dirty="0">
+                <a:solidFill>
+                  <a:srgbClr val="16171D"/>
+                </a:solidFill>
+                <a:latin typeface="Segoe UI"/>
+                <a:cs typeface="Segoe UI"/>
+              </a:rPr>
+              <a:t xml:space="preserve"> + 3)</a:t>
+            </a:r>
+            <a:endParaRPr lang="en-US" sz="1950" dirty="0"/>
+          </a:p>
+        </p:txBody>
+      </p:sp>
+      <p:sp>
+        <p:nvSpPr>
+          <p:cNvPr id="11" name="Shape 11"/>
+          <p:cNvSpPr txBox="1"/>
+          <p:nvPr/>
+        </p:nvSpPr>
+        <p:spPr>
+          <a:xfrm>
+            <a:off x="6362548" y="3729228"/>
+            <a:ext cx="3073847" cy="518922"/>
+          </a:xfrm>
+          <a:prstGeom prst="roundRect">
+            <a:avLst>
+              <a:gd name="adj" fmla="val 8000"/>
+            </a:avLst>
+          </a:prstGeom>
+          <a:solidFill>
+            <a:srgbClr val="EDF5E9"/>
+          </a:solidFill>
           <a:ln>
             <a:noFill/>
           </a:ln>
         </p:spPr>
         <p:txBody>
-          <a:bodyPr wrap="square" lIns="36576" tIns="27432" rIns="36576" bIns="27432" anchor="t">
+          <a:bodyPr wrap="square" lIns="164592" tIns="64008" rIns="164592" bIns="64008" anchor="ctr">
             <a:noAutofit/>
           </a:bodyPr>
           <a:lstStyle/>
@@ -8155,49 +9775,25 @@
               </a:lnSpc>
             </a:pPr>
             <a:r>
-              <a:rPr lang="en-US" sz="1575" dirty="0">
-                <a:solidFill>
-                  <a:srgbClr val="16171D"/>
-                </a:solidFill>
-                <a:latin typeface="Segoe UI"/>
-                <a:cs typeface="Segoe UI"/>
-              </a:rPr>
-              <a:t xml:space="preserve">An equation made from the slope and one point.</a:t>
-            </a:r>
-            <a:endParaRPr lang="en-US" sz="1575" dirty="0"/>
-          </a:p>
-        </p:txBody>
-      </p:sp>
-      <p:sp>
-        <p:nvSpPr>
-          <p:cNvPr id="14" name="Shape 14"/>
-          <p:cNvSpPr txBox="1"/>
-          <p:nvPr/>
-        </p:nvSpPr>
-        <p:spPr>
-          <a:xfrm>
-            <a:off x="8223047" y="2890266"/>
-            <a:ext cx="3073298" cy="409194"/>
-          </a:xfrm>
-          <a:prstGeom prst="rect">
-            <a:avLst/>
-          </a:prstGeom>
-          <a:noFill/>
-          <a:ln>
-            <a:noFill/>
-          </a:ln>
-        </p:spPr>
-        <p:txBody>
-          <a:bodyPr wrap="square" lIns="36576" tIns="27432" rIns="36576" bIns="27432" anchor="t">
-            <a:noAutofit/>
-          </a:bodyPr>
-          <a:lstStyle/>
-          <a:p>
-            <a:pPr algn="l">
-              <a:lnSpc>
-                <a:spcPct val="100000"/>
-              </a:lnSpc>
-            </a:pPr>
+              <a:rPr lang="en-US" sz="1125" dirty="0" b="1" spc="100">
+                <a:solidFill>
+                  <a:srgbClr val="4F8A3C"/>
+                </a:solidFill>
+                <a:latin typeface="Segoe UI"/>
+                <a:cs typeface="Segoe UI"/>
+              </a:rPr>
+              <a:t xml:space="preserve">ANSWER   </a:t>
+            </a:r>
+            <a:r>
+              <a:rPr lang="en-US" sz="2325" dirty="0">
+                <a:solidFill>
+                  <a:srgbClr val="16171D"/>
+                </a:solidFill>
+                <a:latin typeface="Cambria"/>
+                <a:cs typeface="Cambria"/>
+              </a:rPr>
+              <a:t xml:space="preserve">−2</a:t>
+            </a:r>
             <a:r>
               <a:rPr lang="en-US" sz="2325" dirty="0" i="1">
                 <a:solidFill>
@@ -8206,7 +9802,7 @@
                 <a:latin typeface="Cambria"/>
                 <a:cs typeface="Cambria"/>
               </a:rPr>
-              <a:t xml:space="preserve">y</a:t>
+              <a:t xml:space="preserve">x</a:t>
             </a:r>
             <a:r>
               <a:rPr lang="en-US" sz="2325" dirty="0">
@@ -8216,107 +9812,7 @@
                 <a:latin typeface="Cambria"/>
                 <a:cs typeface="Cambria"/>
               </a:rPr>
-              <a:t xml:space="preserve"> − </a:t>
-            </a:r>
-            <a:r>
-              <a:rPr lang="en-US" sz="2325" dirty="0" b="1" i="1">
-                <a:solidFill>
-                  <a:srgbClr val="3050B8"/>
-                </a:solidFill>
-                <a:latin typeface="Cambria"/>
-                <a:cs typeface="Cambria"/>
-              </a:rPr>
-              <a:t xml:space="preserve">y</a:t>
-            </a:r>
-            <a:r>
-              <a:rPr lang="en-US" sz="1976" dirty="0" b="1" baseline="-25000">
-                <a:solidFill>
-                  <a:srgbClr val="3050B8"/>
-                </a:solidFill>
-                <a:latin typeface="Cambria"/>
-                <a:cs typeface="Cambria"/>
-              </a:rPr>
-              <a:t xml:space="preserve">1</a:t>
-            </a:r>
-            <a:r>
-              <a:rPr lang="en-US" sz="2325" dirty="0">
-                <a:solidFill>
-                  <a:srgbClr val="16171D"/>
-                </a:solidFill>
-                <a:latin typeface="Cambria"/>
-                <a:cs typeface="Cambria"/>
-              </a:rPr>
-              <a:t xml:space="preserve"> = </a:t>
-            </a:r>
-            <a:r>
-              <a:rPr lang="en-US" sz="2325" dirty="0" b="1" i="1">
-                <a:solidFill>
-                  <a:srgbClr val="C9561F"/>
-                </a:solidFill>
-                <a:latin typeface="Cambria"/>
-                <a:cs typeface="Cambria"/>
-              </a:rPr>
-              <a:t xml:space="preserve">m</a:t>
-            </a:r>
-            <a:r>
-              <a:rPr lang="en-US" sz="2325" dirty="0">
-                <a:solidFill>
-                  <a:srgbClr val="16171D"/>
-                </a:solidFill>
-                <a:latin typeface="Cambria"/>
-                <a:cs typeface="Cambria"/>
-              </a:rPr>
-              <a:t xml:space="preserve">(</a:t>
-            </a:r>
-            <a:r>
-              <a:rPr lang="en-US" sz="2325" dirty="0" i="1">
-                <a:solidFill>
-                  <a:srgbClr val="16171D"/>
-                </a:solidFill>
-                <a:latin typeface="Cambria"/>
-                <a:cs typeface="Cambria"/>
-              </a:rPr>
-              <a:t xml:space="preserve">x</a:t>
-            </a:r>
-            <a:r>
-              <a:rPr lang="en-US" sz="2325" dirty="0">
-                <a:solidFill>
-                  <a:srgbClr val="16171D"/>
-                </a:solidFill>
-                <a:latin typeface="Cambria"/>
-                <a:cs typeface="Cambria"/>
-              </a:rPr>
-              <a:t xml:space="preserve"> − </a:t>
-            </a:r>
-            <a:r>
-              <a:rPr lang="en-US" sz="2325" dirty="0" b="1" i="1">
-                <a:solidFill>
-                  <a:srgbClr val="3050B8"/>
-                </a:solidFill>
-                <a:latin typeface="Cambria"/>
-                <a:cs typeface="Cambria"/>
-              </a:rPr>
-              <a:t xml:space="preserve">x</a:t>
-            </a:r>
-            <a:r>
-              <a:rPr lang="en-US" sz="1976" dirty="0" b="1" baseline="-25000">
-                <a:solidFill>
-                  <a:srgbClr val="3050B8"/>
-                </a:solidFill>
-                <a:latin typeface="Cambria"/>
-                <a:cs typeface="Cambria"/>
-              </a:rPr>
-              <a:t xml:space="preserve">1</a:t>
-            </a:r>
-            <a:r>
-              <a:rPr lang="en-US" sz="2325" dirty="0">
-                <a:solidFill>
-                  <a:srgbClr val="16171D"/>
-                </a:solidFill>
-                <a:latin typeface="Cambria"/>
-                <a:cs typeface="Cambria"/>
-              </a:rPr>
-              <a:t xml:space="preserve">)</a:t>
+              <a:t xml:space="preserve"> − 6</a:t>
             </a:r>
             <a:endParaRPr lang="en-US" sz="2325" dirty="0"/>
           </a:p>
@@ -8330,6 +9826,432 @@
   <p:transition spd="med">
     <p:fade/>
   </p:transition>
+  <p:timing>
+    <p:tnLst>
+      <p:par>
+        <p:cTn id="1" dur="indefinite" restart="never" nodeType="tmRoot">
+          <p:childTnLst>
+            <p:seq concurrent="1" nextAc="seek">
+              <p:cTn id="2" dur="indefinite" nodeType="mainSeq">
+                <p:childTnLst>
+                  <p:par>
+                    <p:cTn id="8" fill="hold">
+                      <p:stCondLst>
+                        <p:cond delay="indefinite"/>
+                      </p:stCondLst>
+                      <p:childTnLst>
+                        <p:par>
+                          <p:cTn id="9" fill="hold">
+                            <p:stCondLst>
+                              <p:cond delay="0"/>
+                            </p:stCondLst>
+                            <p:childTnLst>
+                              <p:par>
+                                <p:cTn id="7" presetID="53" presetClass="entr" presetSubtype="16" fill="hold" nodeType="clickEffect">
+                                  <p:stCondLst>
+                                    <p:cond delay="0"/>
+                                  </p:stCondLst>
+                                  <p:childTnLst>
+                                    <p:set>
+                                      <p:cBhvr>
+                                        <p:cTn id="3" dur="1" fill="hold">
+                                          <p:stCondLst>
+                                            <p:cond delay="0"/>
+                                          </p:stCondLst>
+                                        </p:cTn>
+                                        <p:tgtEl>
+                                          <p:spTgt spid="5"/>
+                                        </p:tgtEl>
+                                        <p:attrNameLst>
+                                          <p:attrName>style.visibility</p:attrName>
+                                        </p:attrNameLst>
+                                      </p:cBhvr>
+                                      <p:to>
+                                        <p:strVal val="visible"/>
+                                      </p:to>
+                                    </p:set>
+                                    <p:animEffect transition="in" filter="fade">
+                                      <p:cBhvr>
+                                        <p:cTn id="4" dur="500"/>
+                                        <p:tgtEl>
+                                          <p:spTgt spid="5"/>
+                                        </p:tgtEl>
+                                      </p:cBhvr>
+                                    </p:animEffect>
+                                    <p:anim calcmode="lin" valueType="num">
+                                      <p:cBhvr>
+                                        <p:cTn id="5" dur="500" fill="hold"/>
+                                        <p:tgtEl>
+                                          <p:spTgt spid="5"/>
+                                        </p:tgtEl>
+                                        <p:attrNameLst>
+                                          <p:attrName>ppt_w</p:attrName>
+                                        </p:attrNameLst>
+                                      </p:cBhvr>
+                                      <p:tavLst>
+                                        <p:tav tm="0">
+                                          <p:val>
+                                            <p:fltVal val="0"/>
+                                          </p:val>
+                                        </p:tav>
+                                        <p:tav tm="100000">
+                                          <p:val>
+                                            <p:strVal val="#ppt_w"/>
+                                          </p:val>
+                                        </p:tav>
+                                      </p:tavLst>
+                                    </p:anim>
+                                    <p:anim calcmode="lin" valueType="num">
+                                      <p:cBhvr>
+                                        <p:cTn id="6" dur="500" fill="hold"/>
+                                        <p:tgtEl>
+                                          <p:spTgt spid="5"/>
+                                        </p:tgtEl>
+                                        <p:attrNameLst>
+                                          <p:attrName>ppt_h</p:attrName>
+                                        </p:attrNameLst>
+                                      </p:cBhvr>
+                                      <p:tavLst>
+                                        <p:tav tm="0">
+                                          <p:val>
+                                            <p:fltVal val="0"/>
+                                          </p:val>
+                                        </p:tav>
+                                        <p:tav tm="100000">
+                                          <p:val>
+                                            <p:strVal val="#ppt_h"/>
+                                          </p:val>
+                                        </p:tav>
+                                      </p:tavLst>
+                                    </p:anim>
+                                  </p:childTnLst>
+                                </p:cTn>
+                              </p:par>
+                            </p:childTnLst>
+                          </p:cTn>
+                        </p:par>
+                      </p:childTnLst>
+                    </p:cTn>
+                  </p:par>
+                  <p:par>
+                    <p:cTn id="15" fill="hold">
+                      <p:stCondLst>
+                        <p:cond delay="indefinite"/>
+                      </p:stCondLst>
+                      <p:childTnLst>
+                        <p:par>
+                          <p:cTn id="16" fill="hold">
+                            <p:stCondLst>
+                              <p:cond delay="0"/>
+                            </p:stCondLst>
+                            <p:childTnLst>
+                              <p:par>
+                                <p:cTn id="14" presetID="53" presetClass="entr" presetSubtype="16" fill="hold" nodeType="clickEffect">
+                                  <p:stCondLst>
+                                    <p:cond delay="0"/>
+                                  </p:stCondLst>
+                                  <p:childTnLst>
+                                    <p:set>
+                                      <p:cBhvr>
+                                        <p:cTn id="10" dur="1" fill="hold">
+                                          <p:stCondLst>
+                                            <p:cond delay="0"/>
+                                          </p:stCondLst>
+                                        </p:cTn>
+                                        <p:tgtEl>
+                                          <p:spTgt spid="7"/>
+                                        </p:tgtEl>
+                                        <p:attrNameLst>
+                                          <p:attrName>style.visibility</p:attrName>
+                                        </p:attrNameLst>
+                                      </p:cBhvr>
+                                      <p:to>
+                                        <p:strVal val="visible"/>
+                                      </p:to>
+                                    </p:set>
+                                    <p:animEffect transition="in" filter="fade">
+                                      <p:cBhvr>
+                                        <p:cTn id="11" dur="500"/>
+                                        <p:tgtEl>
+                                          <p:spTgt spid="7"/>
+                                        </p:tgtEl>
+                                      </p:cBhvr>
+                                    </p:animEffect>
+                                    <p:anim calcmode="lin" valueType="num">
+                                      <p:cBhvr>
+                                        <p:cTn id="12" dur="500" fill="hold"/>
+                                        <p:tgtEl>
+                                          <p:spTgt spid="7"/>
+                                        </p:tgtEl>
+                                        <p:attrNameLst>
+                                          <p:attrName>ppt_w</p:attrName>
+                                        </p:attrNameLst>
+                                      </p:cBhvr>
+                                      <p:tavLst>
+                                        <p:tav tm="0">
+                                          <p:val>
+                                            <p:fltVal val="0"/>
+                                          </p:val>
+                                        </p:tav>
+                                        <p:tav tm="100000">
+                                          <p:val>
+                                            <p:strVal val="#ppt_w"/>
+                                          </p:val>
+                                        </p:tav>
+                                      </p:tavLst>
+                                    </p:anim>
+                                    <p:anim calcmode="lin" valueType="num">
+                                      <p:cBhvr>
+                                        <p:cTn id="13" dur="500" fill="hold"/>
+                                        <p:tgtEl>
+                                          <p:spTgt spid="7"/>
+                                        </p:tgtEl>
+                                        <p:attrNameLst>
+                                          <p:attrName>ppt_h</p:attrName>
+                                        </p:attrNameLst>
+                                      </p:cBhvr>
+                                      <p:tavLst>
+                                        <p:tav tm="0">
+                                          <p:val>
+                                            <p:fltVal val="0"/>
+                                          </p:val>
+                                        </p:tav>
+                                        <p:tav tm="100000">
+                                          <p:val>
+                                            <p:strVal val="#ppt_h"/>
+                                          </p:val>
+                                        </p:tav>
+                                      </p:tavLst>
+                                    </p:anim>
+                                  </p:childTnLst>
+                                </p:cTn>
+                              </p:par>
+                            </p:childTnLst>
+                          </p:cTn>
+                        </p:par>
+                      </p:childTnLst>
+                    </p:cTn>
+                  </p:par>
+                  <p:par>
+                    <p:cTn id="22" fill="hold">
+                      <p:stCondLst>
+                        <p:cond delay="indefinite"/>
+                      </p:stCondLst>
+                      <p:childTnLst>
+                        <p:par>
+                          <p:cTn id="23" fill="hold">
+                            <p:stCondLst>
+                              <p:cond delay="0"/>
+                            </p:stCondLst>
+                            <p:childTnLst>
+                              <p:par>
+                                <p:cTn id="21" presetID="53" presetClass="entr" presetSubtype="16" fill="hold" nodeType="clickEffect">
+                                  <p:stCondLst>
+                                    <p:cond delay="0"/>
+                                  </p:stCondLst>
+                                  <p:childTnLst>
+                                    <p:set>
+                                      <p:cBhvr>
+                                        <p:cTn id="17" dur="1" fill="hold">
+                                          <p:stCondLst>
+                                            <p:cond delay="0"/>
+                                          </p:stCondLst>
+                                        </p:cTn>
+                                        <p:tgtEl>
+                                          <p:spTgt spid="9"/>
+                                        </p:tgtEl>
+                                        <p:attrNameLst>
+                                          <p:attrName>style.visibility</p:attrName>
+                                        </p:attrNameLst>
+                                      </p:cBhvr>
+                                      <p:to>
+                                        <p:strVal val="visible"/>
+                                      </p:to>
+                                    </p:set>
+                                    <p:animEffect transition="in" filter="fade">
+                                      <p:cBhvr>
+                                        <p:cTn id="18" dur="500"/>
+                                        <p:tgtEl>
+                                          <p:spTgt spid="9"/>
+                                        </p:tgtEl>
+                                      </p:cBhvr>
+                                    </p:animEffect>
+                                    <p:anim calcmode="lin" valueType="num">
+                                      <p:cBhvr>
+                                        <p:cTn id="19" dur="500" fill="hold"/>
+                                        <p:tgtEl>
+                                          <p:spTgt spid="9"/>
+                                        </p:tgtEl>
+                                        <p:attrNameLst>
+                                          <p:attrName>ppt_w</p:attrName>
+                                        </p:attrNameLst>
+                                      </p:cBhvr>
+                                      <p:tavLst>
+                                        <p:tav tm="0">
+                                          <p:val>
+                                            <p:fltVal val="0"/>
+                                          </p:val>
+                                        </p:tav>
+                                        <p:tav tm="100000">
+                                          <p:val>
+                                            <p:strVal val="#ppt_w"/>
+                                          </p:val>
+                                        </p:tav>
+                                      </p:tavLst>
+                                    </p:anim>
+                                    <p:anim calcmode="lin" valueType="num">
+                                      <p:cBhvr>
+                                        <p:cTn id="20" dur="500" fill="hold"/>
+                                        <p:tgtEl>
+                                          <p:spTgt spid="9"/>
+                                        </p:tgtEl>
+                                        <p:attrNameLst>
+                                          <p:attrName>ppt_h</p:attrName>
+                                        </p:attrNameLst>
+                                      </p:cBhvr>
+                                      <p:tavLst>
+                                        <p:tav tm="0">
+                                          <p:val>
+                                            <p:fltVal val="0"/>
+                                          </p:val>
+                                        </p:tav>
+                                        <p:tav tm="100000">
+                                          <p:val>
+                                            <p:strVal val="#ppt_h"/>
+                                          </p:val>
+                                        </p:tav>
+                                      </p:tavLst>
+                                    </p:anim>
+                                  </p:childTnLst>
+                                </p:cTn>
+                              </p:par>
+                            </p:childTnLst>
+                          </p:cTn>
+                        </p:par>
+                      </p:childTnLst>
+                    </p:cTn>
+                  </p:par>
+                  <p:par>
+                    <p:cTn id="29" fill="hold">
+                      <p:stCondLst>
+                        <p:cond delay="indefinite"/>
+                      </p:stCondLst>
+                      <p:childTnLst>
+                        <p:par>
+                          <p:cTn id="30" fill="hold">
+                            <p:stCondLst>
+                              <p:cond delay="0"/>
+                            </p:stCondLst>
+                            <p:childTnLst>
+                              <p:par>
+                                <p:cTn id="28" presetID="53" presetClass="entr" presetSubtype="16" fill="hold" nodeType="clickEffect">
+                                  <p:stCondLst>
+                                    <p:cond delay="0"/>
+                                  </p:stCondLst>
+                                  <p:childTnLst>
+                                    <p:set>
+                                      <p:cBhvr>
+                                        <p:cTn id="24" dur="1" fill="hold">
+                                          <p:stCondLst>
+                                            <p:cond delay="0"/>
+                                          </p:stCondLst>
+                                        </p:cTn>
+                                        <p:tgtEl>
+                                          <p:spTgt spid="11"/>
+                                        </p:tgtEl>
+                                        <p:attrNameLst>
+                                          <p:attrName>style.visibility</p:attrName>
+                                        </p:attrNameLst>
+                                      </p:cBhvr>
+                                      <p:to>
+                                        <p:strVal val="visible"/>
+                                      </p:to>
+                                    </p:set>
+                                    <p:animEffect transition="in" filter="fade">
+                                      <p:cBhvr>
+                                        <p:cTn id="25" dur="500"/>
+                                        <p:tgtEl>
+                                          <p:spTgt spid="11"/>
+                                        </p:tgtEl>
+                                      </p:cBhvr>
+                                    </p:animEffect>
+                                    <p:anim calcmode="lin" valueType="num">
+                                      <p:cBhvr>
+                                        <p:cTn id="26" dur="500" fill="hold"/>
+                                        <p:tgtEl>
+                                          <p:spTgt spid="11"/>
+                                        </p:tgtEl>
+                                        <p:attrNameLst>
+                                          <p:attrName>ppt_w</p:attrName>
+                                        </p:attrNameLst>
+                                      </p:cBhvr>
+                                      <p:tavLst>
+                                        <p:tav tm="0">
+                                          <p:val>
+                                            <p:fltVal val="0"/>
+                                          </p:val>
+                                        </p:tav>
+                                        <p:tav tm="100000">
+                                          <p:val>
+                                            <p:strVal val="#ppt_w"/>
+                                          </p:val>
+                                        </p:tav>
+                                      </p:tavLst>
+                                    </p:anim>
+                                    <p:anim calcmode="lin" valueType="num">
+                                      <p:cBhvr>
+                                        <p:cTn id="27" dur="500" fill="hold"/>
+                                        <p:tgtEl>
+                                          <p:spTgt spid="11"/>
+                                        </p:tgtEl>
+                                        <p:attrNameLst>
+                                          <p:attrName>ppt_h</p:attrName>
+                                        </p:attrNameLst>
+                                      </p:cBhvr>
+                                      <p:tavLst>
+                                        <p:tav tm="0">
+                                          <p:val>
+                                            <p:fltVal val="0"/>
+                                          </p:val>
+                                        </p:tav>
+                                        <p:tav tm="100000">
+                                          <p:val>
+                                            <p:strVal val="#ppt_h"/>
+                                          </p:val>
+                                        </p:tav>
+                                      </p:tavLst>
+                                    </p:anim>
+                                  </p:childTnLst>
+                                </p:cTn>
+                              </p:par>
+                            </p:childTnLst>
+                          </p:cTn>
+                        </p:par>
+                      </p:childTnLst>
+                    </p:cTn>
+                  </p:par>
+                </p:childTnLst>
+              </p:cTn>
+              <p:prevCondLst>
+                <p:cond evt="onPrev" delay="0">
+                  <p:tgtEl>
+                    <p:sldTgt/>
+                  </p:tgtEl>
+                </p:cond>
+              </p:prevCondLst>
+              <p:nextCondLst>
+                <p:cond evt="onNext" delay="0">
+                  <p:tgtEl>
+                    <p:sldTgt/>
+                  </p:tgtEl>
+                </p:cond>
+              </p:nextCondLst>
+            </p:seq>
+          </p:childTnLst>
+        </p:cTn>
+      </p:par>
+    </p:tnLst>
+  </p:timing>
 </p:sld>
 </file>
 
@@ -8388,7 +10310,7 @@
                 <a:latin typeface="Segoe UI"/>
                 <a:cs typeface="Segoe UI"/>
               </a:rPr>
-              <a:t xml:space="preserve">Lesson 4 · Steps</a:t>
+              <a:t xml:space="preserve">Day 2 · Bell Work · Review of Day 1</a:t>
             </a:r>
             <a:endParaRPr lang="en-US" sz="1200" dirty="0"/>
           </a:p>
@@ -8432,7 +10354,7 @@
                 <a:latin typeface="Segoe UI"/>
                 <a:cs typeface="Segoe UI"/>
               </a:rPr>
-              <a:t xml:space="preserve">How to write point-slope form</a:t>
+              <a:t xml:space="preserve">Warm up: work these on your own</a:t>
             </a:r>
             <a:endParaRPr lang="en-US" sz="3450" dirty="0"/>
           </a:p>
@@ -8446,8 +10368,8 @@
         </p:nvSpPr>
         <p:spPr>
           <a:xfrm>
-            <a:off x="685800" y="1618488"/>
-            <a:ext cx="10820095" cy="352044"/>
+            <a:off x="685800" y="1675638"/>
+            <a:ext cx="5143348" cy="649224"/>
           </a:xfrm>
           <a:prstGeom prst="rect">
             <a:avLst/>
@@ -8469,16 +10391,6 @@
               </a:lnSpc>
             </a:pPr>
             <a:r>
-              <a:rPr lang="en-US" sz="1950" dirty="0" b="1">
-                <a:solidFill>
-                  <a:srgbClr val="16171D"/>
-                </a:solidFill>
-                <a:latin typeface="Segoe UI"/>
-                <a:cs typeface="Segoe UI"/>
-              </a:rPr>
-              <a:t xml:space="preserve">1.</a:t>
-            </a:r>
-            <a:r>
               <a:rPr lang="en-US" sz="1950" dirty="0">
                 <a:solidFill>
                   <a:srgbClr val="16171D"/>
@@ -8486,27 +10398,17 @@
                 <a:latin typeface="Segoe UI"/>
                 <a:cs typeface="Segoe UI"/>
               </a:rPr>
-              <a:t xml:space="preserve"> Find the slope, </a:t>
-            </a:r>
-            <a:r>
-              <a:rPr lang="en-US" sz="1950" dirty="0" b="1" i="1">
-                <a:solidFill>
-                  <a:srgbClr val="C9561F"/>
-                </a:solidFill>
-                <a:latin typeface="Segoe UI"/>
-                <a:cs typeface="Segoe UI"/>
-              </a:rPr>
-              <a:t xml:space="preserve">m</a:t>
-            </a:r>
-            <a:r>
-              <a:rPr lang="en-US" sz="1950" dirty="0">
-                <a:solidFill>
-                  <a:srgbClr val="16171D"/>
-                </a:solidFill>
-                <a:latin typeface="Segoe UI"/>
-                <a:cs typeface="Segoe UI"/>
-              </a:rPr>
-              <a:t xml:space="preserve">.</a:t>
+              <a:t xml:space="preserve">1. Point-slope form: slope −4, through (3, −1) </a:t>
+            </a:r>
+            <a:r>
+              <a:rPr lang="en-US" sz="1575" dirty="0">
+                <a:solidFill>
+                  <a:srgbClr val="5F6272"/>
+                </a:solidFill>
+                <a:latin typeface="Segoe UI"/>
+                <a:cs typeface="Segoe UI"/>
+              </a:rPr>
+              <a:t xml:space="preserve">(SE p. 204)</a:t>
             </a:r>
             <a:endParaRPr lang="en-US" sz="1950" dirty="0"/>
           </a:p>
@@ -8520,8 +10422,96 @@
         </p:nvSpPr>
         <p:spPr>
           <a:xfrm>
-            <a:off x="685800" y="2141982"/>
-            <a:ext cx="10820095" cy="352044"/>
+            <a:off x="685800" y="2458212"/>
+            <a:ext cx="4732111" cy="518922"/>
+          </a:xfrm>
+          <a:prstGeom prst="roundRect">
+            <a:avLst>
+              <a:gd name="adj" fmla="val 8000"/>
+            </a:avLst>
+          </a:prstGeom>
+          <a:solidFill>
+            <a:srgbClr val="EDF5E9"/>
+          </a:solidFill>
+          <a:ln>
+            <a:noFill/>
+          </a:ln>
+        </p:spPr>
+        <p:txBody>
+          <a:bodyPr wrap="square" lIns="164592" tIns="64008" rIns="164592" bIns="64008" anchor="ctr">
+            <a:noAutofit/>
+          </a:bodyPr>
+          <a:lstStyle/>
+          <a:p>
+            <a:pPr algn="l">
+              <a:lnSpc>
+                <a:spcPct val="100000"/>
+              </a:lnSpc>
+            </a:pPr>
+            <a:r>
+              <a:rPr lang="en-US" sz="1125" dirty="0" b="1" spc="100">
+                <a:solidFill>
+                  <a:srgbClr val="4F8A3C"/>
+                </a:solidFill>
+                <a:latin typeface="Segoe UI"/>
+                <a:cs typeface="Segoe UI"/>
+              </a:rPr>
+              <a:t xml:space="preserve">ANSWER   </a:t>
+            </a:r>
+            <a:r>
+              <a:rPr lang="en-US" sz="2325" dirty="0" i="1">
+                <a:solidFill>
+                  <a:srgbClr val="16171D"/>
+                </a:solidFill>
+                <a:latin typeface="Cambria"/>
+                <a:cs typeface="Cambria"/>
+              </a:rPr>
+              <a:t xml:space="preserve">y</a:t>
+            </a:r>
+            <a:r>
+              <a:rPr lang="en-US" sz="2325" dirty="0">
+                <a:solidFill>
+                  <a:srgbClr val="16171D"/>
+                </a:solidFill>
+                <a:latin typeface="Cambria"/>
+                <a:cs typeface="Cambria"/>
+              </a:rPr>
+              <a:t xml:space="preserve"> + 1 = −4(</a:t>
+            </a:r>
+            <a:r>
+              <a:rPr lang="en-US" sz="2325" dirty="0" i="1">
+                <a:solidFill>
+                  <a:srgbClr val="16171D"/>
+                </a:solidFill>
+                <a:latin typeface="Cambria"/>
+                <a:cs typeface="Cambria"/>
+              </a:rPr>
+              <a:t xml:space="preserve">x</a:t>
+            </a:r>
+            <a:r>
+              <a:rPr lang="en-US" sz="2325" dirty="0">
+                <a:solidFill>
+                  <a:srgbClr val="16171D"/>
+                </a:solidFill>
+                <a:latin typeface="Cambria"/>
+                <a:cs typeface="Cambria"/>
+              </a:rPr>
+              <a:t xml:space="preserve"> − 3)</a:t>
+            </a:r>
+            <a:endParaRPr lang="en-US" sz="2325" dirty="0"/>
+          </a:p>
+        </p:txBody>
+      </p:sp>
+      <p:sp>
+        <p:nvSpPr>
+          <p:cNvPr id="6" name="Shape 6"/>
+          <p:cNvSpPr txBox="1"/>
+          <p:nvPr/>
+        </p:nvSpPr>
+        <p:spPr>
+          <a:xfrm>
+            <a:off x="685800" y="3243834"/>
+            <a:ext cx="5143348" cy="649224"/>
           </a:xfrm>
           <a:prstGeom prst="rect">
             <a:avLst/>
@@ -8543,16 +10533,6 @@
               </a:lnSpc>
             </a:pPr>
             <a:r>
-              <a:rPr lang="en-US" sz="1950" dirty="0" b="1">
-                <a:solidFill>
-                  <a:srgbClr val="16171D"/>
-                </a:solidFill>
-                <a:latin typeface="Segoe UI"/>
-                <a:cs typeface="Segoe UI"/>
-              </a:rPr>
-              <a:t xml:space="preserve">2.</a:t>
-            </a:r>
-            <a:r>
               <a:rPr lang="en-US" sz="1950" dirty="0">
                 <a:solidFill>
                   <a:srgbClr val="16171D"/>
@@ -8560,82 +10540,140 @@
                 <a:latin typeface="Segoe UI"/>
                 <a:cs typeface="Segoe UI"/>
               </a:rPr>
-              <a:t xml:space="preserve"> Find a point, (</a:t>
-            </a:r>
-            <a:r>
-              <a:rPr lang="en-US" sz="1950" dirty="0" b="1" i="1">
-                <a:solidFill>
-                  <a:srgbClr val="3050B8"/>
-                </a:solidFill>
-                <a:latin typeface="Segoe UI"/>
-                <a:cs typeface="Segoe UI"/>
+              <a:t xml:space="preserve">2. Point-slope form: through (2, 5) and (4, 11) </a:t>
+            </a:r>
+            <a:r>
+              <a:rPr lang="en-US" sz="1575" dirty="0">
+                <a:solidFill>
+                  <a:srgbClr val="5F6272"/>
+                </a:solidFill>
+                <a:latin typeface="Segoe UI"/>
+                <a:cs typeface="Segoe UI"/>
+              </a:rPr>
+              <a:t xml:space="preserve">(SE p. 204)</a:t>
+            </a:r>
+            <a:endParaRPr lang="en-US" sz="1950" dirty="0"/>
+          </a:p>
+        </p:txBody>
+      </p:sp>
+      <p:sp>
+        <p:nvSpPr>
+          <p:cNvPr id="7" name="Shape 7"/>
+          <p:cNvSpPr txBox="1"/>
+          <p:nvPr/>
+        </p:nvSpPr>
+        <p:spPr>
+          <a:xfrm>
+            <a:off x="685800" y="4026408"/>
+            <a:ext cx="5143348" cy="873252"/>
+          </a:xfrm>
+          <a:prstGeom prst="roundRect">
+            <a:avLst>
+              <a:gd name="adj" fmla="val 8000"/>
+            </a:avLst>
+          </a:prstGeom>
+          <a:solidFill>
+            <a:srgbClr val="EDF5E9"/>
+          </a:solidFill>
+          <a:ln>
+            <a:noFill/>
+          </a:ln>
+        </p:spPr>
+        <p:txBody>
+          <a:bodyPr wrap="square" lIns="164592" tIns="64008" rIns="164592" bIns="64008" anchor="ctr">
+            <a:noAutofit/>
+          </a:bodyPr>
+          <a:lstStyle/>
+          <a:p>
+            <a:pPr algn="l">
+              <a:lnSpc>
+                <a:spcPct val="100000"/>
+              </a:lnSpc>
+            </a:pPr>
+            <a:r>
+              <a:rPr lang="en-US" sz="1125" dirty="0" b="1" spc="100">
+                <a:solidFill>
+                  <a:srgbClr val="4F8A3C"/>
+                </a:solidFill>
+                <a:latin typeface="Segoe UI"/>
+                <a:cs typeface="Segoe UI"/>
+              </a:rPr>
+              <a:t xml:space="preserve">ANSWER   </a:t>
+            </a:r>
+            <a:r>
+              <a:rPr lang="en-US" sz="2325" dirty="0" i="1">
+                <a:solidFill>
+                  <a:srgbClr val="16171D"/>
+                </a:solidFill>
+                <a:latin typeface="Cambria"/>
+                <a:cs typeface="Cambria"/>
+              </a:rPr>
+              <a:t xml:space="preserve">m</a:t>
+            </a:r>
+            <a:r>
+              <a:rPr lang="en-US" sz="2325" dirty="0">
+                <a:solidFill>
+                  <a:srgbClr val="16171D"/>
+                </a:solidFill>
+                <a:latin typeface="Cambria"/>
+                <a:cs typeface="Cambria"/>
+              </a:rPr>
+              <a:t xml:space="preserve"> = 3; </a:t>
+            </a:r>
+            <a:r>
+              <a:rPr lang="en-US" sz="2325" dirty="0" i="1">
+                <a:solidFill>
+                  <a:srgbClr val="16171D"/>
+                </a:solidFill>
+                <a:latin typeface="Cambria"/>
+                <a:cs typeface="Cambria"/>
+              </a:rPr>
+              <a:t xml:space="preserve">y</a:t>
+            </a:r>
+            <a:r>
+              <a:rPr lang="en-US" sz="2325" dirty="0">
+                <a:solidFill>
+                  <a:srgbClr val="16171D"/>
+                </a:solidFill>
+                <a:latin typeface="Cambria"/>
+                <a:cs typeface="Cambria"/>
+              </a:rPr>
+              <a:t xml:space="preserve"> − 5 = 3(</a:t>
+            </a:r>
+            <a:r>
+              <a:rPr lang="en-US" sz="2325" dirty="0" i="1">
+                <a:solidFill>
+                  <a:srgbClr val="16171D"/>
+                </a:solidFill>
+                <a:latin typeface="Cambria"/>
+                <a:cs typeface="Cambria"/>
               </a:rPr>
               <a:t xml:space="preserve">x</a:t>
             </a:r>
             <a:r>
-              <a:rPr lang="en-US" sz="1658" dirty="0" b="1" baseline="-25000">
-                <a:solidFill>
-                  <a:srgbClr val="3050B8"/>
-                </a:solidFill>
-                <a:latin typeface="Segoe UI"/>
-                <a:cs typeface="Segoe UI"/>
-              </a:rPr>
-              <a:t xml:space="preserve">1</a:t>
-            </a:r>
-            <a:r>
-              <a:rPr lang="en-US" sz="1950" dirty="0">
-                <a:solidFill>
-                  <a:srgbClr val="16171D"/>
-                </a:solidFill>
-                <a:latin typeface="Segoe UI"/>
-                <a:cs typeface="Segoe UI"/>
-              </a:rPr>
-              <a:t xml:space="preserve">, </a:t>
-            </a:r>
-            <a:r>
-              <a:rPr lang="en-US" sz="1950" dirty="0" b="1" i="1">
-                <a:solidFill>
-                  <a:srgbClr val="3050B8"/>
-                </a:solidFill>
-                <a:latin typeface="Segoe UI"/>
-                <a:cs typeface="Segoe UI"/>
-              </a:rPr>
-              <a:t xml:space="preserve">y</a:t>
-            </a:r>
-            <a:r>
-              <a:rPr lang="en-US" sz="1658" dirty="0" b="1" baseline="-25000">
-                <a:solidFill>
-                  <a:srgbClr val="3050B8"/>
-                </a:solidFill>
-                <a:latin typeface="Segoe UI"/>
-                <a:cs typeface="Segoe UI"/>
-              </a:rPr>
-              <a:t xml:space="preserve">1</a:t>
-            </a:r>
-            <a:r>
-              <a:rPr lang="en-US" sz="1950" dirty="0">
-                <a:solidFill>
-                  <a:srgbClr val="16171D"/>
-                </a:solidFill>
-                <a:latin typeface="Segoe UI"/>
-                <a:cs typeface="Segoe UI"/>
-              </a:rPr>
-              <a:t xml:space="preserve">).</a:t>
-            </a:r>
-            <a:endParaRPr lang="en-US" sz="1950" dirty="0"/>
-          </a:p>
-        </p:txBody>
-      </p:sp>
-      <p:sp>
-        <p:nvSpPr>
-          <p:cNvPr id="6" name="Shape 6"/>
-          <p:cNvSpPr txBox="1"/>
-          <p:nvPr/>
-        </p:nvSpPr>
-        <p:spPr>
-          <a:xfrm>
-            <a:off x="685800" y="2665476"/>
-            <a:ext cx="10820095" cy="352044"/>
+              <a:rPr lang="en-US" sz="2325" dirty="0">
+                <a:solidFill>
+                  <a:srgbClr val="16171D"/>
+                </a:solidFill>
+                <a:latin typeface="Cambria"/>
+                <a:cs typeface="Cambria"/>
+              </a:rPr>
+              <a:t xml:space="preserve"> − 2)</a:t>
+            </a:r>
+            <a:endParaRPr lang="en-US" sz="2325" dirty="0"/>
+          </a:p>
+        </p:txBody>
+      </p:sp>
+      <p:sp>
+        <p:nvSpPr>
+          <p:cNvPr id="8" name="Shape 8"/>
+          <p:cNvSpPr txBox="1"/>
+          <p:nvPr/>
+        </p:nvSpPr>
+        <p:spPr>
+          <a:xfrm>
+            <a:off x="6362548" y="1675638"/>
+            <a:ext cx="5143348" cy="649224"/>
           </a:xfrm>
           <a:prstGeom prst="rect">
             <a:avLst/>
@@ -8657,16 +10695,6 @@
               </a:lnSpc>
             </a:pPr>
             <a:r>
-              <a:rPr lang="en-US" sz="1950" dirty="0" b="1">
-                <a:solidFill>
-                  <a:srgbClr val="16171D"/>
-                </a:solidFill>
-                <a:latin typeface="Segoe UI"/>
-                <a:cs typeface="Segoe UI"/>
-              </a:rPr>
-              <a:t xml:space="preserve">3.</a:t>
-            </a:r>
-            <a:r>
               <a:rPr lang="en-US" sz="1950" dirty="0">
                 <a:solidFill>
                   <a:srgbClr val="16171D"/>
@@ -8674,142 +10702,120 @@
                 <a:latin typeface="Segoe UI"/>
                 <a:cs typeface="Segoe UI"/>
               </a:rPr>
-              <a:t xml:space="preserve"> Put them into </a:t>
-            </a:r>
-            <a:r>
-              <a:rPr lang="en-US" sz="1950" dirty="0" i="1">
-                <a:solidFill>
-                  <a:srgbClr val="16171D"/>
-                </a:solidFill>
-                <a:latin typeface="Segoe UI"/>
-                <a:cs typeface="Segoe UI"/>
+              <a:t xml:space="preserve">3. Rewrite #2 in slope-intercept form. </a:t>
+            </a:r>
+            <a:r>
+              <a:rPr lang="en-US" sz="1575" dirty="0">
+                <a:solidFill>
+                  <a:srgbClr val="5F6272"/>
+                </a:solidFill>
+                <a:latin typeface="Segoe UI"/>
+                <a:cs typeface="Segoe UI"/>
+              </a:rPr>
+              <a:t xml:space="preserve">(SE p. 203)</a:t>
+            </a:r>
+            <a:endParaRPr lang="en-US" sz="1950" dirty="0"/>
+          </a:p>
+        </p:txBody>
+      </p:sp>
+      <p:sp>
+        <p:nvSpPr>
+          <p:cNvPr id="9" name="Shape 9"/>
+          <p:cNvSpPr txBox="1"/>
+          <p:nvPr/>
+        </p:nvSpPr>
+        <p:spPr>
+          <a:xfrm>
+            <a:off x="6362548" y="2458212"/>
+            <a:ext cx="3571326" cy="518922"/>
+          </a:xfrm>
+          <a:prstGeom prst="roundRect">
+            <a:avLst>
+              <a:gd name="adj" fmla="val 8000"/>
+            </a:avLst>
+          </a:prstGeom>
+          <a:solidFill>
+            <a:srgbClr val="EDF5E9"/>
+          </a:solidFill>
+          <a:ln>
+            <a:noFill/>
+          </a:ln>
+        </p:spPr>
+        <p:txBody>
+          <a:bodyPr wrap="square" lIns="164592" tIns="64008" rIns="164592" bIns="64008" anchor="ctr">
+            <a:noAutofit/>
+          </a:bodyPr>
+          <a:lstStyle/>
+          <a:p>
+            <a:pPr algn="l">
+              <a:lnSpc>
+                <a:spcPct val="100000"/>
+              </a:lnSpc>
+            </a:pPr>
+            <a:r>
+              <a:rPr lang="en-US" sz="1125" dirty="0" b="1" spc="100">
+                <a:solidFill>
+                  <a:srgbClr val="4F8A3C"/>
+                </a:solidFill>
+                <a:latin typeface="Segoe UI"/>
+                <a:cs typeface="Segoe UI"/>
+              </a:rPr>
+              <a:t xml:space="preserve">ANSWER   </a:t>
+            </a:r>
+            <a:r>
+              <a:rPr lang="en-US" sz="2325" dirty="0" i="1">
+                <a:solidFill>
+                  <a:srgbClr val="16171D"/>
+                </a:solidFill>
+                <a:latin typeface="Cambria"/>
+                <a:cs typeface="Cambria"/>
               </a:rPr>
               <a:t xml:space="preserve">y</a:t>
             </a:r>
             <a:r>
-              <a:rPr lang="en-US" sz="1950" dirty="0">
-                <a:solidFill>
-                  <a:srgbClr val="16171D"/>
-                </a:solidFill>
-                <a:latin typeface="Segoe UI"/>
-                <a:cs typeface="Segoe UI"/>
-              </a:rPr>
-              <a:t xml:space="preserve"> − </a:t>
-            </a:r>
-            <a:r>
-              <a:rPr lang="en-US" sz="1950" dirty="0" b="1" i="1">
-                <a:solidFill>
-                  <a:srgbClr val="3050B8"/>
-                </a:solidFill>
-                <a:latin typeface="Segoe UI"/>
-                <a:cs typeface="Segoe UI"/>
-              </a:rPr>
-              <a:t xml:space="preserve">y</a:t>
-            </a:r>
-            <a:r>
-              <a:rPr lang="en-US" sz="1658" dirty="0" b="1" baseline="-25000">
-                <a:solidFill>
-                  <a:srgbClr val="3050B8"/>
-                </a:solidFill>
-                <a:latin typeface="Segoe UI"/>
-                <a:cs typeface="Segoe UI"/>
-              </a:rPr>
-              <a:t xml:space="preserve">1</a:t>
-            </a:r>
-            <a:r>
-              <a:rPr lang="en-US" sz="1950" dirty="0">
-                <a:solidFill>
-                  <a:srgbClr val="16171D"/>
-                </a:solidFill>
-                <a:latin typeface="Segoe UI"/>
-                <a:cs typeface="Segoe UI"/>
-              </a:rPr>
-              <a:t xml:space="preserve"> = </a:t>
-            </a:r>
-            <a:r>
-              <a:rPr lang="en-US" sz="1950" dirty="0" b="1" i="1">
-                <a:solidFill>
-                  <a:srgbClr val="C9561F"/>
-                </a:solidFill>
-                <a:latin typeface="Segoe UI"/>
-                <a:cs typeface="Segoe UI"/>
-              </a:rPr>
-              <a:t xml:space="preserve">m</a:t>
-            </a:r>
-            <a:r>
-              <a:rPr lang="en-US" sz="1950" dirty="0">
-                <a:solidFill>
-                  <a:srgbClr val="16171D"/>
-                </a:solidFill>
-                <a:latin typeface="Segoe UI"/>
-                <a:cs typeface="Segoe UI"/>
-              </a:rPr>
-              <a:t xml:space="preserve">(</a:t>
-            </a:r>
-            <a:r>
-              <a:rPr lang="en-US" sz="1950" dirty="0" i="1">
-                <a:solidFill>
-                  <a:srgbClr val="16171D"/>
-                </a:solidFill>
-                <a:latin typeface="Segoe UI"/>
-                <a:cs typeface="Segoe UI"/>
+              <a:rPr lang="en-US" sz="2325" dirty="0">
+                <a:solidFill>
+                  <a:srgbClr val="16171D"/>
+                </a:solidFill>
+                <a:latin typeface="Cambria"/>
+                <a:cs typeface="Cambria"/>
+              </a:rPr>
+              <a:t xml:space="preserve"> = 3</a:t>
+            </a:r>
+            <a:r>
+              <a:rPr lang="en-US" sz="2325" dirty="0" i="1">
+                <a:solidFill>
+                  <a:srgbClr val="16171D"/>
+                </a:solidFill>
+                <a:latin typeface="Cambria"/>
+                <a:cs typeface="Cambria"/>
               </a:rPr>
               <a:t xml:space="preserve">x</a:t>
             </a:r>
             <a:r>
-              <a:rPr lang="en-US" sz="1950" dirty="0">
-                <a:solidFill>
-                  <a:srgbClr val="16171D"/>
-                </a:solidFill>
-                <a:latin typeface="Segoe UI"/>
-                <a:cs typeface="Segoe UI"/>
-              </a:rPr>
-              <a:t xml:space="preserve"> − </a:t>
-            </a:r>
-            <a:r>
-              <a:rPr lang="en-US" sz="1950" dirty="0" b="1" i="1">
-                <a:solidFill>
-                  <a:srgbClr val="3050B8"/>
-                </a:solidFill>
-                <a:latin typeface="Segoe UI"/>
-                <a:cs typeface="Segoe UI"/>
-              </a:rPr>
-              <a:t xml:space="preserve">x</a:t>
-            </a:r>
-            <a:r>
-              <a:rPr lang="en-US" sz="1658" dirty="0" b="1" baseline="-25000">
-                <a:solidFill>
-                  <a:srgbClr val="3050B8"/>
-                </a:solidFill>
-                <a:latin typeface="Segoe UI"/>
-                <a:cs typeface="Segoe UI"/>
-              </a:rPr>
-              <a:t xml:space="preserve">1</a:t>
-            </a:r>
-            <a:r>
-              <a:rPr lang="en-US" sz="1950" dirty="0">
-                <a:solidFill>
-                  <a:srgbClr val="16171D"/>
-                </a:solidFill>
-                <a:latin typeface="Segoe UI"/>
-                <a:cs typeface="Segoe UI"/>
-              </a:rPr>
-              <a:t xml:space="preserve">).</a:t>
-            </a:r>
-            <a:endParaRPr lang="en-US" sz="1950" dirty="0"/>
-          </a:p>
-        </p:txBody>
-      </p:sp>
-      <p:sp>
-        <p:nvSpPr>
-          <p:cNvPr id="7" name="Shape 7"/>
-          <p:cNvSpPr txBox="1"/>
-          <p:nvPr/>
-        </p:nvSpPr>
-        <p:spPr>
-          <a:xfrm>
-            <a:off x="685800" y="3188970"/>
-            <a:ext cx="10820095" cy="352044"/>
+              <a:rPr lang="en-US" sz="2325" dirty="0">
+                <a:solidFill>
+                  <a:srgbClr val="16171D"/>
+                </a:solidFill>
+                <a:latin typeface="Cambria"/>
+                <a:cs typeface="Cambria"/>
+              </a:rPr>
+              <a:t xml:space="preserve"> − 1</a:t>
+            </a:r>
+            <a:endParaRPr lang="en-US" sz="2325" dirty="0"/>
+          </a:p>
+        </p:txBody>
+      </p:sp>
+      <p:sp>
+        <p:nvSpPr>
+          <p:cNvPr id="10" name="Shape 10"/>
+          <p:cNvSpPr txBox="1"/>
+          <p:nvPr/>
+        </p:nvSpPr>
+        <p:spPr>
+          <a:xfrm>
+            <a:off x="6362548" y="3243834"/>
+            <a:ext cx="5143348" cy="649224"/>
           </a:xfrm>
           <a:prstGeom prst="rect">
             <a:avLst/>
@@ -8831,16 +10837,6 @@
               </a:lnSpc>
             </a:pPr>
             <a:r>
-              <a:rPr lang="en-US" sz="1950" dirty="0" b="1">
-                <a:solidFill>
-                  <a:srgbClr val="16171D"/>
-                </a:solidFill>
-                <a:latin typeface="Segoe UI"/>
-                <a:cs typeface="Segoe UI"/>
-              </a:rPr>
-              <a:t xml:space="preserve">4.</a:t>
-            </a:r>
-            <a:r>
               <a:rPr lang="en-US" sz="1950" dirty="0">
                 <a:solidFill>
                   <a:srgbClr val="16171D"/>
@@ -8848,49 +10844,1475 @@
                 <a:latin typeface="Segoe UI"/>
                 <a:cs typeface="Segoe UI"/>
               </a:rPr>
-              <a:t xml:space="preserve"> Check the signs: </a:t>
-            </a:r>
-            <a:r>
-              <a:rPr lang="en-US" sz="1950" dirty="0" i="1">
-                <a:solidFill>
-                  <a:srgbClr val="16171D"/>
-                </a:solidFill>
-                <a:latin typeface="Segoe UI"/>
-                <a:cs typeface="Segoe UI"/>
+              <a:t xml:space="preserve">4. Horizontal and vertical lines through (−3, 8) </a:t>
+            </a:r>
+            <a:r>
+              <a:rPr lang="en-US" sz="1575" dirty="0">
+                <a:solidFill>
+                  <a:srgbClr val="5F6272"/>
+                </a:solidFill>
+                <a:latin typeface="Segoe UI"/>
+                <a:cs typeface="Segoe UI"/>
+              </a:rPr>
+              <a:t xml:space="preserve">(SE pp. 206–207)</a:t>
+            </a:r>
+            <a:endParaRPr lang="en-US" sz="1950" dirty="0"/>
+          </a:p>
+        </p:txBody>
+      </p:sp>
+      <p:sp>
+        <p:nvSpPr>
+          <p:cNvPr id="11" name="Shape 11"/>
+          <p:cNvSpPr txBox="1"/>
+          <p:nvPr/>
+        </p:nvSpPr>
+        <p:spPr>
+          <a:xfrm>
+            <a:off x="6362548" y="4026408"/>
+            <a:ext cx="4068806" cy="518922"/>
+          </a:xfrm>
+          <a:prstGeom prst="roundRect">
+            <a:avLst>
+              <a:gd name="adj" fmla="val 8000"/>
+            </a:avLst>
+          </a:prstGeom>
+          <a:solidFill>
+            <a:srgbClr val="EDF5E9"/>
+          </a:solidFill>
+          <a:ln>
+            <a:noFill/>
+          </a:ln>
+        </p:spPr>
+        <p:txBody>
+          <a:bodyPr wrap="square" lIns="164592" tIns="64008" rIns="164592" bIns="64008" anchor="ctr">
+            <a:noAutofit/>
+          </a:bodyPr>
+          <a:lstStyle/>
+          <a:p>
+            <a:pPr algn="l">
+              <a:lnSpc>
+                <a:spcPct val="100000"/>
+              </a:lnSpc>
+            </a:pPr>
+            <a:r>
+              <a:rPr lang="en-US" sz="1125" dirty="0" b="1" spc="100">
+                <a:solidFill>
+                  <a:srgbClr val="4F8A3C"/>
+                </a:solidFill>
+                <a:latin typeface="Segoe UI"/>
+                <a:cs typeface="Segoe UI"/>
+              </a:rPr>
+              <a:t xml:space="preserve">ANSWER   </a:t>
+            </a:r>
+            <a:r>
+              <a:rPr lang="en-US" sz="2325" dirty="0" i="1">
+                <a:solidFill>
+                  <a:srgbClr val="16171D"/>
+                </a:solidFill>
+                <a:latin typeface="Cambria"/>
+                <a:cs typeface="Cambria"/>
+              </a:rPr>
+              <a:t xml:space="preserve">y</a:t>
+            </a:r>
+            <a:r>
+              <a:rPr lang="en-US" sz="2325" dirty="0">
+                <a:solidFill>
+                  <a:srgbClr val="16171D"/>
+                </a:solidFill>
+                <a:latin typeface="Cambria"/>
+                <a:cs typeface="Cambria"/>
+              </a:rPr>
+              <a:t xml:space="preserve"> = 8; </a:t>
+            </a:r>
+            <a:r>
+              <a:rPr lang="en-US" sz="2325" dirty="0" i="1">
+                <a:solidFill>
+                  <a:srgbClr val="16171D"/>
+                </a:solidFill>
+                <a:latin typeface="Cambria"/>
+                <a:cs typeface="Cambria"/>
               </a:rPr>
               <a:t xml:space="preserve">x</a:t>
             </a:r>
             <a:r>
-              <a:rPr lang="en-US" sz="1950" dirty="0">
-                <a:solidFill>
-                  <a:srgbClr val="16171D"/>
-                </a:solidFill>
-                <a:latin typeface="Segoe UI"/>
-                <a:cs typeface="Segoe UI"/>
-              </a:rPr>
-              <a:t xml:space="preserve"> − (−4) becomes </a:t>
-            </a:r>
-            <a:r>
-              <a:rPr lang="en-US" sz="1950" dirty="0" i="1">
-                <a:solidFill>
-                  <a:srgbClr val="16171D"/>
-                </a:solidFill>
-                <a:latin typeface="Segoe UI"/>
-                <a:cs typeface="Segoe UI"/>
+              <a:rPr lang="en-US" sz="2325" dirty="0">
+                <a:solidFill>
+                  <a:srgbClr val="16171D"/>
+                </a:solidFill>
+                <a:latin typeface="Cambria"/>
+                <a:cs typeface="Cambria"/>
+              </a:rPr>
+              <a:t xml:space="preserve"> = −3</a:t>
+            </a:r>
+            <a:endParaRPr lang="en-US" sz="2325" dirty="0"/>
+          </a:p>
+        </p:txBody>
+      </p:sp>
+    </p:spTree>
+  </p:cSld>
+  <p:clrMapOvr>
+    <a:masterClrMapping/>
+  </p:clrMapOvr>
+  <p:transition spd="med">
+    <p:fade/>
+  </p:transition>
+  <p:timing>
+    <p:tnLst>
+      <p:par>
+        <p:cTn id="1" dur="indefinite" restart="never" nodeType="tmRoot">
+          <p:childTnLst>
+            <p:seq concurrent="1" nextAc="seek">
+              <p:cTn id="2" dur="indefinite" nodeType="mainSeq">
+                <p:childTnLst>
+                  <p:par>
+                    <p:cTn id="8" fill="hold">
+                      <p:stCondLst>
+                        <p:cond delay="indefinite"/>
+                      </p:stCondLst>
+                      <p:childTnLst>
+                        <p:par>
+                          <p:cTn id="9" fill="hold">
+                            <p:stCondLst>
+                              <p:cond delay="0"/>
+                            </p:stCondLst>
+                            <p:childTnLst>
+                              <p:par>
+                                <p:cTn id="7" presetID="53" presetClass="entr" presetSubtype="16" fill="hold" nodeType="clickEffect">
+                                  <p:stCondLst>
+                                    <p:cond delay="0"/>
+                                  </p:stCondLst>
+                                  <p:childTnLst>
+                                    <p:set>
+                                      <p:cBhvr>
+                                        <p:cTn id="3" dur="1" fill="hold">
+                                          <p:stCondLst>
+                                            <p:cond delay="0"/>
+                                          </p:stCondLst>
+                                        </p:cTn>
+                                        <p:tgtEl>
+                                          <p:spTgt spid="5"/>
+                                        </p:tgtEl>
+                                        <p:attrNameLst>
+                                          <p:attrName>style.visibility</p:attrName>
+                                        </p:attrNameLst>
+                                      </p:cBhvr>
+                                      <p:to>
+                                        <p:strVal val="visible"/>
+                                      </p:to>
+                                    </p:set>
+                                    <p:animEffect transition="in" filter="fade">
+                                      <p:cBhvr>
+                                        <p:cTn id="4" dur="500"/>
+                                        <p:tgtEl>
+                                          <p:spTgt spid="5"/>
+                                        </p:tgtEl>
+                                      </p:cBhvr>
+                                    </p:animEffect>
+                                    <p:anim calcmode="lin" valueType="num">
+                                      <p:cBhvr>
+                                        <p:cTn id="5" dur="500" fill="hold"/>
+                                        <p:tgtEl>
+                                          <p:spTgt spid="5"/>
+                                        </p:tgtEl>
+                                        <p:attrNameLst>
+                                          <p:attrName>ppt_w</p:attrName>
+                                        </p:attrNameLst>
+                                      </p:cBhvr>
+                                      <p:tavLst>
+                                        <p:tav tm="0">
+                                          <p:val>
+                                            <p:fltVal val="0"/>
+                                          </p:val>
+                                        </p:tav>
+                                        <p:tav tm="100000">
+                                          <p:val>
+                                            <p:strVal val="#ppt_w"/>
+                                          </p:val>
+                                        </p:tav>
+                                      </p:tavLst>
+                                    </p:anim>
+                                    <p:anim calcmode="lin" valueType="num">
+                                      <p:cBhvr>
+                                        <p:cTn id="6" dur="500" fill="hold"/>
+                                        <p:tgtEl>
+                                          <p:spTgt spid="5"/>
+                                        </p:tgtEl>
+                                        <p:attrNameLst>
+                                          <p:attrName>ppt_h</p:attrName>
+                                        </p:attrNameLst>
+                                      </p:cBhvr>
+                                      <p:tavLst>
+                                        <p:tav tm="0">
+                                          <p:val>
+                                            <p:fltVal val="0"/>
+                                          </p:val>
+                                        </p:tav>
+                                        <p:tav tm="100000">
+                                          <p:val>
+                                            <p:strVal val="#ppt_h"/>
+                                          </p:val>
+                                        </p:tav>
+                                      </p:tavLst>
+                                    </p:anim>
+                                  </p:childTnLst>
+                                </p:cTn>
+                              </p:par>
+                            </p:childTnLst>
+                          </p:cTn>
+                        </p:par>
+                      </p:childTnLst>
+                    </p:cTn>
+                  </p:par>
+                  <p:par>
+                    <p:cTn id="15" fill="hold">
+                      <p:stCondLst>
+                        <p:cond delay="indefinite"/>
+                      </p:stCondLst>
+                      <p:childTnLst>
+                        <p:par>
+                          <p:cTn id="16" fill="hold">
+                            <p:stCondLst>
+                              <p:cond delay="0"/>
+                            </p:stCondLst>
+                            <p:childTnLst>
+                              <p:par>
+                                <p:cTn id="14" presetID="53" presetClass="entr" presetSubtype="16" fill="hold" nodeType="clickEffect">
+                                  <p:stCondLst>
+                                    <p:cond delay="0"/>
+                                  </p:stCondLst>
+                                  <p:childTnLst>
+                                    <p:set>
+                                      <p:cBhvr>
+                                        <p:cTn id="10" dur="1" fill="hold">
+                                          <p:stCondLst>
+                                            <p:cond delay="0"/>
+                                          </p:stCondLst>
+                                        </p:cTn>
+                                        <p:tgtEl>
+                                          <p:spTgt spid="7"/>
+                                        </p:tgtEl>
+                                        <p:attrNameLst>
+                                          <p:attrName>style.visibility</p:attrName>
+                                        </p:attrNameLst>
+                                      </p:cBhvr>
+                                      <p:to>
+                                        <p:strVal val="visible"/>
+                                      </p:to>
+                                    </p:set>
+                                    <p:animEffect transition="in" filter="fade">
+                                      <p:cBhvr>
+                                        <p:cTn id="11" dur="500"/>
+                                        <p:tgtEl>
+                                          <p:spTgt spid="7"/>
+                                        </p:tgtEl>
+                                      </p:cBhvr>
+                                    </p:animEffect>
+                                    <p:anim calcmode="lin" valueType="num">
+                                      <p:cBhvr>
+                                        <p:cTn id="12" dur="500" fill="hold"/>
+                                        <p:tgtEl>
+                                          <p:spTgt spid="7"/>
+                                        </p:tgtEl>
+                                        <p:attrNameLst>
+                                          <p:attrName>ppt_w</p:attrName>
+                                        </p:attrNameLst>
+                                      </p:cBhvr>
+                                      <p:tavLst>
+                                        <p:tav tm="0">
+                                          <p:val>
+                                            <p:fltVal val="0"/>
+                                          </p:val>
+                                        </p:tav>
+                                        <p:tav tm="100000">
+                                          <p:val>
+                                            <p:strVal val="#ppt_w"/>
+                                          </p:val>
+                                        </p:tav>
+                                      </p:tavLst>
+                                    </p:anim>
+                                    <p:anim calcmode="lin" valueType="num">
+                                      <p:cBhvr>
+                                        <p:cTn id="13" dur="500" fill="hold"/>
+                                        <p:tgtEl>
+                                          <p:spTgt spid="7"/>
+                                        </p:tgtEl>
+                                        <p:attrNameLst>
+                                          <p:attrName>ppt_h</p:attrName>
+                                        </p:attrNameLst>
+                                      </p:cBhvr>
+                                      <p:tavLst>
+                                        <p:tav tm="0">
+                                          <p:val>
+                                            <p:fltVal val="0"/>
+                                          </p:val>
+                                        </p:tav>
+                                        <p:tav tm="100000">
+                                          <p:val>
+                                            <p:strVal val="#ppt_h"/>
+                                          </p:val>
+                                        </p:tav>
+                                      </p:tavLst>
+                                    </p:anim>
+                                  </p:childTnLst>
+                                </p:cTn>
+                              </p:par>
+                            </p:childTnLst>
+                          </p:cTn>
+                        </p:par>
+                      </p:childTnLst>
+                    </p:cTn>
+                  </p:par>
+                  <p:par>
+                    <p:cTn id="22" fill="hold">
+                      <p:stCondLst>
+                        <p:cond delay="indefinite"/>
+                      </p:stCondLst>
+                      <p:childTnLst>
+                        <p:par>
+                          <p:cTn id="23" fill="hold">
+                            <p:stCondLst>
+                              <p:cond delay="0"/>
+                            </p:stCondLst>
+                            <p:childTnLst>
+                              <p:par>
+                                <p:cTn id="21" presetID="53" presetClass="entr" presetSubtype="16" fill="hold" nodeType="clickEffect">
+                                  <p:stCondLst>
+                                    <p:cond delay="0"/>
+                                  </p:stCondLst>
+                                  <p:childTnLst>
+                                    <p:set>
+                                      <p:cBhvr>
+                                        <p:cTn id="17" dur="1" fill="hold">
+                                          <p:stCondLst>
+                                            <p:cond delay="0"/>
+                                          </p:stCondLst>
+                                        </p:cTn>
+                                        <p:tgtEl>
+                                          <p:spTgt spid="9"/>
+                                        </p:tgtEl>
+                                        <p:attrNameLst>
+                                          <p:attrName>style.visibility</p:attrName>
+                                        </p:attrNameLst>
+                                      </p:cBhvr>
+                                      <p:to>
+                                        <p:strVal val="visible"/>
+                                      </p:to>
+                                    </p:set>
+                                    <p:animEffect transition="in" filter="fade">
+                                      <p:cBhvr>
+                                        <p:cTn id="18" dur="500"/>
+                                        <p:tgtEl>
+                                          <p:spTgt spid="9"/>
+                                        </p:tgtEl>
+                                      </p:cBhvr>
+                                    </p:animEffect>
+                                    <p:anim calcmode="lin" valueType="num">
+                                      <p:cBhvr>
+                                        <p:cTn id="19" dur="500" fill="hold"/>
+                                        <p:tgtEl>
+                                          <p:spTgt spid="9"/>
+                                        </p:tgtEl>
+                                        <p:attrNameLst>
+                                          <p:attrName>ppt_w</p:attrName>
+                                        </p:attrNameLst>
+                                      </p:cBhvr>
+                                      <p:tavLst>
+                                        <p:tav tm="0">
+                                          <p:val>
+                                            <p:fltVal val="0"/>
+                                          </p:val>
+                                        </p:tav>
+                                        <p:tav tm="100000">
+                                          <p:val>
+                                            <p:strVal val="#ppt_w"/>
+                                          </p:val>
+                                        </p:tav>
+                                      </p:tavLst>
+                                    </p:anim>
+                                    <p:anim calcmode="lin" valueType="num">
+                                      <p:cBhvr>
+                                        <p:cTn id="20" dur="500" fill="hold"/>
+                                        <p:tgtEl>
+                                          <p:spTgt spid="9"/>
+                                        </p:tgtEl>
+                                        <p:attrNameLst>
+                                          <p:attrName>ppt_h</p:attrName>
+                                        </p:attrNameLst>
+                                      </p:cBhvr>
+                                      <p:tavLst>
+                                        <p:tav tm="0">
+                                          <p:val>
+                                            <p:fltVal val="0"/>
+                                          </p:val>
+                                        </p:tav>
+                                        <p:tav tm="100000">
+                                          <p:val>
+                                            <p:strVal val="#ppt_h"/>
+                                          </p:val>
+                                        </p:tav>
+                                      </p:tavLst>
+                                    </p:anim>
+                                  </p:childTnLst>
+                                </p:cTn>
+                              </p:par>
+                            </p:childTnLst>
+                          </p:cTn>
+                        </p:par>
+                      </p:childTnLst>
+                    </p:cTn>
+                  </p:par>
+                  <p:par>
+                    <p:cTn id="29" fill="hold">
+                      <p:stCondLst>
+                        <p:cond delay="indefinite"/>
+                      </p:stCondLst>
+                      <p:childTnLst>
+                        <p:par>
+                          <p:cTn id="30" fill="hold">
+                            <p:stCondLst>
+                              <p:cond delay="0"/>
+                            </p:stCondLst>
+                            <p:childTnLst>
+                              <p:par>
+                                <p:cTn id="28" presetID="53" presetClass="entr" presetSubtype="16" fill="hold" nodeType="clickEffect">
+                                  <p:stCondLst>
+                                    <p:cond delay="0"/>
+                                  </p:stCondLst>
+                                  <p:childTnLst>
+                                    <p:set>
+                                      <p:cBhvr>
+                                        <p:cTn id="24" dur="1" fill="hold">
+                                          <p:stCondLst>
+                                            <p:cond delay="0"/>
+                                          </p:stCondLst>
+                                        </p:cTn>
+                                        <p:tgtEl>
+                                          <p:spTgt spid="11"/>
+                                        </p:tgtEl>
+                                        <p:attrNameLst>
+                                          <p:attrName>style.visibility</p:attrName>
+                                        </p:attrNameLst>
+                                      </p:cBhvr>
+                                      <p:to>
+                                        <p:strVal val="visible"/>
+                                      </p:to>
+                                    </p:set>
+                                    <p:animEffect transition="in" filter="fade">
+                                      <p:cBhvr>
+                                        <p:cTn id="25" dur="500"/>
+                                        <p:tgtEl>
+                                          <p:spTgt spid="11"/>
+                                        </p:tgtEl>
+                                      </p:cBhvr>
+                                    </p:animEffect>
+                                    <p:anim calcmode="lin" valueType="num">
+                                      <p:cBhvr>
+                                        <p:cTn id="26" dur="500" fill="hold"/>
+                                        <p:tgtEl>
+                                          <p:spTgt spid="11"/>
+                                        </p:tgtEl>
+                                        <p:attrNameLst>
+                                          <p:attrName>ppt_w</p:attrName>
+                                        </p:attrNameLst>
+                                      </p:cBhvr>
+                                      <p:tavLst>
+                                        <p:tav tm="0">
+                                          <p:val>
+                                            <p:fltVal val="0"/>
+                                          </p:val>
+                                        </p:tav>
+                                        <p:tav tm="100000">
+                                          <p:val>
+                                            <p:strVal val="#ppt_w"/>
+                                          </p:val>
+                                        </p:tav>
+                                      </p:tavLst>
+                                    </p:anim>
+                                    <p:anim calcmode="lin" valueType="num">
+                                      <p:cBhvr>
+                                        <p:cTn id="27" dur="500" fill="hold"/>
+                                        <p:tgtEl>
+                                          <p:spTgt spid="11"/>
+                                        </p:tgtEl>
+                                        <p:attrNameLst>
+                                          <p:attrName>ppt_h</p:attrName>
+                                        </p:attrNameLst>
+                                      </p:cBhvr>
+                                      <p:tavLst>
+                                        <p:tav tm="0">
+                                          <p:val>
+                                            <p:fltVal val="0"/>
+                                          </p:val>
+                                        </p:tav>
+                                        <p:tav tm="100000">
+                                          <p:val>
+                                            <p:strVal val="#ppt_h"/>
+                                          </p:val>
+                                        </p:tav>
+                                      </p:tavLst>
+                                    </p:anim>
+                                  </p:childTnLst>
+                                </p:cTn>
+                              </p:par>
+                            </p:childTnLst>
+                          </p:cTn>
+                        </p:par>
+                      </p:childTnLst>
+                    </p:cTn>
+                  </p:par>
+                </p:childTnLst>
+              </p:cTn>
+              <p:prevCondLst>
+                <p:cond evt="onPrev" delay="0">
+                  <p:tgtEl>
+                    <p:sldTgt/>
+                  </p:tgtEl>
+                </p:cond>
+              </p:prevCondLst>
+              <p:nextCondLst>
+                <p:cond evt="onNext" delay="0">
+                  <p:tgtEl>
+                    <p:sldTgt/>
+                  </p:tgtEl>
+                </p:cond>
+              </p:nextCondLst>
+            </p:seq>
+          </p:childTnLst>
+        </p:cTn>
+      </p:par>
+    </p:tnLst>
+  </p:timing>
+</p:sld>
+</file>
+
+<file path=ppt/slides/slide4.xml><?xml version="1.0" encoding="utf-8"?>
+<p:sld xmlns:a="http://schemas.openxmlformats.org/drawingml/2006/main" xmlns:r="http://schemas.openxmlformats.org/officeDocument/2006/relationships" xmlns:p="http://schemas.openxmlformats.org/presentationml/2006/main">
+  <p:cSld>
+    <p:spTree>
+      <p:nvGrpSpPr>
+        <p:cNvPr id="1" name=""/>
+        <p:cNvGrpSpPr/>
+        <p:nvPr/>
+      </p:nvGrpSpPr>
+      <p:grpSpPr>
+        <a:xfrm>
+          <a:off x="0" y="0"/>
+          <a:ext cx="0" cy="0"/>
+          <a:chOff x="0" y="0"/>
+          <a:chExt cx="0" cy="0"/>
+        </a:xfrm>
+      </p:grpSpPr>
+      <p:sp>
+        <p:nvSpPr>
+          <p:cNvPr id="2" name="Shape 2"/>
+          <p:cNvSpPr txBox="1"/>
+          <p:nvPr/>
+        </p:nvSpPr>
+        <p:spPr>
+          <a:xfrm>
+            <a:off x="685800" y="457200"/>
+            <a:ext cx="10820095" cy="237744"/>
+          </a:xfrm>
+          <a:prstGeom prst="rect">
+            <a:avLst/>
+          </a:prstGeom>
+          <a:noFill/>
+          <a:ln>
+            <a:noFill/>
+          </a:ln>
+        </p:spPr>
+        <p:txBody>
+          <a:bodyPr wrap="square" lIns="36576" tIns="27432" rIns="36576" bIns="27432" anchor="t">
+            <a:noAutofit/>
+          </a:bodyPr>
+          <a:lstStyle/>
+          <a:p>
+            <a:pPr algn="l">
+              <a:lnSpc>
+                <a:spcPct val="100000"/>
+              </a:lnSpc>
+            </a:pPr>
+            <a:r>
+              <a:rPr lang="en-US" sz="1200" dirty="0" b="1" spc="150" cap="all">
+                <a:solidFill>
+                  <a:srgbClr val="5F6272"/>
+                </a:solidFill>
+                <a:latin typeface="Segoe UI"/>
+                <a:cs typeface="Segoe UI"/>
+              </a:rPr>
+              <a:t xml:space="preserve">Lesson 4 · Vocabulary</a:t>
+            </a:r>
+            <a:endParaRPr lang="en-US" sz="1200" dirty="0"/>
+          </a:p>
+        </p:txBody>
+      </p:sp>
+      <p:sp>
+        <p:nvSpPr>
+          <p:cNvPr id="3" name="Shape 3"/>
+          <p:cNvSpPr txBox="1"/>
+          <p:nvPr/>
+        </p:nvSpPr>
+        <p:spPr>
+          <a:xfrm>
+            <a:off x="685800" y="866394"/>
+            <a:ext cx="10820095" cy="580644"/>
+          </a:xfrm>
+          <a:prstGeom prst="rect">
+            <a:avLst/>
+          </a:prstGeom>
+          <a:noFill/>
+          <a:ln>
+            <a:noFill/>
+          </a:ln>
+        </p:spPr>
+        <p:txBody>
+          <a:bodyPr wrap="square" lIns="36576" tIns="27432" rIns="36576" bIns="27432" anchor="t">
+            <a:noAutofit/>
+          </a:bodyPr>
+          <a:lstStyle/>
+          <a:p>
+            <a:pPr algn="l">
+              <a:lnSpc>
+                <a:spcPct val="100000"/>
+              </a:lnSpc>
+            </a:pPr>
+            <a:r>
+              <a:rPr lang="en-US" sz="3450" dirty="0" b="1">
+                <a:solidFill>
+                  <a:srgbClr val="16171D"/>
+                </a:solidFill>
+                <a:latin typeface="Segoe UI"/>
+                <a:cs typeface="Segoe UI"/>
+              </a:rPr>
+              <a:t xml:space="preserve">Words we need</a:t>
+            </a:r>
+            <a:endParaRPr lang="en-US" sz="3450" dirty="0"/>
+          </a:p>
+        </p:txBody>
+      </p:sp>
+      <p:sp>
+        <p:nvSpPr>
+          <p:cNvPr id="7" name="Shape 7"/>
+          <p:cNvSpPr txBox="1"/>
+          <p:nvPr/>
+        </p:nvSpPr>
+        <p:spPr>
+          <a:xfrm>
+            <a:off x="685800" y="1618488"/>
+            <a:ext cx="3492398" cy="1966722"/>
+          </a:xfrm>
+          <a:prstGeom prst="roundRect">
+            <a:avLst>
+              <a:gd name="adj" fmla="val 8000"/>
+            </a:avLst>
+          </a:prstGeom>
+          <a:solidFill>
+            <a:srgbClr val="FFFFFF"/>
+          </a:solidFill>
+          <a:ln w="12700">
+            <a:solidFill>
+              <a:srgbClr val="E3E4EC"/>
+            </a:solidFill>
+          </a:ln>
+        </p:spPr>
+        <p:txBody>
+          <a:bodyPr wrap="square" lIns="36576" tIns="27432" rIns="36576" bIns="27432" anchor="t">
+            <a:noAutofit/>
+          </a:bodyPr>
+          <a:lstStyle/>
+          <a:p>
+            <a:pPr algn="l">
+              <a:lnSpc>
+                <a:spcPct val="100000"/>
+              </a:lnSpc>
+            </a:pPr>
+            <a:endParaRPr lang="en-US" sz="1950" dirty="0"/>
+          </a:p>
+        </p:txBody>
+      </p:sp>
+      <p:sp>
+        <p:nvSpPr>
+          <p:cNvPr id="4" name="Shape 4"/>
+          <p:cNvSpPr txBox="1"/>
+          <p:nvPr/>
+        </p:nvSpPr>
+        <p:spPr>
+          <a:xfrm>
+            <a:off x="895350" y="1789938"/>
+            <a:ext cx="3073298" cy="374904"/>
+          </a:xfrm>
+          <a:prstGeom prst="rect">
+            <a:avLst/>
+          </a:prstGeom>
+          <a:noFill/>
+          <a:ln>
+            <a:noFill/>
+          </a:ln>
+        </p:spPr>
+        <p:txBody>
+          <a:bodyPr wrap="square" lIns="36576" tIns="27432" rIns="36576" bIns="27432" anchor="t">
+            <a:noAutofit/>
+          </a:bodyPr>
+          <a:lstStyle/>
+          <a:p>
+            <a:pPr algn="l">
+              <a:lnSpc>
+                <a:spcPct val="100000"/>
+              </a:lnSpc>
+            </a:pPr>
+            <a:r>
+              <a:rPr lang="en-US" sz="2100" dirty="0" b="1">
+                <a:solidFill>
+                  <a:srgbClr val="16171D"/>
+                </a:solidFill>
+                <a:latin typeface="Segoe UI"/>
+                <a:cs typeface="Segoe UI"/>
+              </a:rPr>
+              <a:t xml:space="preserve">Slope (</a:t>
+            </a:r>
+            <a:r>
+              <a:rPr lang="en-US" sz="2100" dirty="0" b="1" i="1">
+                <a:solidFill>
+                  <a:srgbClr val="16171D"/>
+                </a:solidFill>
+                <a:latin typeface="Segoe UI"/>
+                <a:cs typeface="Segoe UI"/>
+              </a:rPr>
+              <a:t xml:space="preserve">m</a:t>
+            </a:r>
+            <a:r>
+              <a:rPr lang="en-US" sz="2100" dirty="0" b="1">
+                <a:solidFill>
+                  <a:srgbClr val="16171D"/>
+                </a:solidFill>
+                <a:latin typeface="Segoe UI"/>
+                <a:cs typeface="Segoe UI"/>
+              </a:rPr>
+              <a:t xml:space="preserve">)</a:t>
+            </a:r>
+            <a:endParaRPr lang="en-US" sz="2100" dirty="0"/>
+          </a:p>
+        </p:txBody>
+      </p:sp>
+      <p:sp>
+        <p:nvSpPr>
+          <p:cNvPr id="5" name="Shape 5"/>
+          <p:cNvSpPr txBox="1"/>
+          <p:nvPr/>
+        </p:nvSpPr>
+        <p:spPr>
+          <a:xfrm>
+            <a:off x="895350" y="2260092"/>
+            <a:ext cx="3073298" cy="294894"/>
+          </a:xfrm>
+          <a:prstGeom prst="rect">
+            <a:avLst/>
+          </a:prstGeom>
+          <a:noFill/>
+          <a:ln>
+            <a:noFill/>
+          </a:ln>
+        </p:spPr>
+        <p:txBody>
+          <a:bodyPr wrap="square" lIns="36576" tIns="27432" rIns="36576" bIns="27432" anchor="t">
+            <a:noAutofit/>
+          </a:bodyPr>
+          <a:lstStyle/>
+          <a:p>
+            <a:pPr algn="l">
+              <a:lnSpc>
+                <a:spcPct val="100000"/>
+              </a:lnSpc>
+            </a:pPr>
+            <a:r>
+              <a:rPr lang="en-US" sz="1575" dirty="0">
+                <a:solidFill>
+                  <a:srgbClr val="16171D"/>
+                </a:solidFill>
+                <a:latin typeface="Segoe UI"/>
+                <a:cs typeface="Segoe UI"/>
+              </a:rPr>
+              <a:t xml:space="preserve">How steep the line is.</a:t>
+            </a:r>
+            <a:endParaRPr lang="en-US" sz="1575" dirty="0"/>
+          </a:p>
+        </p:txBody>
+      </p:sp>
+      <p:sp>
+        <p:nvSpPr>
+          <p:cNvPr id="6" name="Shape 6"/>
+          <p:cNvSpPr txBox="1"/>
+          <p:nvPr/>
+        </p:nvSpPr>
+        <p:spPr>
+          <a:xfrm>
+            <a:off x="895350" y="2650236"/>
+            <a:ext cx="3073298" cy="763524"/>
+          </a:xfrm>
+          <a:prstGeom prst="rect">
+            <a:avLst/>
+          </a:prstGeom>
+          <a:noFill/>
+          <a:ln>
+            <a:noFill/>
+          </a:ln>
+        </p:spPr>
+        <p:txBody>
+          <a:bodyPr wrap="square" lIns="36576" tIns="27432" rIns="36576" bIns="27432" anchor="t">
+            <a:noAutofit/>
+          </a:bodyPr>
+          <a:lstStyle/>
+          <a:p>
+            <a:pPr algn="l">
+              <a:lnSpc>
+                <a:spcPct val="100000"/>
+              </a:lnSpc>
+            </a:pPr>
+            <a:r>
+              <a:rPr lang="en-US" sz="2325" dirty="0" i="1">
+                <a:solidFill>
+                  <a:srgbClr val="16171D"/>
+                </a:solidFill>
+                <a:latin typeface="Cambria"/>
+                <a:cs typeface="Cambria"/>
+              </a:rPr>
+              <a:t xml:space="preserve">m</a:t>
+            </a:r>
+            <a:r>
+              <a:rPr lang="en-US" sz="2325" dirty="0">
+                <a:solidFill>
+                  <a:srgbClr val="16171D"/>
+                </a:solidFill>
+                <a:latin typeface="Cambria"/>
+                <a:cs typeface="Cambria"/>
+              </a:rPr>
+              <a:t xml:space="preserve"> = </a:t>
+            </a:r>
+            <a:r>
+              <a:rPr lang="en-US" sz="2325" dirty="0">
+                <a:solidFill>
+                  <a:srgbClr val="16171D"/>
+                </a:solidFill>
+                <a:latin typeface="Cambria"/>
+                <a:cs typeface="Cambria"/>
+              </a:rPr>
+              <a:t xml:space="preserve">(</a:t>
+            </a:r>
+            <a:r>
+              <a:rPr lang="en-US" sz="2325" dirty="0">
+                <a:solidFill>
+                  <a:srgbClr val="16171D"/>
+                </a:solidFill>
+                <a:latin typeface="Cambria"/>
+                <a:cs typeface="Cambria"/>
+              </a:rPr>
+              <a:t xml:space="preserve">change in </a:t>
+            </a:r>
+            <a:r>
+              <a:rPr lang="en-US" sz="2325" dirty="0" i="1">
+                <a:solidFill>
+                  <a:srgbClr val="16171D"/>
+                </a:solidFill>
+                <a:latin typeface="Cambria"/>
+                <a:cs typeface="Cambria"/>
+              </a:rPr>
+              <a:t xml:space="preserve">y</a:t>
+            </a:r>
+            <a:r>
+              <a:rPr lang="en-US" sz="2325" dirty="0">
+                <a:solidFill>
+                  <a:srgbClr val="16171D"/>
+                </a:solidFill>
+                <a:latin typeface="Cambria"/>
+                <a:cs typeface="Cambria"/>
+              </a:rPr>
+              <a:t xml:space="preserve">)</a:t>
+            </a:r>
+            <a:r>
+              <a:rPr lang="en-US" sz="2325" dirty="0">
+                <a:solidFill>
+                  <a:srgbClr val="16171D"/>
+                </a:solidFill>
+                <a:latin typeface="Cambria"/>
+                <a:cs typeface="Cambria"/>
+              </a:rPr>
+              <a:t xml:space="preserve">/</a:t>
+            </a:r>
+            <a:r>
+              <a:rPr lang="en-US" sz="2325" dirty="0">
+                <a:solidFill>
+                  <a:srgbClr val="16171D"/>
+                </a:solidFill>
+                <a:latin typeface="Cambria"/>
+                <a:cs typeface="Cambria"/>
+              </a:rPr>
+              <a:t xml:space="preserve">(</a:t>
+            </a:r>
+            <a:r>
+              <a:rPr lang="en-US" sz="2325" dirty="0">
+                <a:solidFill>
+                  <a:srgbClr val="16171D"/>
+                </a:solidFill>
+                <a:latin typeface="Cambria"/>
+                <a:cs typeface="Cambria"/>
+              </a:rPr>
+              <a:t xml:space="preserve">change in </a:t>
+            </a:r>
+            <a:r>
+              <a:rPr lang="en-US" sz="2325" dirty="0" i="1">
+                <a:solidFill>
+                  <a:srgbClr val="16171D"/>
+                </a:solidFill>
+                <a:latin typeface="Cambria"/>
+                <a:cs typeface="Cambria"/>
               </a:rPr>
               <a:t xml:space="preserve">x</a:t>
             </a:r>
             <a:r>
-              <a:rPr lang="en-US" sz="1950" dirty="0">
-                <a:solidFill>
-                  <a:srgbClr val="16171D"/>
-                </a:solidFill>
-                <a:latin typeface="Segoe UI"/>
-                <a:cs typeface="Segoe UI"/>
-              </a:rPr>
-              <a:t xml:space="preserve"> + 4.</a:t>
-            </a:r>
+              <a:rPr lang="en-US" sz="2325" dirty="0">
+                <a:solidFill>
+                  <a:srgbClr val="16171D"/>
+                </a:solidFill>
+                <a:latin typeface="Cambria"/>
+                <a:cs typeface="Cambria"/>
+              </a:rPr>
+              <a:t xml:space="preserve">)</a:t>
+            </a:r>
+            <a:endParaRPr lang="en-US" sz="2325" dirty="0"/>
+          </a:p>
+        </p:txBody>
+      </p:sp>
+      <p:sp>
+        <p:nvSpPr>
+          <p:cNvPr id="11" name="Shape 11"/>
+          <p:cNvSpPr txBox="1"/>
+          <p:nvPr/>
+        </p:nvSpPr>
+        <p:spPr>
+          <a:xfrm>
+            <a:off x="4349648" y="1618488"/>
+            <a:ext cx="3492398" cy="1966722"/>
+          </a:xfrm>
+          <a:prstGeom prst="roundRect">
+            <a:avLst>
+              <a:gd name="adj" fmla="val 8000"/>
+            </a:avLst>
+          </a:prstGeom>
+          <a:solidFill>
+            <a:srgbClr val="FFFFFF"/>
+          </a:solidFill>
+          <a:ln w="12700">
+            <a:solidFill>
+              <a:srgbClr val="E3E4EC"/>
+            </a:solidFill>
+          </a:ln>
+        </p:spPr>
+        <p:txBody>
+          <a:bodyPr wrap="square" lIns="36576" tIns="27432" rIns="36576" bIns="27432" anchor="t">
+            <a:noAutofit/>
+          </a:bodyPr>
+          <a:lstStyle/>
+          <a:p>
+            <a:pPr algn="l">
+              <a:lnSpc>
+                <a:spcPct val="100000"/>
+              </a:lnSpc>
+            </a:pPr>
             <a:endParaRPr lang="en-US" sz="1950" dirty="0"/>
+          </a:p>
+        </p:txBody>
+      </p:sp>
+      <p:sp>
+        <p:nvSpPr>
+          <p:cNvPr id="8" name="Shape 8"/>
+          <p:cNvSpPr txBox="1"/>
+          <p:nvPr/>
+        </p:nvSpPr>
+        <p:spPr>
+          <a:xfrm>
+            <a:off x="4559198" y="1789938"/>
+            <a:ext cx="3073298" cy="374904"/>
+          </a:xfrm>
+          <a:prstGeom prst="rect">
+            <a:avLst/>
+          </a:prstGeom>
+          <a:noFill/>
+          <a:ln>
+            <a:noFill/>
+          </a:ln>
+        </p:spPr>
+        <p:txBody>
+          <a:bodyPr wrap="square" lIns="36576" tIns="27432" rIns="36576" bIns="27432" anchor="t">
+            <a:noAutofit/>
+          </a:bodyPr>
+          <a:lstStyle/>
+          <a:p>
+            <a:pPr algn="l">
+              <a:lnSpc>
+                <a:spcPct val="100000"/>
+              </a:lnSpc>
+            </a:pPr>
+            <a:r>
+              <a:rPr lang="en-US" sz="2100" dirty="0" b="1">
+                <a:solidFill>
+                  <a:srgbClr val="16171D"/>
+                </a:solidFill>
+                <a:latin typeface="Segoe UI"/>
+                <a:cs typeface="Segoe UI"/>
+              </a:rPr>
+              <a:t xml:space="preserve">A point</a:t>
+            </a:r>
+            <a:endParaRPr lang="en-US" sz="2100" dirty="0"/>
+          </a:p>
+        </p:txBody>
+      </p:sp>
+      <p:sp>
+        <p:nvSpPr>
+          <p:cNvPr id="9" name="Shape 9"/>
+          <p:cNvSpPr txBox="1"/>
+          <p:nvPr/>
+        </p:nvSpPr>
+        <p:spPr>
+          <a:xfrm>
+            <a:off x="4559198" y="2260092"/>
+            <a:ext cx="3073298" cy="534924"/>
+          </a:xfrm>
+          <a:prstGeom prst="rect">
+            <a:avLst/>
+          </a:prstGeom>
+          <a:noFill/>
+          <a:ln>
+            <a:noFill/>
+          </a:ln>
+        </p:spPr>
+        <p:txBody>
+          <a:bodyPr wrap="square" lIns="36576" tIns="27432" rIns="36576" bIns="27432" anchor="t">
+            <a:noAutofit/>
+          </a:bodyPr>
+          <a:lstStyle/>
+          <a:p>
+            <a:pPr algn="l">
+              <a:lnSpc>
+                <a:spcPct val="100000"/>
+              </a:lnSpc>
+            </a:pPr>
+            <a:r>
+              <a:rPr lang="en-US" sz="1575" dirty="0">
+                <a:solidFill>
+                  <a:srgbClr val="16171D"/>
+                </a:solidFill>
+                <a:latin typeface="Segoe UI"/>
+                <a:cs typeface="Segoe UI"/>
+              </a:rPr>
+              <a:t xml:space="preserve">A place on the line, written (</a:t>
+            </a:r>
+            <a:r>
+              <a:rPr lang="en-US" sz="1575" dirty="0" i="1">
+                <a:solidFill>
+                  <a:srgbClr val="16171D"/>
+                </a:solidFill>
+                <a:latin typeface="Segoe UI"/>
+                <a:cs typeface="Segoe UI"/>
+              </a:rPr>
+              <a:t xml:space="preserve">x</a:t>
+            </a:r>
+            <a:r>
+              <a:rPr lang="en-US" sz="1575" dirty="0">
+                <a:solidFill>
+                  <a:srgbClr val="16171D"/>
+                </a:solidFill>
+                <a:latin typeface="Segoe UI"/>
+                <a:cs typeface="Segoe UI"/>
+              </a:rPr>
+              <a:t xml:space="preserve">, </a:t>
+            </a:r>
+            <a:r>
+              <a:rPr lang="en-US" sz="1575" dirty="0" i="1">
+                <a:solidFill>
+                  <a:srgbClr val="16171D"/>
+                </a:solidFill>
+                <a:latin typeface="Segoe UI"/>
+                <a:cs typeface="Segoe UI"/>
+              </a:rPr>
+              <a:t xml:space="preserve">y</a:t>
+            </a:r>
+            <a:r>
+              <a:rPr lang="en-US" sz="1575" dirty="0">
+                <a:solidFill>
+                  <a:srgbClr val="16171D"/>
+                </a:solidFill>
+                <a:latin typeface="Segoe UI"/>
+                <a:cs typeface="Segoe UI"/>
+              </a:rPr>
+              <a:t xml:space="preserve">).</a:t>
+            </a:r>
+            <a:endParaRPr lang="en-US" sz="1575" dirty="0"/>
+          </a:p>
+        </p:txBody>
+      </p:sp>
+      <p:sp>
+        <p:nvSpPr>
+          <p:cNvPr id="10" name="Shape 10"/>
+          <p:cNvSpPr txBox="1"/>
+          <p:nvPr/>
+        </p:nvSpPr>
+        <p:spPr>
+          <a:xfrm>
+            <a:off x="4559198" y="2890266"/>
+            <a:ext cx="3073298" cy="409194"/>
+          </a:xfrm>
+          <a:prstGeom prst="rect">
+            <a:avLst/>
+          </a:prstGeom>
+          <a:noFill/>
+          <a:ln>
+            <a:noFill/>
+          </a:ln>
+        </p:spPr>
+        <p:txBody>
+          <a:bodyPr wrap="square" lIns="36576" tIns="27432" rIns="36576" bIns="27432" anchor="t">
+            <a:noAutofit/>
+          </a:bodyPr>
+          <a:lstStyle/>
+          <a:p>
+            <a:pPr algn="l">
+              <a:lnSpc>
+                <a:spcPct val="100000"/>
+              </a:lnSpc>
+            </a:pPr>
+            <a:r>
+              <a:rPr lang="en-US" sz="2325" dirty="0">
+                <a:solidFill>
+                  <a:srgbClr val="16171D"/>
+                </a:solidFill>
+                <a:latin typeface="Cambria"/>
+                <a:cs typeface="Cambria"/>
+              </a:rPr>
+              <a:t xml:space="preserve">(</a:t>
+            </a:r>
+            <a:r>
+              <a:rPr lang="en-US" sz="2325" dirty="0" b="1">
+                <a:solidFill>
+                  <a:srgbClr val="3050B8"/>
+                </a:solidFill>
+                <a:latin typeface="Cambria"/>
+                <a:cs typeface="Cambria"/>
+              </a:rPr>
+              <a:t xml:space="preserve">1</a:t>
+            </a:r>
+            <a:r>
+              <a:rPr lang="en-US" sz="2325" dirty="0">
+                <a:solidFill>
+                  <a:srgbClr val="16171D"/>
+                </a:solidFill>
+                <a:latin typeface="Cambria"/>
+                <a:cs typeface="Cambria"/>
+              </a:rPr>
+              <a:t xml:space="preserve">, </a:t>
+            </a:r>
+            <a:r>
+              <a:rPr lang="en-US" sz="2325" dirty="0" b="1">
+                <a:solidFill>
+                  <a:srgbClr val="3050B8"/>
+                </a:solidFill>
+                <a:latin typeface="Cambria"/>
+                <a:cs typeface="Cambria"/>
+              </a:rPr>
+              <a:t xml:space="preserve">4</a:t>
+            </a:r>
+            <a:r>
+              <a:rPr lang="en-US" sz="2325" dirty="0">
+                <a:solidFill>
+                  <a:srgbClr val="16171D"/>
+                </a:solidFill>
+                <a:latin typeface="Cambria"/>
+                <a:cs typeface="Cambria"/>
+              </a:rPr>
+              <a:t xml:space="preserve">)</a:t>
+            </a:r>
+            <a:endParaRPr lang="en-US" sz="2325" dirty="0"/>
+          </a:p>
+        </p:txBody>
+      </p:sp>
+      <p:sp>
+        <p:nvSpPr>
+          <p:cNvPr id="15" name="Shape 15"/>
+          <p:cNvSpPr txBox="1"/>
+          <p:nvPr/>
+        </p:nvSpPr>
+        <p:spPr>
+          <a:xfrm>
+            <a:off x="8013497" y="1618488"/>
+            <a:ext cx="3492398" cy="1966722"/>
+          </a:xfrm>
+          <a:prstGeom prst="roundRect">
+            <a:avLst>
+              <a:gd name="adj" fmla="val 8000"/>
+            </a:avLst>
+          </a:prstGeom>
+          <a:solidFill>
+            <a:srgbClr val="FFFFFF"/>
+          </a:solidFill>
+          <a:ln w="12700">
+            <a:solidFill>
+              <a:srgbClr val="E3E4EC"/>
+            </a:solidFill>
+          </a:ln>
+        </p:spPr>
+        <p:txBody>
+          <a:bodyPr wrap="square" lIns="36576" tIns="27432" rIns="36576" bIns="27432" anchor="t">
+            <a:noAutofit/>
+          </a:bodyPr>
+          <a:lstStyle/>
+          <a:p>
+            <a:pPr algn="l">
+              <a:lnSpc>
+                <a:spcPct val="100000"/>
+              </a:lnSpc>
+            </a:pPr>
+            <a:endParaRPr lang="en-US" sz="1950" dirty="0"/>
+          </a:p>
+        </p:txBody>
+      </p:sp>
+      <p:sp>
+        <p:nvSpPr>
+          <p:cNvPr id="12" name="Shape 12"/>
+          <p:cNvSpPr txBox="1"/>
+          <p:nvPr/>
+        </p:nvSpPr>
+        <p:spPr>
+          <a:xfrm>
+            <a:off x="8223047" y="1789938"/>
+            <a:ext cx="3073298" cy="374904"/>
+          </a:xfrm>
+          <a:prstGeom prst="rect">
+            <a:avLst/>
+          </a:prstGeom>
+          <a:noFill/>
+          <a:ln>
+            <a:noFill/>
+          </a:ln>
+        </p:spPr>
+        <p:txBody>
+          <a:bodyPr wrap="square" lIns="36576" tIns="27432" rIns="36576" bIns="27432" anchor="t">
+            <a:noAutofit/>
+          </a:bodyPr>
+          <a:lstStyle/>
+          <a:p>
+            <a:pPr algn="l">
+              <a:lnSpc>
+                <a:spcPct val="100000"/>
+              </a:lnSpc>
+            </a:pPr>
+            <a:r>
+              <a:rPr lang="en-US" sz="2100" dirty="0" b="1">
+                <a:solidFill>
+                  <a:srgbClr val="16171D"/>
+                </a:solidFill>
+                <a:latin typeface="Segoe UI"/>
+                <a:cs typeface="Segoe UI"/>
+              </a:rPr>
+              <a:t xml:space="preserve">Point-slope form</a:t>
+            </a:r>
+            <a:endParaRPr lang="en-US" sz="2100" dirty="0"/>
+          </a:p>
+        </p:txBody>
+      </p:sp>
+      <p:sp>
+        <p:nvSpPr>
+          <p:cNvPr id="13" name="Shape 13"/>
+          <p:cNvSpPr txBox="1"/>
+          <p:nvPr/>
+        </p:nvSpPr>
+        <p:spPr>
+          <a:xfrm>
+            <a:off x="8223047" y="2260092"/>
+            <a:ext cx="3073298" cy="534924"/>
+          </a:xfrm>
+          <a:prstGeom prst="rect">
+            <a:avLst/>
+          </a:prstGeom>
+          <a:noFill/>
+          <a:ln>
+            <a:noFill/>
+          </a:ln>
+        </p:spPr>
+        <p:txBody>
+          <a:bodyPr wrap="square" lIns="36576" tIns="27432" rIns="36576" bIns="27432" anchor="t">
+            <a:noAutofit/>
+          </a:bodyPr>
+          <a:lstStyle/>
+          <a:p>
+            <a:pPr algn="l">
+              <a:lnSpc>
+                <a:spcPct val="100000"/>
+              </a:lnSpc>
+            </a:pPr>
+            <a:r>
+              <a:rPr lang="en-US" sz="1575" dirty="0">
+                <a:solidFill>
+                  <a:srgbClr val="16171D"/>
+                </a:solidFill>
+                <a:latin typeface="Segoe UI"/>
+                <a:cs typeface="Segoe UI"/>
+              </a:rPr>
+              <a:t xml:space="preserve">An equation made from the slope and one point.</a:t>
+            </a:r>
+            <a:endParaRPr lang="en-US" sz="1575" dirty="0"/>
+          </a:p>
+        </p:txBody>
+      </p:sp>
+      <p:sp>
+        <p:nvSpPr>
+          <p:cNvPr id="14" name="Shape 14"/>
+          <p:cNvSpPr txBox="1"/>
+          <p:nvPr/>
+        </p:nvSpPr>
+        <p:spPr>
+          <a:xfrm>
+            <a:off x="8223047" y="2890266"/>
+            <a:ext cx="3073298" cy="409194"/>
+          </a:xfrm>
+          <a:prstGeom prst="rect">
+            <a:avLst/>
+          </a:prstGeom>
+          <a:noFill/>
+          <a:ln>
+            <a:noFill/>
+          </a:ln>
+        </p:spPr>
+        <p:txBody>
+          <a:bodyPr wrap="square" lIns="36576" tIns="27432" rIns="36576" bIns="27432" anchor="t">
+            <a:noAutofit/>
+          </a:bodyPr>
+          <a:lstStyle/>
+          <a:p>
+            <a:pPr algn="l">
+              <a:lnSpc>
+                <a:spcPct val="100000"/>
+              </a:lnSpc>
+            </a:pPr>
+            <a:r>
+              <a:rPr lang="en-US" sz="2325" dirty="0" i="1">
+                <a:solidFill>
+                  <a:srgbClr val="16171D"/>
+                </a:solidFill>
+                <a:latin typeface="Cambria"/>
+                <a:cs typeface="Cambria"/>
+              </a:rPr>
+              <a:t xml:space="preserve">y</a:t>
+            </a:r>
+            <a:r>
+              <a:rPr lang="en-US" sz="2325" dirty="0">
+                <a:solidFill>
+                  <a:srgbClr val="16171D"/>
+                </a:solidFill>
+                <a:latin typeface="Cambria"/>
+                <a:cs typeface="Cambria"/>
+              </a:rPr>
+              <a:t xml:space="preserve"> − </a:t>
+            </a:r>
+            <a:r>
+              <a:rPr lang="en-US" sz="2325" dirty="0" b="1" i="1">
+                <a:solidFill>
+                  <a:srgbClr val="3050B8"/>
+                </a:solidFill>
+                <a:latin typeface="Cambria"/>
+                <a:cs typeface="Cambria"/>
+              </a:rPr>
+              <a:t xml:space="preserve">y</a:t>
+            </a:r>
+            <a:r>
+              <a:rPr lang="en-US" sz="1976" dirty="0" b="1" baseline="-25000">
+                <a:solidFill>
+                  <a:srgbClr val="3050B8"/>
+                </a:solidFill>
+                <a:latin typeface="Cambria"/>
+                <a:cs typeface="Cambria"/>
+              </a:rPr>
+              <a:t xml:space="preserve">1</a:t>
+            </a:r>
+            <a:r>
+              <a:rPr lang="en-US" sz="2325" dirty="0">
+                <a:solidFill>
+                  <a:srgbClr val="16171D"/>
+                </a:solidFill>
+                <a:latin typeface="Cambria"/>
+                <a:cs typeface="Cambria"/>
+              </a:rPr>
+              <a:t xml:space="preserve"> = </a:t>
+            </a:r>
+            <a:r>
+              <a:rPr lang="en-US" sz="2325" dirty="0" b="1" i="1">
+                <a:solidFill>
+                  <a:srgbClr val="C9561F"/>
+                </a:solidFill>
+                <a:latin typeface="Cambria"/>
+                <a:cs typeface="Cambria"/>
+              </a:rPr>
+              <a:t xml:space="preserve">m</a:t>
+            </a:r>
+            <a:r>
+              <a:rPr lang="en-US" sz="2325" dirty="0">
+                <a:solidFill>
+                  <a:srgbClr val="16171D"/>
+                </a:solidFill>
+                <a:latin typeface="Cambria"/>
+                <a:cs typeface="Cambria"/>
+              </a:rPr>
+              <a:t xml:space="preserve">(</a:t>
+            </a:r>
+            <a:r>
+              <a:rPr lang="en-US" sz="2325" dirty="0" i="1">
+                <a:solidFill>
+                  <a:srgbClr val="16171D"/>
+                </a:solidFill>
+                <a:latin typeface="Cambria"/>
+                <a:cs typeface="Cambria"/>
+              </a:rPr>
+              <a:t xml:space="preserve">x</a:t>
+            </a:r>
+            <a:r>
+              <a:rPr lang="en-US" sz="2325" dirty="0">
+                <a:solidFill>
+                  <a:srgbClr val="16171D"/>
+                </a:solidFill>
+                <a:latin typeface="Cambria"/>
+                <a:cs typeface="Cambria"/>
+              </a:rPr>
+              <a:t xml:space="preserve"> − </a:t>
+            </a:r>
+            <a:r>
+              <a:rPr lang="en-US" sz="2325" dirty="0" b="1" i="1">
+                <a:solidFill>
+                  <a:srgbClr val="3050B8"/>
+                </a:solidFill>
+                <a:latin typeface="Cambria"/>
+                <a:cs typeface="Cambria"/>
+              </a:rPr>
+              <a:t xml:space="preserve">x</a:t>
+            </a:r>
+            <a:r>
+              <a:rPr lang="en-US" sz="1976" dirty="0" b="1" baseline="-25000">
+                <a:solidFill>
+                  <a:srgbClr val="3050B8"/>
+                </a:solidFill>
+                <a:latin typeface="Cambria"/>
+                <a:cs typeface="Cambria"/>
+              </a:rPr>
+              <a:t xml:space="preserve">1</a:t>
+            </a:r>
+            <a:r>
+              <a:rPr lang="en-US" sz="2325" dirty="0">
+                <a:solidFill>
+                  <a:srgbClr val="16171D"/>
+                </a:solidFill>
+                <a:latin typeface="Cambria"/>
+                <a:cs typeface="Cambria"/>
+              </a:rPr>
+              <a:t xml:space="preserve">)</a:t>
+            </a:r>
+            <a:endParaRPr lang="en-US" sz="2325" dirty="0"/>
           </a:p>
         </p:txBody>
       </p:sp>
@@ -8905,7 +12327,579 @@
 </p:sld>
 </file>
 
-<file path=ppt/slides/slide4.xml><?xml version="1.0" encoding="utf-8"?>
+<file path=ppt/slides/slide5.xml><?xml version="1.0" encoding="utf-8"?>
+<p:sld xmlns:a="http://schemas.openxmlformats.org/drawingml/2006/main" xmlns:r="http://schemas.openxmlformats.org/officeDocument/2006/relationships" xmlns:p="http://schemas.openxmlformats.org/presentationml/2006/main">
+  <p:cSld>
+    <p:spTree>
+      <p:nvGrpSpPr>
+        <p:cNvPr id="1" name=""/>
+        <p:cNvGrpSpPr/>
+        <p:nvPr/>
+      </p:nvGrpSpPr>
+      <p:grpSpPr>
+        <a:xfrm>
+          <a:off x="0" y="0"/>
+          <a:ext cx="0" cy="0"/>
+          <a:chOff x="0" y="0"/>
+          <a:chExt cx="0" cy="0"/>
+        </a:xfrm>
+      </p:grpSpPr>
+      <p:sp>
+        <p:nvSpPr>
+          <p:cNvPr id="2" name="Shape 2"/>
+          <p:cNvSpPr txBox="1"/>
+          <p:nvPr/>
+        </p:nvSpPr>
+        <p:spPr>
+          <a:xfrm>
+            <a:off x="685800" y="457200"/>
+            <a:ext cx="10820095" cy="237744"/>
+          </a:xfrm>
+          <a:prstGeom prst="rect">
+            <a:avLst/>
+          </a:prstGeom>
+          <a:noFill/>
+          <a:ln>
+            <a:noFill/>
+          </a:ln>
+        </p:spPr>
+        <p:txBody>
+          <a:bodyPr wrap="square" lIns="36576" tIns="27432" rIns="36576" bIns="27432" anchor="t">
+            <a:noAutofit/>
+          </a:bodyPr>
+          <a:lstStyle/>
+          <a:p>
+            <a:pPr algn="l">
+              <a:lnSpc>
+                <a:spcPct val="100000"/>
+              </a:lnSpc>
+            </a:pPr>
+            <a:r>
+              <a:rPr lang="en-US" sz="1200" dirty="0" b="1" spc="150" cap="all">
+                <a:solidFill>
+                  <a:srgbClr val="5F6272"/>
+                </a:solidFill>
+                <a:latin typeface="Segoe UI"/>
+                <a:cs typeface="Segoe UI"/>
+              </a:rPr>
+              <a:t xml:space="preserve">Lesson 4 · Steps</a:t>
+            </a:r>
+            <a:endParaRPr lang="en-US" sz="1200" dirty="0"/>
+          </a:p>
+        </p:txBody>
+      </p:sp>
+      <p:sp>
+        <p:nvSpPr>
+          <p:cNvPr id="3" name="Shape 3"/>
+          <p:cNvSpPr txBox="1"/>
+          <p:nvPr/>
+        </p:nvSpPr>
+        <p:spPr>
+          <a:xfrm>
+            <a:off x="685800" y="866394"/>
+            <a:ext cx="10820095" cy="580644"/>
+          </a:xfrm>
+          <a:prstGeom prst="rect">
+            <a:avLst/>
+          </a:prstGeom>
+          <a:noFill/>
+          <a:ln>
+            <a:noFill/>
+          </a:ln>
+        </p:spPr>
+        <p:txBody>
+          <a:bodyPr wrap="square" lIns="36576" tIns="27432" rIns="36576" bIns="27432" anchor="t">
+            <a:noAutofit/>
+          </a:bodyPr>
+          <a:lstStyle/>
+          <a:p>
+            <a:pPr algn="l">
+              <a:lnSpc>
+                <a:spcPct val="100000"/>
+              </a:lnSpc>
+            </a:pPr>
+            <a:r>
+              <a:rPr lang="en-US" sz="3450" dirty="0" b="1">
+                <a:solidFill>
+                  <a:srgbClr val="16171D"/>
+                </a:solidFill>
+                <a:latin typeface="Segoe UI"/>
+                <a:cs typeface="Segoe UI"/>
+              </a:rPr>
+              <a:t xml:space="preserve">How to write point-slope form</a:t>
+            </a:r>
+            <a:endParaRPr lang="en-US" sz="3450" dirty="0"/>
+          </a:p>
+        </p:txBody>
+      </p:sp>
+      <p:sp>
+        <p:nvSpPr>
+          <p:cNvPr id="4" name="Shape 4"/>
+          <p:cNvSpPr txBox="1"/>
+          <p:nvPr/>
+        </p:nvSpPr>
+        <p:spPr>
+          <a:xfrm>
+            <a:off x="685800" y="1618488"/>
+            <a:ext cx="10820095" cy="352044"/>
+          </a:xfrm>
+          <a:prstGeom prst="rect">
+            <a:avLst/>
+          </a:prstGeom>
+          <a:noFill/>
+          <a:ln>
+            <a:noFill/>
+          </a:ln>
+        </p:spPr>
+        <p:txBody>
+          <a:bodyPr wrap="square" lIns="36576" tIns="27432" rIns="36576" bIns="27432" anchor="t">
+            <a:noAutofit/>
+          </a:bodyPr>
+          <a:lstStyle/>
+          <a:p>
+            <a:pPr algn="l">
+              <a:lnSpc>
+                <a:spcPct val="100000"/>
+              </a:lnSpc>
+            </a:pPr>
+            <a:r>
+              <a:rPr lang="en-US" sz="1950" dirty="0" b="1">
+                <a:solidFill>
+                  <a:srgbClr val="16171D"/>
+                </a:solidFill>
+                <a:latin typeface="Segoe UI"/>
+                <a:cs typeface="Segoe UI"/>
+              </a:rPr>
+              <a:t xml:space="preserve">1.</a:t>
+            </a:r>
+            <a:r>
+              <a:rPr lang="en-US" sz="1950" dirty="0">
+                <a:solidFill>
+                  <a:srgbClr val="16171D"/>
+                </a:solidFill>
+                <a:latin typeface="Segoe UI"/>
+                <a:cs typeface="Segoe UI"/>
+              </a:rPr>
+              <a:t xml:space="preserve"> Find the slope, </a:t>
+            </a:r>
+            <a:r>
+              <a:rPr lang="en-US" sz="1950" dirty="0" b="1" i="1">
+                <a:solidFill>
+                  <a:srgbClr val="C9561F"/>
+                </a:solidFill>
+                <a:latin typeface="Segoe UI"/>
+                <a:cs typeface="Segoe UI"/>
+              </a:rPr>
+              <a:t xml:space="preserve">m</a:t>
+            </a:r>
+            <a:r>
+              <a:rPr lang="en-US" sz="1950" dirty="0">
+                <a:solidFill>
+                  <a:srgbClr val="16171D"/>
+                </a:solidFill>
+                <a:latin typeface="Segoe UI"/>
+                <a:cs typeface="Segoe UI"/>
+              </a:rPr>
+              <a:t xml:space="preserve">.</a:t>
+            </a:r>
+            <a:endParaRPr lang="en-US" sz="1950" dirty="0"/>
+          </a:p>
+        </p:txBody>
+      </p:sp>
+      <p:sp>
+        <p:nvSpPr>
+          <p:cNvPr id="5" name="Shape 5"/>
+          <p:cNvSpPr txBox="1"/>
+          <p:nvPr/>
+        </p:nvSpPr>
+        <p:spPr>
+          <a:xfrm>
+            <a:off x="685800" y="2141982"/>
+            <a:ext cx="10820095" cy="352044"/>
+          </a:xfrm>
+          <a:prstGeom prst="rect">
+            <a:avLst/>
+          </a:prstGeom>
+          <a:noFill/>
+          <a:ln>
+            <a:noFill/>
+          </a:ln>
+        </p:spPr>
+        <p:txBody>
+          <a:bodyPr wrap="square" lIns="36576" tIns="27432" rIns="36576" bIns="27432" anchor="t">
+            <a:noAutofit/>
+          </a:bodyPr>
+          <a:lstStyle/>
+          <a:p>
+            <a:pPr algn="l">
+              <a:lnSpc>
+                <a:spcPct val="100000"/>
+              </a:lnSpc>
+            </a:pPr>
+            <a:r>
+              <a:rPr lang="en-US" sz="1950" dirty="0" b="1">
+                <a:solidFill>
+                  <a:srgbClr val="16171D"/>
+                </a:solidFill>
+                <a:latin typeface="Segoe UI"/>
+                <a:cs typeface="Segoe UI"/>
+              </a:rPr>
+              <a:t xml:space="preserve">2.</a:t>
+            </a:r>
+            <a:r>
+              <a:rPr lang="en-US" sz="1950" dirty="0">
+                <a:solidFill>
+                  <a:srgbClr val="16171D"/>
+                </a:solidFill>
+                <a:latin typeface="Segoe UI"/>
+                <a:cs typeface="Segoe UI"/>
+              </a:rPr>
+              <a:t xml:space="preserve"> Find a point, (</a:t>
+            </a:r>
+            <a:r>
+              <a:rPr lang="en-US" sz="1950" dirty="0" b="1" i="1">
+                <a:solidFill>
+                  <a:srgbClr val="3050B8"/>
+                </a:solidFill>
+                <a:latin typeface="Segoe UI"/>
+                <a:cs typeface="Segoe UI"/>
+              </a:rPr>
+              <a:t xml:space="preserve">x</a:t>
+            </a:r>
+            <a:r>
+              <a:rPr lang="en-US" sz="1658" dirty="0" b="1" baseline="-25000">
+                <a:solidFill>
+                  <a:srgbClr val="3050B8"/>
+                </a:solidFill>
+                <a:latin typeface="Segoe UI"/>
+                <a:cs typeface="Segoe UI"/>
+              </a:rPr>
+              <a:t xml:space="preserve">1</a:t>
+            </a:r>
+            <a:r>
+              <a:rPr lang="en-US" sz="1950" dirty="0">
+                <a:solidFill>
+                  <a:srgbClr val="16171D"/>
+                </a:solidFill>
+                <a:latin typeface="Segoe UI"/>
+                <a:cs typeface="Segoe UI"/>
+              </a:rPr>
+              <a:t xml:space="preserve">, </a:t>
+            </a:r>
+            <a:r>
+              <a:rPr lang="en-US" sz="1950" dirty="0" b="1" i="1">
+                <a:solidFill>
+                  <a:srgbClr val="3050B8"/>
+                </a:solidFill>
+                <a:latin typeface="Segoe UI"/>
+                <a:cs typeface="Segoe UI"/>
+              </a:rPr>
+              <a:t xml:space="preserve">y</a:t>
+            </a:r>
+            <a:r>
+              <a:rPr lang="en-US" sz="1658" dirty="0" b="1" baseline="-25000">
+                <a:solidFill>
+                  <a:srgbClr val="3050B8"/>
+                </a:solidFill>
+                <a:latin typeface="Segoe UI"/>
+                <a:cs typeface="Segoe UI"/>
+              </a:rPr>
+              <a:t xml:space="preserve">1</a:t>
+            </a:r>
+            <a:r>
+              <a:rPr lang="en-US" sz="1950" dirty="0">
+                <a:solidFill>
+                  <a:srgbClr val="16171D"/>
+                </a:solidFill>
+                <a:latin typeface="Segoe UI"/>
+                <a:cs typeface="Segoe UI"/>
+              </a:rPr>
+              <a:t xml:space="preserve">).</a:t>
+            </a:r>
+            <a:endParaRPr lang="en-US" sz="1950" dirty="0"/>
+          </a:p>
+        </p:txBody>
+      </p:sp>
+      <p:sp>
+        <p:nvSpPr>
+          <p:cNvPr id="6" name="Shape 6"/>
+          <p:cNvSpPr txBox="1"/>
+          <p:nvPr/>
+        </p:nvSpPr>
+        <p:spPr>
+          <a:xfrm>
+            <a:off x="685800" y="2665476"/>
+            <a:ext cx="10820095" cy="352044"/>
+          </a:xfrm>
+          <a:prstGeom prst="rect">
+            <a:avLst/>
+          </a:prstGeom>
+          <a:noFill/>
+          <a:ln>
+            <a:noFill/>
+          </a:ln>
+        </p:spPr>
+        <p:txBody>
+          <a:bodyPr wrap="square" lIns="36576" tIns="27432" rIns="36576" bIns="27432" anchor="t">
+            <a:noAutofit/>
+          </a:bodyPr>
+          <a:lstStyle/>
+          <a:p>
+            <a:pPr algn="l">
+              <a:lnSpc>
+                <a:spcPct val="100000"/>
+              </a:lnSpc>
+            </a:pPr>
+            <a:r>
+              <a:rPr lang="en-US" sz="1950" dirty="0" b="1">
+                <a:solidFill>
+                  <a:srgbClr val="16171D"/>
+                </a:solidFill>
+                <a:latin typeface="Segoe UI"/>
+                <a:cs typeface="Segoe UI"/>
+              </a:rPr>
+              <a:t xml:space="preserve">3.</a:t>
+            </a:r>
+            <a:r>
+              <a:rPr lang="en-US" sz="1950" dirty="0">
+                <a:solidFill>
+                  <a:srgbClr val="16171D"/>
+                </a:solidFill>
+                <a:latin typeface="Segoe UI"/>
+                <a:cs typeface="Segoe UI"/>
+              </a:rPr>
+              <a:t xml:space="preserve"> Put them into </a:t>
+            </a:r>
+            <a:r>
+              <a:rPr lang="en-US" sz="1950" dirty="0" i="1">
+                <a:solidFill>
+                  <a:srgbClr val="16171D"/>
+                </a:solidFill>
+                <a:latin typeface="Segoe UI"/>
+                <a:cs typeface="Segoe UI"/>
+              </a:rPr>
+              <a:t xml:space="preserve">y</a:t>
+            </a:r>
+            <a:r>
+              <a:rPr lang="en-US" sz="1950" dirty="0">
+                <a:solidFill>
+                  <a:srgbClr val="16171D"/>
+                </a:solidFill>
+                <a:latin typeface="Segoe UI"/>
+                <a:cs typeface="Segoe UI"/>
+              </a:rPr>
+              <a:t xml:space="preserve"> − </a:t>
+            </a:r>
+            <a:r>
+              <a:rPr lang="en-US" sz="1950" dirty="0" b="1" i="1">
+                <a:solidFill>
+                  <a:srgbClr val="3050B8"/>
+                </a:solidFill>
+                <a:latin typeface="Segoe UI"/>
+                <a:cs typeface="Segoe UI"/>
+              </a:rPr>
+              <a:t xml:space="preserve">y</a:t>
+            </a:r>
+            <a:r>
+              <a:rPr lang="en-US" sz="1658" dirty="0" b="1" baseline="-25000">
+                <a:solidFill>
+                  <a:srgbClr val="3050B8"/>
+                </a:solidFill>
+                <a:latin typeface="Segoe UI"/>
+                <a:cs typeface="Segoe UI"/>
+              </a:rPr>
+              <a:t xml:space="preserve">1</a:t>
+            </a:r>
+            <a:r>
+              <a:rPr lang="en-US" sz="1950" dirty="0">
+                <a:solidFill>
+                  <a:srgbClr val="16171D"/>
+                </a:solidFill>
+                <a:latin typeface="Segoe UI"/>
+                <a:cs typeface="Segoe UI"/>
+              </a:rPr>
+              <a:t xml:space="preserve"> = </a:t>
+            </a:r>
+            <a:r>
+              <a:rPr lang="en-US" sz="1950" dirty="0" b="1" i="1">
+                <a:solidFill>
+                  <a:srgbClr val="C9561F"/>
+                </a:solidFill>
+                <a:latin typeface="Segoe UI"/>
+                <a:cs typeface="Segoe UI"/>
+              </a:rPr>
+              <a:t xml:space="preserve">m</a:t>
+            </a:r>
+            <a:r>
+              <a:rPr lang="en-US" sz="1950" dirty="0">
+                <a:solidFill>
+                  <a:srgbClr val="16171D"/>
+                </a:solidFill>
+                <a:latin typeface="Segoe UI"/>
+                <a:cs typeface="Segoe UI"/>
+              </a:rPr>
+              <a:t xml:space="preserve">(</a:t>
+            </a:r>
+            <a:r>
+              <a:rPr lang="en-US" sz="1950" dirty="0" i="1">
+                <a:solidFill>
+                  <a:srgbClr val="16171D"/>
+                </a:solidFill>
+                <a:latin typeface="Segoe UI"/>
+                <a:cs typeface="Segoe UI"/>
+              </a:rPr>
+              <a:t xml:space="preserve">x</a:t>
+            </a:r>
+            <a:r>
+              <a:rPr lang="en-US" sz="1950" dirty="0">
+                <a:solidFill>
+                  <a:srgbClr val="16171D"/>
+                </a:solidFill>
+                <a:latin typeface="Segoe UI"/>
+                <a:cs typeface="Segoe UI"/>
+              </a:rPr>
+              <a:t xml:space="preserve"> − </a:t>
+            </a:r>
+            <a:r>
+              <a:rPr lang="en-US" sz="1950" dirty="0" b="1" i="1">
+                <a:solidFill>
+                  <a:srgbClr val="3050B8"/>
+                </a:solidFill>
+                <a:latin typeface="Segoe UI"/>
+                <a:cs typeface="Segoe UI"/>
+              </a:rPr>
+              <a:t xml:space="preserve">x</a:t>
+            </a:r>
+            <a:r>
+              <a:rPr lang="en-US" sz="1658" dirty="0" b="1" baseline="-25000">
+                <a:solidFill>
+                  <a:srgbClr val="3050B8"/>
+                </a:solidFill>
+                <a:latin typeface="Segoe UI"/>
+                <a:cs typeface="Segoe UI"/>
+              </a:rPr>
+              <a:t xml:space="preserve">1</a:t>
+            </a:r>
+            <a:r>
+              <a:rPr lang="en-US" sz="1950" dirty="0">
+                <a:solidFill>
+                  <a:srgbClr val="16171D"/>
+                </a:solidFill>
+                <a:latin typeface="Segoe UI"/>
+                <a:cs typeface="Segoe UI"/>
+              </a:rPr>
+              <a:t xml:space="preserve">).</a:t>
+            </a:r>
+            <a:endParaRPr lang="en-US" sz="1950" dirty="0"/>
+          </a:p>
+        </p:txBody>
+      </p:sp>
+      <p:sp>
+        <p:nvSpPr>
+          <p:cNvPr id="7" name="Shape 7"/>
+          <p:cNvSpPr txBox="1"/>
+          <p:nvPr/>
+        </p:nvSpPr>
+        <p:spPr>
+          <a:xfrm>
+            <a:off x="685800" y="3188970"/>
+            <a:ext cx="10820095" cy="352044"/>
+          </a:xfrm>
+          <a:prstGeom prst="rect">
+            <a:avLst/>
+          </a:prstGeom>
+          <a:noFill/>
+          <a:ln>
+            <a:noFill/>
+          </a:ln>
+        </p:spPr>
+        <p:txBody>
+          <a:bodyPr wrap="square" lIns="36576" tIns="27432" rIns="36576" bIns="27432" anchor="t">
+            <a:noAutofit/>
+          </a:bodyPr>
+          <a:lstStyle/>
+          <a:p>
+            <a:pPr algn="l">
+              <a:lnSpc>
+                <a:spcPct val="100000"/>
+              </a:lnSpc>
+            </a:pPr>
+            <a:r>
+              <a:rPr lang="en-US" sz="1950" dirty="0" b="1">
+                <a:solidFill>
+                  <a:srgbClr val="16171D"/>
+                </a:solidFill>
+                <a:latin typeface="Segoe UI"/>
+                <a:cs typeface="Segoe UI"/>
+              </a:rPr>
+              <a:t xml:space="preserve">4.</a:t>
+            </a:r>
+            <a:r>
+              <a:rPr lang="en-US" sz="1950" dirty="0">
+                <a:solidFill>
+                  <a:srgbClr val="16171D"/>
+                </a:solidFill>
+                <a:latin typeface="Segoe UI"/>
+                <a:cs typeface="Segoe UI"/>
+              </a:rPr>
+              <a:t xml:space="preserve"> Check the signs: </a:t>
+            </a:r>
+            <a:r>
+              <a:rPr lang="en-US" sz="1950" dirty="0" i="1">
+                <a:solidFill>
+                  <a:srgbClr val="16171D"/>
+                </a:solidFill>
+                <a:latin typeface="Segoe UI"/>
+                <a:cs typeface="Segoe UI"/>
+              </a:rPr>
+              <a:t xml:space="preserve">x</a:t>
+            </a:r>
+            <a:r>
+              <a:rPr lang="en-US" sz="1950" dirty="0">
+                <a:solidFill>
+                  <a:srgbClr val="16171D"/>
+                </a:solidFill>
+                <a:latin typeface="Segoe UI"/>
+                <a:cs typeface="Segoe UI"/>
+              </a:rPr>
+              <a:t xml:space="preserve"> − (−4) becomes </a:t>
+            </a:r>
+            <a:r>
+              <a:rPr lang="en-US" sz="1950" dirty="0" i="1">
+                <a:solidFill>
+                  <a:srgbClr val="16171D"/>
+                </a:solidFill>
+                <a:latin typeface="Segoe UI"/>
+                <a:cs typeface="Segoe UI"/>
+              </a:rPr>
+              <a:t xml:space="preserve">x</a:t>
+            </a:r>
+            <a:r>
+              <a:rPr lang="en-US" sz="1950" dirty="0">
+                <a:solidFill>
+                  <a:srgbClr val="16171D"/>
+                </a:solidFill>
+                <a:latin typeface="Segoe UI"/>
+                <a:cs typeface="Segoe UI"/>
+              </a:rPr>
+              <a:t xml:space="preserve"> + 4.</a:t>
+            </a:r>
+            <a:endParaRPr lang="en-US" sz="1950" dirty="0"/>
+          </a:p>
+        </p:txBody>
+      </p:sp>
+    </p:spTree>
+  </p:cSld>
+  <p:clrMapOvr>
+    <a:masterClrMapping/>
+  </p:clrMapOvr>
+  <p:transition spd="med">
+    <p:fade/>
+  </p:transition>
+</p:sld>
+</file>
+
+<file path=ppt/slides/slide6.xml><?xml version="1.0" encoding="utf-8"?>
 <p:sld xmlns:a="http://schemas.openxmlformats.org/drawingml/2006/main" xmlns:r="http://schemas.openxmlformats.org/officeDocument/2006/relationships" xmlns:p="http://schemas.openxmlformats.org/presentationml/2006/main">
   <p:cSld>
     <p:spTree>
@@ -10868,7 +14862,7 @@
 </p:sld>
 </file>
 
-<file path=ppt/slides/slide5.xml><?xml version="1.0" encoding="utf-8"?>
+<file path=ppt/slides/slide7.xml><?xml version="1.0" encoding="utf-8"?>
 <p:sld xmlns:a="http://schemas.openxmlformats.org/drawingml/2006/main" xmlns:r="http://schemas.openxmlformats.org/officeDocument/2006/relationships" xmlns:p="http://schemas.openxmlformats.org/presentationml/2006/main">
   <p:cSld>
     <p:spTree>
@@ -11616,7 +15610,7 @@
 </p:sld>
 </file>
 
-<file path=ppt/slides/slide6.xml><?xml version="1.0" encoding="utf-8"?>
+<file path=ppt/slides/slide8.xml><?xml version="1.0" encoding="utf-8"?>
 <p:sld xmlns:a="http://schemas.openxmlformats.org/drawingml/2006/main" xmlns:r="http://schemas.openxmlformats.org/officeDocument/2006/relationships" xmlns:p="http://schemas.openxmlformats.org/presentationml/2006/main">
   <p:cSld>
     <p:spTree>
@@ -12552,7 +16546,7 @@
 </p:sld>
 </file>
 
-<file path=ppt/slides/slide7.xml><?xml version="1.0" encoding="utf-8"?>
+<file path=ppt/slides/slide9.xml><?xml version="1.0" encoding="utf-8"?>
 <p:sld xmlns:a="http://schemas.openxmlformats.org/drawingml/2006/main" xmlns:r="http://schemas.openxmlformats.org/officeDocument/2006/relationships" xmlns:p="http://schemas.openxmlformats.org/presentationml/2006/main">
   <p:cSld>
     <p:spTree>
@@ -13203,1510 +17197,6 @@
                                         <p:cTn id="6" dur="500" fill="hold"/>
                                         <p:tgtEl>
                                           <p:spTgt spid="5"/>
-                                        </p:tgtEl>
-                                        <p:attrNameLst>
-                                          <p:attrName>ppt_h</p:attrName>
-                                        </p:attrNameLst>
-                                      </p:cBhvr>
-                                      <p:tavLst>
-                                        <p:tav tm="0">
-                                          <p:val>
-                                            <p:fltVal val="0"/>
-                                          </p:val>
-                                        </p:tav>
-                                        <p:tav tm="100000">
-                                          <p:val>
-                                            <p:strVal val="#ppt_h"/>
-                                          </p:val>
-                                        </p:tav>
-                                      </p:tavLst>
-                                    </p:anim>
-                                  </p:childTnLst>
-                                </p:cTn>
-                              </p:par>
-                            </p:childTnLst>
-                          </p:cTn>
-                        </p:par>
-                      </p:childTnLst>
-                    </p:cTn>
-                  </p:par>
-                  <p:par>
-                    <p:cTn id="15" fill="hold">
-                      <p:stCondLst>
-                        <p:cond delay="indefinite"/>
-                      </p:stCondLst>
-                      <p:childTnLst>
-                        <p:par>
-                          <p:cTn id="16" fill="hold">
-                            <p:stCondLst>
-                              <p:cond delay="0"/>
-                            </p:stCondLst>
-                            <p:childTnLst>
-                              <p:par>
-                                <p:cTn id="14" presetID="53" presetClass="entr" presetSubtype="16" fill="hold" nodeType="clickEffect">
-                                  <p:stCondLst>
-                                    <p:cond delay="0"/>
-                                  </p:stCondLst>
-                                  <p:childTnLst>
-                                    <p:set>
-                                      <p:cBhvr>
-                                        <p:cTn id="10" dur="1" fill="hold">
-                                          <p:stCondLst>
-                                            <p:cond delay="0"/>
-                                          </p:stCondLst>
-                                        </p:cTn>
-                                        <p:tgtEl>
-                                          <p:spTgt spid="8"/>
-                                        </p:tgtEl>
-                                        <p:attrNameLst>
-                                          <p:attrName>style.visibility</p:attrName>
-                                        </p:attrNameLst>
-                                      </p:cBhvr>
-                                      <p:to>
-                                        <p:strVal val="visible"/>
-                                      </p:to>
-                                    </p:set>
-                                    <p:animEffect transition="in" filter="fade">
-                                      <p:cBhvr>
-                                        <p:cTn id="11" dur="500"/>
-                                        <p:tgtEl>
-                                          <p:spTgt spid="8"/>
-                                        </p:tgtEl>
-                                      </p:cBhvr>
-                                    </p:animEffect>
-                                    <p:anim calcmode="lin" valueType="num">
-                                      <p:cBhvr>
-                                        <p:cTn id="12" dur="500" fill="hold"/>
-                                        <p:tgtEl>
-                                          <p:spTgt spid="8"/>
-                                        </p:tgtEl>
-                                        <p:attrNameLst>
-                                          <p:attrName>ppt_w</p:attrName>
-                                        </p:attrNameLst>
-                                      </p:cBhvr>
-                                      <p:tavLst>
-                                        <p:tav tm="0">
-                                          <p:val>
-                                            <p:fltVal val="0"/>
-                                          </p:val>
-                                        </p:tav>
-                                        <p:tav tm="100000">
-                                          <p:val>
-                                            <p:strVal val="#ppt_w"/>
-                                          </p:val>
-                                        </p:tav>
-                                      </p:tavLst>
-                                    </p:anim>
-                                    <p:anim calcmode="lin" valueType="num">
-                                      <p:cBhvr>
-                                        <p:cTn id="13" dur="500" fill="hold"/>
-                                        <p:tgtEl>
-                                          <p:spTgt spid="8"/>
-                                        </p:tgtEl>
-                                        <p:attrNameLst>
-                                          <p:attrName>ppt_h</p:attrName>
-                                        </p:attrNameLst>
-                                      </p:cBhvr>
-                                      <p:tavLst>
-                                        <p:tav tm="0">
-                                          <p:val>
-                                            <p:fltVal val="0"/>
-                                          </p:val>
-                                        </p:tav>
-                                        <p:tav tm="100000">
-                                          <p:val>
-                                            <p:strVal val="#ppt_h"/>
-                                          </p:val>
-                                        </p:tav>
-                                      </p:tavLst>
-                                    </p:anim>
-                                  </p:childTnLst>
-                                </p:cTn>
-                              </p:par>
-                            </p:childTnLst>
-                          </p:cTn>
-                        </p:par>
-                      </p:childTnLst>
-                    </p:cTn>
-                  </p:par>
-                </p:childTnLst>
-              </p:cTn>
-              <p:prevCondLst>
-                <p:cond evt="onPrev" delay="0">
-                  <p:tgtEl>
-                    <p:sldTgt/>
-                  </p:tgtEl>
-                </p:cond>
-              </p:prevCondLst>
-              <p:nextCondLst>
-                <p:cond evt="onNext" delay="0">
-                  <p:tgtEl>
-                    <p:sldTgt/>
-                  </p:tgtEl>
-                </p:cond>
-              </p:nextCondLst>
-            </p:seq>
-          </p:childTnLst>
-        </p:cTn>
-      </p:par>
-    </p:tnLst>
-  </p:timing>
-</p:sld>
-</file>
-
-<file path=ppt/slides/slide8.xml><?xml version="1.0" encoding="utf-8"?>
-<p:sld xmlns:a="http://schemas.openxmlformats.org/drawingml/2006/main" xmlns:r="http://schemas.openxmlformats.org/officeDocument/2006/relationships" xmlns:p="http://schemas.openxmlformats.org/presentationml/2006/main">
-  <p:cSld>
-    <p:spTree>
-      <p:nvGrpSpPr>
-        <p:cNvPr id="1" name=""/>
-        <p:cNvGrpSpPr/>
-        <p:nvPr/>
-      </p:nvGrpSpPr>
-      <p:grpSpPr>
-        <a:xfrm>
-          <a:off x="0" y="0"/>
-          <a:ext cx="0" cy="0"/>
-          <a:chOff x="0" y="0"/>
-          <a:chExt cx="0" cy="0"/>
-        </a:xfrm>
-      </p:grpSpPr>
-      <p:sp>
-        <p:nvSpPr>
-          <p:cNvPr id="2" name="Shape 2"/>
-          <p:cNvSpPr txBox="1"/>
-          <p:nvPr/>
-        </p:nvSpPr>
-        <p:spPr>
-          <a:xfrm>
-            <a:off x="685800" y="457200"/>
-            <a:ext cx="10820095" cy="237744"/>
-          </a:xfrm>
-          <a:prstGeom prst="rect">
-            <a:avLst/>
-          </a:prstGeom>
-          <a:noFill/>
-          <a:ln>
-            <a:noFill/>
-          </a:ln>
-        </p:spPr>
-        <p:txBody>
-          <a:bodyPr wrap="square" lIns="36576" tIns="27432" rIns="36576" bIns="27432" anchor="t">
-            <a:noAutofit/>
-          </a:bodyPr>
-          <a:lstStyle/>
-          <a:p>
-            <a:pPr algn="l">
-              <a:lnSpc>
-                <a:spcPct val="100000"/>
-              </a:lnSpc>
-            </a:pPr>
-            <a:r>
-              <a:rPr lang="en-US" sz="1200" dirty="0" b="1" spc="150" cap="all">
-                <a:solidFill>
-                  <a:srgbClr val="5F6272"/>
-                </a:solidFill>
-                <a:latin typeface="Segoe UI"/>
-                <a:cs typeface="Segoe UI"/>
-              </a:rPr>
-              <a:t xml:space="preserve">I do · Change the form</a:t>
-            </a:r>
-            <a:endParaRPr lang="en-US" sz="1200" dirty="0"/>
-          </a:p>
-        </p:txBody>
-      </p:sp>
-      <p:sp>
-        <p:nvSpPr>
-          <p:cNvPr id="3" name="Shape 3"/>
-          <p:cNvSpPr txBox="1"/>
-          <p:nvPr/>
-        </p:nvSpPr>
-        <p:spPr>
-          <a:xfrm>
-            <a:off x="685800" y="866394"/>
-            <a:ext cx="10820095" cy="580644"/>
-          </a:xfrm>
-          <a:prstGeom prst="rect">
-            <a:avLst/>
-          </a:prstGeom>
-          <a:noFill/>
-          <a:ln>
-            <a:noFill/>
-          </a:ln>
-        </p:spPr>
-        <p:txBody>
-          <a:bodyPr wrap="square" lIns="36576" tIns="27432" rIns="36576" bIns="27432" anchor="t">
-            <a:noAutofit/>
-          </a:bodyPr>
-          <a:lstStyle/>
-          <a:p>
-            <a:pPr algn="l">
-              <a:lnSpc>
-                <a:spcPct val="100000"/>
-              </a:lnSpc>
-            </a:pPr>
-            <a:r>
-              <a:rPr lang="en-US" sz="3450" dirty="0" b="1">
-                <a:solidFill>
-                  <a:srgbClr val="16171D"/>
-                </a:solidFill>
-                <a:latin typeface="Segoe UI"/>
-                <a:cs typeface="Segoe UI"/>
-              </a:rPr>
-              <a:t xml:space="preserve">Rewrite as </a:t>
-            </a:r>
-            <a:r>
-              <a:rPr lang="en-US" sz="3450" dirty="0" b="1" i="1">
-                <a:solidFill>
-                  <a:srgbClr val="16171D"/>
-                </a:solidFill>
-                <a:latin typeface="Segoe UI"/>
-                <a:cs typeface="Segoe UI"/>
-              </a:rPr>
-              <a:t xml:space="preserve">y</a:t>
-            </a:r>
-            <a:r>
-              <a:rPr lang="en-US" sz="3450" dirty="0" b="1">
-                <a:solidFill>
-                  <a:srgbClr val="16171D"/>
-                </a:solidFill>
-                <a:latin typeface="Segoe UI"/>
-                <a:cs typeface="Segoe UI"/>
-              </a:rPr>
-              <a:t xml:space="preserve"> = </a:t>
-            </a:r>
-            <a:r>
-              <a:rPr lang="en-US" sz="3450" dirty="0" b="1" i="1">
-                <a:solidFill>
-                  <a:srgbClr val="16171D"/>
-                </a:solidFill>
-                <a:latin typeface="Segoe UI"/>
-                <a:cs typeface="Segoe UI"/>
-              </a:rPr>
-              <a:t xml:space="preserve">mx</a:t>
-            </a:r>
-            <a:r>
-              <a:rPr lang="en-US" sz="3450" dirty="0" b="1">
-                <a:solidFill>
-                  <a:srgbClr val="16171D"/>
-                </a:solidFill>
-                <a:latin typeface="Segoe UI"/>
-                <a:cs typeface="Segoe UI"/>
-              </a:rPr>
-              <a:t xml:space="preserve"> + </a:t>
-            </a:r>
-            <a:r>
-              <a:rPr lang="en-US" sz="3450" dirty="0" b="1" i="1">
-                <a:solidFill>
-                  <a:srgbClr val="16171D"/>
-                </a:solidFill>
-                <a:latin typeface="Segoe UI"/>
-                <a:cs typeface="Segoe UI"/>
-              </a:rPr>
-              <a:t xml:space="preserve">b</a:t>
-            </a:r>
-            <a:endParaRPr lang="en-US" sz="3450" dirty="0"/>
-          </a:p>
-        </p:txBody>
-      </p:sp>
-      <p:sp>
-        <p:nvSpPr>
-          <p:cNvPr id="4" name="Shape 4"/>
-          <p:cNvSpPr txBox="1"/>
-          <p:nvPr/>
-        </p:nvSpPr>
-        <p:spPr>
-          <a:xfrm>
-            <a:off x="685800" y="1618488"/>
-            <a:ext cx="10820095" cy="489204"/>
-          </a:xfrm>
-          <a:prstGeom prst="rect">
-            <a:avLst/>
-          </a:prstGeom>
-          <a:noFill/>
-          <a:ln>
-            <a:noFill/>
-          </a:ln>
-        </p:spPr>
-        <p:txBody>
-          <a:bodyPr wrap="square" lIns="36576" tIns="27432" rIns="36576" bIns="27432" anchor="t">
-            <a:noAutofit/>
-          </a:bodyPr>
-          <a:lstStyle/>
-          <a:p>
-            <a:pPr algn="l">
-              <a:lnSpc>
-                <a:spcPct val="100000"/>
-              </a:lnSpc>
-            </a:pPr>
-            <a:r>
-              <a:rPr lang="en-US" sz="2850" dirty="0" i="1">
-                <a:solidFill>
-                  <a:srgbClr val="16171D"/>
-                </a:solidFill>
-                <a:latin typeface="Cambria"/>
-                <a:cs typeface="Cambria"/>
-              </a:rPr>
-              <a:t xml:space="preserve">y</a:t>
-            </a:r>
-            <a:r>
-              <a:rPr lang="en-US" sz="2850" dirty="0">
-                <a:solidFill>
-                  <a:srgbClr val="16171D"/>
-                </a:solidFill>
-                <a:latin typeface="Cambria"/>
-                <a:cs typeface="Cambria"/>
-              </a:rPr>
-              <a:t xml:space="preserve"> − 5 = 3(</a:t>
-            </a:r>
-            <a:r>
-              <a:rPr lang="en-US" sz="2850" dirty="0" i="1">
-                <a:solidFill>
-                  <a:srgbClr val="16171D"/>
-                </a:solidFill>
-                <a:latin typeface="Cambria"/>
-                <a:cs typeface="Cambria"/>
-              </a:rPr>
-              <a:t xml:space="preserve">x</a:t>
-            </a:r>
-            <a:r>
-              <a:rPr lang="en-US" sz="2850" dirty="0">
-                <a:solidFill>
-                  <a:srgbClr val="16171D"/>
-                </a:solidFill>
-                <a:latin typeface="Cambria"/>
-                <a:cs typeface="Cambria"/>
-              </a:rPr>
-              <a:t xml:space="preserve"> − 2)</a:t>
-            </a:r>
-            <a:endParaRPr lang="en-US" sz="2850" dirty="0"/>
-          </a:p>
-        </p:txBody>
-      </p:sp>
-      <p:sp>
-        <p:nvSpPr>
-          <p:cNvPr id="5" name="Shape 5"/>
-          <p:cNvSpPr txBox="1"/>
-          <p:nvPr/>
-        </p:nvSpPr>
-        <p:spPr>
-          <a:xfrm>
-            <a:off x="685800" y="2279142"/>
-            <a:ext cx="10820095" cy="352044"/>
-          </a:xfrm>
-          <a:prstGeom prst="rect">
-            <a:avLst/>
-          </a:prstGeom>
-          <a:noFill/>
-          <a:ln>
-            <a:noFill/>
-          </a:ln>
-        </p:spPr>
-        <p:txBody>
-          <a:bodyPr wrap="square" lIns="36576" tIns="27432" rIns="36576" bIns="27432" anchor="t">
-            <a:noAutofit/>
-          </a:bodyPr>
-          <a:lstStyle/>
-          <a:p>
-            <a:pPr algn="l">
-              <a:lnSpc>
-                <a:spcPct val="100000"/>
-              </a:lnSpc>
-            </a:pPr>
-            <a:r>
-              <a:rPr lang="en-US" sz="1950" dirty="0">
-                <a:solidFill>
-                  <a:srgbClr val="16171D"/>
-                </a:solidFill>
-                <a:latin typeface="Segoe UI"/>
-                <a:cs typeface="Segoe UI"/>
-              </a:rPr>
-              <a:t xml:space="preserve">Step 1: distribute the 3.</a:t>
-            </a:r>
-            <a:endParaRPr lang="en-US" sz="1950" dirty="0"/>
-          </a:p>
-        </p:txBody>
-      </p:sp>
-      <p:sp>
-        <p:nvSpPr>
-          <p:cNvPr id="6" name="Shape 6"/>
-          <p:cNvSpPr txBox="1"/>
-          <p:nvPr/>
-        </p:nvSpPr>
-        <p:spPr>
-          <a:xfrm>
-            <a:off x="685800" y="2802636"/>
-            <a:ext cx="4234632" cy="518922"/>
-          </a:xfrm>
-          <a:prstGeom prst="roundRect">
-            <a:avLst>
-              <a:gd name="adj" fmla="val 8000"/>
-            </a:avLst>
-          </a:prstGeom>
-          <a:solidFill>
-            <a:srgbClr val="EDF5E9"/>
-          </a:solidFill>
-          <a:ln>
-            <a:noFill/>
-          </a:ln>
-        </p:spPr>
-        <p:txBody>
-          <a:bodyPr wrap="square" lIns="164592" tIns="64008" rIns="164592" bIns="64008" anchor="ctr">
-            <a:noAutofit/>
-          </a:bodyPr>
-          <a:lstStyle/>
-          <a:p>
-            <a:pPr algn="l">
-              <a:lnSpc>
-                <a:spcPct val="100000"/>
-              </a:lnSpc>
-            </a:pPr>
-            <a:r>
-              <a:rPr lang="en-US" sz="1125" dirty="0" b="1" spc="100">
-                <a:solidFill>
-                  <a:srgbClr val="4F8A3C"/>
-                </a:solidFill>
-                <a:latin typeface="Segoe UI"/>
-                <a:cs typeface="Segoe UI"/>
-              </a:rPr>
-              <a:t xml:space="preserve">ANSWER   </a:t>
-            </a:r>
-            <a:r>
-              <a:rPr lang="en-US" sz="2325" dirty="0" i="1">
-                <a:solidFill>
-                  <a:srgbClr val="16171D"/>
-                </a:solidFill>
-                <a:latin typeface="Cambria"/>
-                <a:cs typeface="Cambria"/>
-              </a:rPr>
-              <a:t xml:space="preserve">y</a:t>
-            </a:r>
-            <a:r>
-              <a:rPr lang="en-US" sz="2325" dirty="0">
-                <a:solidFill>
-                  <a:srgbClr val="16171D"/>
-                </a:solidFill>
-                <a:latin typeface="Cambria"/>
-                <a:cs typeface="Cambria"/>
-              </a:rPr>
-              <a:t xml:space="preserve"> − 5 = 3</a:t>
-            </a:r>
-            <a:r>
-              <a:rPr lang="en-US" sz="2325" dirty="0" i="1">
-                <a:solidFill>
-                  <a:srgbClr val="16171D"/>
-                </a:solidFill>
-                <a:latin typeface="Cambria"/>
-                <a:cs typeface="Cambria"/>
-              </a:rPr>
-              <a:t xml:space="preserve">x</a:t>
-            </a:r>
-            <a:r>
-              <a:rPr lang="en-US" sz="2325" dirty="0">
-                <a:solidFill>
-                  <a:srgbClr val="16171D"/>
-                </a:solidFill>
-                <a:latin typeface="Cambria"/>
-                <a:cs typeface="Cambria"/>
-              </a:rPr>
-              <a:t xml:space="preserve"> − 6</a:t>
-            </a:r>
-            <a:endParaRPr lang="en-US" sz="2325" dirty="0"/>
-          </a:p>
-        </p:txBody>
-      </p:sp>
-      <p:sp>
-        <p:nvSpPr>
-          <p:cNvPr id="7" name="Shape 7"/>
-          <p:cNvSpPr txBox="1"/>
-          <p:nvPr/>
-        </p:nvSpPr>
-        <p:spPr>
-          <a:xfrm>
-            <a:off x="685800" y="3493008"/>
-            <a:ext cx="10820095" cy="352044"/>
-          </a:xfrm>
-          <a:prstGeom prst="rect">
-            <a:avLst/>
-          </a:prstGeom>
-          <a:noFill/>
-          <a:ln>
-            <a:noFill/>
-          </a:ln>
-        </p:spPr>
-        <p:txBody>
-          <a:bodyPr wrap="square" lIns="36576" tIns="27432" rIns="36576" bIns="27432" anchor="t">
-            <a:noAutofit/>
-          </a:bodyPr>
-          <a:lstStyle/>
-          <a:p>
-            <a:pPr algn="l">
-              <a:lnSpc>
-                <a:spcPct val="100000"/>
-              </a:lnSpc>
-            </a:pPr>
-            <a:r>
-              <a:rPr lang="en-US" sz="1950" dirty="0">
-                <a:solidFill>
-                  <a:srgbClr val="16171D"/>
-                </a:solidFill>
-                <a:latin typeface="Segoe UI"/>
-                <a:cs typeface="Segoe UI"/>
-              </a:rPr>
-              <a:t xml:space="preserve">Step 2: add 5 to both sides.</a:t>
-            </a:r>
-            <a:endParaRPr lang="en-US" sz="1950" dirty="0"/>
-          </a:p>
-        </p:txBody>
-      </p:sp>
-      <p:sp>
-        <p:nvSpPr>
-          <p:cNvPr id="8" name="Shape 8"/>
-          <p:cNvSpPr txBox="1"/>
-          <p:nvPr/>
-        </p:nvSpPr>
-        <p:spPr>
-          <a:xfrm>
-            <a:off x="685800" y="4016502"/>
-            <a:ext cx="3571326" cy="518922"/>
-          </a:xfrm>
-          <a:prstGeom prst="roundRect">
-            <a:avLst>
-              <a:gd name="adj" fmla="val 8000"/>
-            </a:avLst>
-          </a:prstGeom>
-          <a:solidFill>
-            <a:srgbClr val="EDF5E9"/>
-          </a:solidFill>
-          <a:ln>
-            <a:noFill/>
-          </a:ln>
-        </p:spPr>
-        <p:txBody>
-          <a:bodyPr wrap="square" lIns="164592" tIns="64008" rIns="164592" bIns="64008" anchor="ctr">
-            <a:noAutofit/>
-          </a:bodyPr>
-          <a:lstStyle/>
-          <a:p>
-            <a:pPr algn="l">
-              <a:lnSpc>
-                <a:spcPct val="100000"/>
-              </a:lnSpc>
-            </a:pPr>
-            <a:r>
-              <a:rPr lang="en-US" sz="1125" dirty="0" b="1" spc="100">
-                <a:solidFill>
-                  <a:srgbClr val="4F8A3C"/>
-                </a:solidFill>
-                <a:latin typeface="Segoe UI"/>
-                <a:cs typeface="Segoe UI"/>
-              </a:rPr>
-              <a:t xml:space="preserve">ANSWER   </a:t>
-            </a:r>
-            <a:r>
-              <a:rPr lang="en-US" sz="2325" dirty="0" i="1">
-                <a:solidFill>
-                  <a:srgbClr val="16171D"/>
-                </a:solidFill>
-                <a:latin typeface="Cambria"/>
-                <a:cs typeface="Cambria"/>
-              </a:rPr>
-              <a:t xml:space="preserve">y</a:t>
-            </a:r>
-            <a:r>
-              <a:rPr lang="en-US" sz="2325" dirty="0">
-                <a:solidFill>
-                  <a:srgbClr val="16171D"/>
-                </a:solidFill>
-                <a:latin typeface="Cambria"/>
-                <a:cs typeface="Cambria"/>
-              </a:rPr>
-              <a:t xml:space="preserve"> = 3</a:t>
-            </a:r>
-            <a:r>
-              <a:rPr lang="en-US" sz="2325" dirty="0" i="1">
-                <a:solidFill>
-                  <a:srgbClr val="16171D"/>
-                </a:solidFill>
-                <a:latin typeface="Cambria"/>
-                <a:cs typeface="Cambria"/>
-              </a:rPr>
-              <a:t xml:space="preserve">x</a:t>
-            </a:r>
-            <a:r>
-              <a:rPr lang="en-US" sz="2325" dirty="0">
-                <a:solidFill>
-                  <a:srgbClr val="16171D"/>
-                </a:solidFill>
-                <a:latin typeface="Cambria"/>
-                <a:cs typeface="Cambria"/>
-              </a:rPr>
-              <a:t xml:space="preserve"> − 1</a:t>
-            </a:r>
-            <a:endParaRPr lang="en-US" sz="2325" dirty="0"/>
-          </a:p>
-        </p:txBody>
-      </p:sp>
-    </p:spTree>
-  </p:cSld>
-  <p:clrMapOvr>
-    <a:masterClrMapping/>
-  </p:clrMapOvr>
-  <p:transition spd="med">
-    <p:fade/>
-  </p:transition>
-  <p:timing>
-    <p:tnLst>
-      <p:par>
-        <p:cTn id="1" dur="indefinite" restart="never" nodeType="tmRoot">
-          <p:childTnLst>
-            <p:seq concurrent="1" nextAc="seek">
-              <p:cTn id="2" dur="indefinite" nodeType="mainSeq">
-                <p:childTnLst>
-                  <p:par>
-                    <p:cTn id="8" fill="hold">
-                      <p:stCondLst>
-                        <p:cond delay="indefinite"/>
-                      </p:stCondLst>
-                      <p:childTnLst>
-                        <p:par>
-                          <p:cTn id="9" fill="hold">
-                            <p:stCondLst>
-                              <p:cond delay="0"/>
-                            </p:stCondLst>
-                            <p:childTnLst>
-                              <p:par>
-                                <p:cTn id="7" presetID="53" presetClass="entr" presetSubtype="16" fill="hold" nodeType="clickEffect">
-                                  <p:stCondLst>
-                                    <p:cond delay="0"/>
-                                  </p:stCondLst>
-                                  <p:childTnLst>
-                                    <p:set>
-                                      <p:cBhvr>
-                                        <p:cTn id="3" dur="1" fill="hold">
-                                          <p:stCondLst>
-                                            <p:cond delay="0"/>
-                                          </p:stCondLst>
-                                        </p:cTn>
-                                        <p:tgtEl>
-                                          <p:spTgt spid="6"/>
-                                        </p:tgtEl>
-                                        <p:attrNameLst>
-                                          <p:attrName>style.visibility</p:attrName>
-                                        </p:attrNameLst>
-                                      </p:cBhvr>
-                                      <p:to>
-                                        <p:strVal val="visible"/>
-                                      </p:to>
-                                    </p:set>
-                                    <p:animEffect transition="in" filter="fade">
-                                      <p:cBhvr>
-                                        <p:cTn id="4" dur="500"/>
-                                        <p:tgtEl>
-                                          <p:spTgt spid="6"/>
-                                        </p:tgtEl>
-                                      </p:cBhvr>
-                                    </p:animEffect>
-                                    <p:anim calcmode="lin" valueType="num">
-                                      <p:cBhvr>
-                                        <p:cTn id="5" dur="500" fill="hold"/>
-                                        <p:tgtEl>
-                                          <p:spTgt spid="6"/>
-                                        </p:tgtEl>
-                                        <p:attrNameLst>
-                                          <p:attrName>ppt_w</p:attrName>
-                                        </p:attrNameLst>
-                                      </p:cBhvr>
-                                      <p:tavLst>
-                                        <p:tav tm="0">
-                                          <p:val>
-                                            <p:fltVal val="0"/>
-                                          </p:val>
-                                        </p:tav>
-                                        <p:tav tm="100000">
-                                          <p:val>
-                                            <p:strVal val="#ppt_w"/>
-                                          </p:val>
-                                        </p:tav>
-                                      </p:tavLst>
-                                    </p:anim>
-                                    <p:anim calcmode="lin" valueType="num">
-                                      <p:cBhvr>
-                                        <p:cTn id="6" dur="500" fill="hold"/>
-                                        <p:tgtEl>
-                                          <p:spTgt spid="6"/>
-                                        </p:tgtEl>
-                                        <p:attrNameLst>
-                                          <p:attrName>ppt_h</p:attrName>
-                                        </p:attrNameLst>
-                                      </p:cBhvr>
-                                      <p:tavLst>
-                                        <p:tav tm="0">
-                                          <p:val>
-                                            <p:fltVal val="0"/>
-                                          </p:val>
-                                        </p:tav>
-                                        <p:tav tm="100000">
-                                          <p:val>
-                                            <p:strVal val="#ppt_h"/>
-                                          </p:val>
-                                        </p:tav>
-                                      </p:tavLst>
-                                    </p:anim>
-                                  </p:childTnLst>
-                                </p:cTn>
-                              </p:par>
-                            </p:childTnLst>
-                          </p:cTn>
-                        </p:par>
-                      </p:childTnLst>
-                    </p:cTn>
-                  </p:par>
-                  <p:par>
-                    <p:cTn id="15" fill="hold">
-                      <p:stCondLst>
-                        <p:cond delay="indefinite"/>
-                      </p:stCondLst>
-                      <p:childTnLst>
-                        <p:par>
-                          <p:cTn id="16" fill="hold">
-                            <p:stCondLst>
-                              <p:cond delay="0"/>
-                            </p:stCondLst>
-                            <p:childTnLst>
-                              <p:par>
-                                <p:cTn id="14" presetID="53" presetClass="entr" presetSubtype="16" fill="hold" nodeType="clickEffect">
-                                  <p:stCondLst>
-                                    <p:cond delay="0"/>
-                                  </p:stCondLst>
-                                  <p:childTnLst>
-                                    <p:set>
-                                      <p:cBhvr>
-                                        <p:cTn id="10" dur="1" fill="hold">
-                                          <p:stCondLst>
-                                            <p:cond delay="0"/>
-                                          </p:stCondLst>
-                                        </p:cTn>
-                                        <p:tgtEl>
-                                          <p:spTgt spid="8"/>
-                                        </p:tgtEl>
-                                        <p:attrNameLst>
-                                          <p:attrName>style.visibility</p:attrName>
-                                        </p:attrNameLst>
-                                      </p:cBhvr>
-                                      <p:to>
-                                        <p:strVal val="visible"/>
-                                      </p:to>
-                                    </p:set>
-                                    <p:animEffect transition="in" filter="fade">
-                                      <p:cBhvr>
-                                        <p:cTn id="11" dur="500"/>
-                                        <p:tgtEl>
-                                          <p:spTgt spid="8"/>
-                                        </p:tgtEl>
-                                      </p:cBhvr>
-                                    </p:animEffect>
-                                    <p:anim calcmode="lin" valueType="num">
-                                      <p:cBhvr>
-                                        <p:cTn id="12" dur="500" fill="hold"/>
-                                        <p:tgtEl>
-                                          <p:spTgt spid="8"/>
-                                        </p:tgtEl>
-                                        <p:attrNameLst>
-                                          <p:attrName>ppt_w</p:attrName>
-                                        </p:attrNameLst>
-                                      </p:cBhvr>
-                                      <p:tavLst>
-                                        <p:tav tm="0">
-                                          <p:val>
-                                            <p:fltVal val="0"/>
-                                          </p:val>
-                                        </p:tav>
-                                        <p:tav tm="100000">
-                                          <p:val>
-                                            <p:strVal val="#ppt_w"/>
-                                          </p:val>
-                                        </p:tav>
-                                      </p:tavLst>
-                                    </p:anim>
-                                    <p:anim calcmode="lin" valueType="num">
-                                      <p:cBhvr>
-                                        <p:cTn id="13" dur="500" fill="hold"/>
-                                        <p:tgtEl>
-                                          <p:spTgt spid="8"/>
-                                        </p:tgtEl>
-                                        <p:attrNameLst>
-                                          <p:attrName>ppt_h</p:attrName>
-                                        </p:attrNameLst>
-                                      </p:cBhvr>
-                                      <p:tavLst>
-                                        <p:tav tm="0">
-                                          <p:val>
-                                            <p:fltVal val="0"/>
-                                          </p:val>
-                                        </p:tav>
-                                        <p:tav tm="100000">
-                                          <p:val>
-                                            <p:strVal val="#ppt_h"/>
-                                          </p:val>
-                                        </p:tav>
-                                      </p:tavLst>
-                                    </p:anim>
-                                  </p:childTnLst>
-                                </p:cTn>
-                              </p:par>
-                            </p:childTnLst>
-                          </p:cTn>
-                        </p:par>
-                      </p:childTnLst>
-                    </p:cTn>
-                  </p:par>
-                </p:childTnLst>
-              </p:cTn>
-              <p:prevCondLst>
-                <p:cond evt="onPrev" delay="0">
-                  <p:tgtEl>
-                    <p:sldTgt/>
-                  </p:tgtEl>
-                </p:cond>
-              </p:prevCondLst>
-              <p:nextCondLst>
-                <p:cond evt="onNext" delay="0">
-                  <p:tgtEl>
-                    <p:sldTgt/>
-                  </p:tgtEl>
-                </p:cond>
-              </p:nextCondLst>
-            </p:seq>
-          </p:childTnLst>
-        </p:cTn>
-      </p:par>
-    </p:tnLst>
-  </p:timing>
-</p:sld>
-</file>
-
-<file path=ppt/slides/slide9.xml><?xml version="1.0" encoding="utf-8"?>
-<p:sld xmlns:a="http://schemas.openxmlformats.org/drawingml/2006/main" xmlns:r="http://schemas.openxmlformats.org/officeDocument/2006/relationships" xmlns:p="http://schemas.openxmlformats.org/presentationml/2006/main">
-  <p:cSld>
-    <p:spTree>
-      <p:nvGrpSpPr>
-        <p:cNvPr id="1" name=""/>
-        <p:cNvGrpSpPr/>
-        <p:nvPr/>
-      </p:nvGrpSpPr>
-      <p:grpSpPr>
-        <a:xfrm>
-          <a:off x="0" y="0"/>
-          <a:ext cx="0" cy="0"/>
-          <a:chOff x="0" y="0"/>
-          <a:chExt cx="0" cy="0"/>
-        </a:xfrm>
-      </p:grpSpPr>
-      <p:sp>
-        <p:nvSpPr>
-          <p:cNvPr id="2" name="Shape 2"/>
-          <p:cNvSpPr txBox="1"/>
-          <p:nvPr/>
-        </p:nvSpPr>
-        <p:spPr>
-          <a:xfrm>
-            <a:off x="685800" y="457200"/>
-            <a:ext cx="10820095" cy="237744"/>
-          </a:xfrm>
-          <a:prstGeom prst="rect">
-            <a:avLst/>
-          </a:prstGeom>
-          <a:noFill/>
-          <a:ln>
-            <a:noFill/>
-          </a:ln>
-        </p:spPr>
-        <p:txBody>
-          <a:bodyPr wrap="square" lIns="36576" tIns="27432" rIns="36576" bIns="27432" anchor="t">
-            <a:noAutofit/>
-          </a:bodyPr>
-          <a:lstStyle/>
-          <a:p>
-            <a:pPr algn="l">
-              <a:lnSpc>
-                <a:spcPct val="100000"/>
-              </a:lnSpc>
-            </a:pPr>
-            <a:r>
-              <a:rPr lang="en-US" sz="1200" dirty="0" b="1" spc="150" cap="all">
-                <a:solidFill>
-                  <a:srgbClr val="5F6272"/>
-                </a:solidFill>
-                <a:latin typeface="Segoe UI"/>
-                <a:cs typeface="Segoe UI"/>
-              </a:rPr>
-              <a:t xml:space="preserve">You do · Try it</a:t>
-            </a:r>
-            <a:endParaRPr lang="en-US" sz="1200" dirty="0"/>
-          </a:p>
-        </p:txBody>
-      </p:sp>
-      <p:sp>
-        <p:nvSpPr>
-          <p:cNvPr id="3" name="Shape 3"/>
-          <p:cNvSpPr txBox="1"/>
-          <p:nvPr/>
-        </p:nvSpPr>
-        <p:spPr>
-          <a:xfrm>
-            <a:off x="685800" y="866394"/>
-            <a:ext cx="10820095" cy="580644"/>
-          </a:xfrm>
-          <a:prstGeom prst="rect">
-            <a:avLst/>
-          </a:prstGeom>
-          <a:noFill/>
-          <a:ln>
-            <a:noFill/>
-          </a:ln>
-        </p:spPr>
-        <p:txBody>
-          <a:bodyPr wrap="square" lIns="36576" tIns="27432" rIns="36576" bIns="27432" anchor="t">
-            <a:noAutofit/>
-          </a:bodyPr>
-          <a:lstStyle/>
-          <a:p>
-            <a:pPr algn="l">
-              <a:lnSpc>
-                <a:spcPct val="100000"/>
-              </a:lnSpc>
-            </a:pPr>
-            <a:r>
-              <a:rPr lang="en-US" sz="3450" dirty="0" b="1">
-                <a:solidFill>
-                  <a:srgbClr val="16171D"/>
-                </a:solidFill>
-                <a:latin typeface="Segoe UI"/>
-                <a:cs typeface="Segoe UI"/>
-              </a:rPr>
-              <a:t xml:space="preserve">Rewrite as </a:t>
-            </a:r>
-            <a:r>
-              <a:rPr lang="en-US" sz="3450" dirty="0" b="1" i="1">
-                <a:solidFill>
-                  <a:srgbClr val="16171D"/>
-                </a:solidFill>
-                <a:latin typeface="Segoe UI"/>
-                <a:cs typeface="Segoe UI"/>
-              </a:rPr>
-              <a:t xml:space="preserve">y</a:t>
-            </a:r>
-            <a:r>
-              <a:rPr lang="en-US" sz="3450" dirty="0" b="1">
-                <a:solidFill>
-                  <a:srgbClr val="16171D"/>
-                </a:solidFill>
-                <a:latin typeface="Segoe UI"/>
-                <a:cs typeface="Segoe UI"/>
-              </a:rPr>
-              <a:t xml:space="preserve"> = </a:t>
-            </a:r>
-            <a:r>
-              <a:rPr lang="en-US" sz="3450" dirty="0" b="1" i="1">
-                <a:solidFill>
-                  <a:srgbClr val="16171D"/>
-                </a:solidFill>
-                <a:latin typeface="Segoe UI"/>
-                <a:cs typeface="Segoe UI"/>
-              </a:rPr>
-              <a:t xml:space="preserve">mx</a:t>
-            </a:r>
-            <a:r>
-              <a:rPr lang="en-US" sz="3450" dirty="0" b="1">
-                <a:solidFill>
-                  <a:srgbClr val="16171D"/>
-                </a:solidFill>
-                <a:latin typeface="Segoe UI"/>
-                <a:cs typeface="Segoe UI"/>
-              </a:rPr>
-              <a:t xml:space="preserve"> + </a:t>
-            </a:r>
-            <a:r>
-              <a:rPr lang="en-US" sz="3450" dirty="0" b="1" i="1">
-                <a:solidFill>
-                  <a:srgbClr val="16171D"/>
-                </a:solidFill>
-                <a:latin typeface="Segoe UI"/>
-                <a:cs typeface="Segoe UI"/>
-              </a:rPr>
-              <a:t xml:space="preserve">b</a:t>
-            </a:r>
-            <a:endParaRPr lang="en-US" sz="3450" dirty="0"/>
-          </a:p>
-        </p:txBody>
-      </p:sp>
-      <p:sp>
-        <p:nvSpPr>
-          <p:cNvPr id="4" name="Shape 4"/>
-          <p:cNvSpPr txBox="1"/>
-          <p:nvPr/>
-        </p:nvSpPr>
-        <p:spPr>
-          <a:xfrm>
-            <a:off x="685800" y="1618488"/>
-            <a:ext cx="10820095" cy="489204"/>
-          </a:xfrm>
-          <a:prstGeom prst="rect">
-            <a:avLst/>
-          </a:prstGeom>
-          <a:noFill/>
-          <a:ln>
-            <a:noFill/>
-          </a:ln>
-        </p:spPr>
-        <p:txBody>
-          <a:bodyPr wrap="square" lIns="36576" tIns="27432" rIns="36576" bIns="27432" anchor="t">
-            <a:noAutofit/>
-          </a:bodyPr>
-          <a:lstStyle/>
-          <a:p>
-            <a:pPr algn="l">
-              <a:lnSpc>
-                <a:spcPct val="100000"/>
-              </a:lnSpc>
-            </a:pPr>
-            <a:r>
-              <a:rPr lang="en-US" sz="2850" dirty="0" i="1">
-                <a:solidFill>
-                  <a:srgbClr val="16171D"/>
-                </a:solidFill>
-                <a:latin typeface="Cambria"/>
-                <a:cs typeface="Cambria"/>
-              </a:rPr>
-              <a:t xml:space="preserve">y</a:t>
-            </a:r>
-            <a:r>
-              <a:rPr lang="en-US" sz="2850" dirty="0">
-                <a:solidFill>
-                  <a:srgbClr val="16171D"/>
-                </a:solidFill>
-                <a:latin typeface="Cambria"/>
-                <a:cs typeface="Cambria"/>
-              </a:rPr>
-              <a:t xml:space="preserve"> − 3 = 5(</a:t>
-            </a:r>
-            <a:r>
-              <a:rPr lang="en-US" sz="2850" dirty="0" i="1">
-                <a:solidFill>
-                  <a:srgbClr val="16171D"/>
-                </a:solidFill>
-                <a:latin typeface="Cambria"/>
-                <a:cs typeface="Cambria"/>
-              </a:rPr>
-              <a:t xml:space="preserve">x</a:t>
-            </a:r>
-            <a:r>
-              <a:rPr lang="en-US" sz="2850" dirty="0">
-                <a:solidFill>
-                  <a:srgbClr val="16171D"/>
-                </a:solidFill>
-                <a:latin typeface="Cambria"/>
-                <a:cs typeface="Cambria"/>
-              </a:rPr>
-              <a:t xml:space="preserve"> + 2)</a:t>
-            </a:r>
-            <a:endParaRPr lang="en-US" sz="2850" dirty="0"/>
-          </a:p>
-        </p:txBody>
-      </p:sp>
-      <p:sp>
-        <p:nvSpPr>
-          <p:cNvPr id="5" name="Shape 5"/>
-          <p:cNvSpPr txBox="1"/>
-          <p:nvPr/>
-        </p:nvSpPr>
-        <p:spPr>
-          <a:xfrm>
-            <a:off x="685800" y="2279142"/>
-            <a:ext cx="10820095" cy="352044"/>
-          </a:xfrm>
-          <a:prstGeom prst="rect">
-            <a:avLst/>
-          </a:prstGeom>
-          <a:noFill/>
-          <a:ln>
-            <a:noFill/>
-          </a:ln>
-        </p:spPr>
-        <p:txBody>
-          <a:bodyPr wrap="square" lIns="36576" tIns="27432" rIns="36576" bIns="27432" anchor="t">
-            <a:noAutofit/>
-          </a:bodyPr>
-          <a:lstStyle/>
-          <a:p>
-            <a:pPr algn="l">
-              <a:lnSpc>
-                <a:spcPct val="100000"/>
-              </a:lnSpc>
-            </a:pPr>
-            <a:r>
-              <a:rPr lang="en-US" sz="1950" dirty="0">
-                <a:solidFill>
-                  <a:srgbClr val="16171D"/>
-                </a:solidFill>
-                <a:latin typeface="Segoe UI"/>
-                <a:cs typeface="Segoe UI"/>
-              </a:rPr>
-              <a:t xml:space="preserve">Step 1: distribute. </a:t>
-            </a:r>
-            <a:r>
-              <a:rPr lang="en-US" sz="1950" dirty="0" i="1">
-                <a:solidFill>
-                  <a:srgbClr val="16171D"/>
-                </a:solidFill>
-                <a:latin typeface="Segoe UI"/>
-                <a:cs typeface="Segoe UI"/>
-              </a:rPr>
-              <a:t xml:space="preserve">y</a:t>
-            </a:r>
-            <a:r>
-              <a:rPr lang="en-US" sz="1950" dirty="0">
-                <a:solidFill>
-                  <a:srgbClr val="16171D"/>
-                </a:solidFill>
-                <a:latin typeface="Segoe UI"/>
-                <a:cs typeface="Segoe UI"/>
-              </a:rPr>
-              <a:t xml:space="preserve"> − 3 = ____</a:t>
-            </a:r>
-            <a:endParaRPr lang="en-US" sz="1950" dirty="0"/>
-          </a:p>
-        </p:txBody>
-      </p:sp>
-      <p:sp>
-        <p:nvSpPr>
-          <p:cNvPr id="6" name="Shape 6"/>
-          <p:cNvSpPr txBox="1"/>
-          <p:nvPr/>
-        </p:nvSpPr>
-        <p:spPr>
-          <a:xfrm>
-            <a:off x="685800" y="2802636"/>
-            <a:ext cx="4400459" cy="518922"/>
-          </a:xfrm>
-          <a:prstGeom prst="roundRect">
-            <a:avLst>
-              <a:gd name="adj" fmla="val 8000"/>
-            </a:avLst>
-          </a:prstGeom>
-          <a:solidFill>
-            <a:srgbClr val="EDF5E9"/>
-          </a:solidFill>
-          <a:ln>
-            <a:noFill/>
-          </a:ln>
-        </p:spPr>
-        <p:txBody>
-          <a:bodyPr wrap="square" lIns="164592" tIns="64008" rIns="164592" bIns="64008" anchor="ctr">
-            <a:noAutofit/>
-          </a:bodyPr>
-          <a:lstStyle/>
-          <a:p>
-            <a:pPr algn="l">
-              <a:lnSpc>
-                <a:spcPct val="100000"/>
-              </a:lnSpc>
-            </a:pPr>
-            <a:r>
-              <a:rPr lang="en-US" sz="1125" dirty="0" b="1" spc="100">
-                <a:solidFill>
-                  <a:srgbClr val="4F8A3C"/>
-                </a:solidFill>
-                <a:latin typeface="Segoe UI"/>
-                <a:cs typeface="Segoe UI"/>
-              </a:rPr>
-              <a:t xml:space="preserve">ANSWER   </a:t>
-            </a:r>
-            <a:r>
-              <a:rPr lang="en-US" sz="2325" dirty="0" i="1">
-                <a:solidFill>
-                  <a:srgbClr val="16171D"/>
-                </a:solidFill>
-                <a:latin typeface="Cambria"/>
-                <a:cs typeface="Cambria"/>
-              </a:rPr>
-              <a:t xml:space="preserve">y</a:t>
-            </a:r>
-            <a:r>
-              <a:rPr lang="en-US" sz="2325" dirty="0">
-                <a:solidFill>
-                  <a:srgbClr val="16171D"/>
-                </a:solidFill>
-                <a:latin typeface="Cambria"/>
-                <a:cs typeface="Cambria"/>
-              </a:rPr>
-              <a:t xml:space="preserve"> − 3 = 5</a:t>
-            </a:r>
-            <a:r>
-              <a:rPr lang="en-US" sz="2325" dirty="0" i="1">
-                <a:solidFill>
-                  <a:srgbClr val="16171D"/>
-                </a:solidFill>
-                <a:latin typeface="Cambria"/>
-                <a:cs typeface="Cambria"/>
-              </a:rPr>
-              <a:t xml:space="preserve">x</a:t>
-            </a:r>
-            <a:r>
-              <a:rPr lang="en-US" sz="2325" dirty="0">
-                <a:solidFill>
-                  <a:srgbClr val="16171D"/>
-                </a:solidFill>
-                <a:latin typeface="Cambria"/>
-                <a:cs typeface="Cambria"/>
-              </a:rPr>
-              <a:t xml:space="preserve"> + 10</a:t>
-            </a:r>
-            <a:endParaRPr lang="en-US" sz="2325" dirty="0"/>
-          </a:p>
-        </p:txBody>
-      </p:sp>
-      <p:sp>
-        <p:nvSpPr>
-          <p:cNvPr id="7" name="Shape 7"/>
-          <p:cNvSpPr txBox="1"/>
-          <p:nvPr/>
-        </p:nvSpPr>
-        <p:spPr>
-          <a:xfrm>
-            <a:off x="685800" y="3493008"/>
-            <a:ext cx="10820095" cy="352044"/>
-          </a:xfrm>
-          <a:prstGeom prst="rect">
-            <a:avLst/>
-          </a:prstGeom>
-          <a:noFill/>
-          <a:ln>
-            <a:noFill/>
-          </a:ln>
-        </p:spPr>
-        <p:txBody>
-          <a:bodyPr wrap="square" lIns="36576" tIns="27432" rIns="36576" bIns="27432" anchor="t">
-            <a:noAutofit/>
-          </a:bodyPr>
-          <a:lstStyle/>
-          <a:p>
-            <a:pPr algn="l">
-              <a:lnSpc>
-                <a:spcPct val="100000"/>
-              </a:lnSpc>
-            </a:pPr>
-            <a:r>
-              <a:rPr lang="en-US" sz="1950" dirty="0">
-                <a:solidFill>
-                  <a:srgbClr val="16171D"/>
-                </a:solidFill>
-                <a:latin typeface="Segoe UI"/>
-                <a:cs typeface="Segoe UI"/>
-              </a:rPr>
-              <a:t xml:space="preserve">Step 2: add 3. </a:t>
-            </a:r>
-            <a:r>
-              <a:rPr lang="en-US" sz="1950" dirty="0" i="1">
-                <a:solidFill>
-                  <a:srgbClr val="16171D"/>
-                </a:solidFill>
-                <a:latin typeface="Segoe UI"/>
-                <a:cs typeface="Segoe UI"/>
-              </a:rPr>
-              <a:t xml:space="preserve">y</a:t>
-            </a:r>
-            <a:r>
-              <a:rPr lang="en-US" sz="1950" dirty="0">
-                <a:solidFill>
-                  <a:srgbClr val="16171D"/>
-                </a:solidFill>
-                <a:latin typeface="Segoe UI"/>
-                <a:cs typeface="Segoe UI"/>
-              </a:rPr>
-              <a:t xml:space="preserve"> = ____</a:t>
-            </a:r>
-            <a:endParaRPr lang="en-US" sz="1950" dirty="0"/>
-          </a:p>
-        </p:txBody>
-      </p:sp>
-      <p:sp>
-        <p:nvSpPr>
-          <p:cNvPr id="8" name="Shape 8"/>
-          <p:cNvSpPr txBox="1"/>
-          <p:nvPr/>
-        </p:nvSpPr>
-        <p:spPr>
-          <a:xfrm>
-            <a:off x="685800" y="4016502"/>
-            <a:ext cx="3737153" cy="518922"/>
-          </a:xfrm>
-          <a:prstGeom prst="roundRect">
-            <a:avLst>
-              <a:gd name="adj" fmla="val 8000"/>
-            </a:avLst>
-          </a:prstGeom>
-          <a:solidFill>
-            <a:srgbClr val="EDF5E9"/>
-          </a:solidFill>
-          <a:ln>
-            <a:noFill/>
-          </a:ln>
-        </p:spPr>
-        <p:txBody>
-          <a:bodyPr wrap="square" lIns="164592" tIns="64008" rIns="164592" bIns="64008" anchor="ctr">
-            <a:noAutofit/>
-          </a:bodyPr>
-          <a:lstStyle/>
-          <a:p>
-            <a:pPr algn="l">
-              <a:lnSpc>
-                <a:spcPct val="100000"/>
-              </a:lnSpc>
-            </a:pPr>
-            <a:r>
-              <a:rPr lang="en-US" sz="1125" dirty="0" b="1" spc="100">
-                <a:solidFill>
-                  <a:srgbClr val="4F8A3C"/>
-                </a:solidFill>
-                <a:latin typeface="Segoe UI"/>
-                <a:cs typeface="Segoe UI"/>
-              </a:rPr>
-              <a:t xml:space="preserve">ANSWER   </a:t>
-            </a:r>
-            <a:r>
-              <a:rPr lang="en-US" sz="2325" dirty="0" i="1">
-                <a:solidFill>
-                  <a:srgbClr val="16171D"/>
-                </a:solidFill>
-                <a:latin typeface="Cambria"/>
-                <a:cs typeface="Cambria"/>
-              </a:rPr>
-              <a:t xml:space="preserve">y</a:t>
-            </a:r>
-            <a:r>
-              <a:rPr lang="en-US" sz="2325" dirty="0">
-                <a:solidFill>
-                  <a:srgbClr val="16171D"/>
-                </a:solidFill>
-                <a:latin typeface="Cambria"/>
-                <a:cs typeface="Cambria"/>
-              </a:rPr>
-              <a:t xml:space="preserve"> = 5</a:t>
-            </a:r>
-            <a:r>
-              <a:rPr lang="en-US" sz="2325" dirty="0" i="1">
-                <a:solidFill>
-                  <a:srgbClr val="16171D"/>
-                </a:solidFill>
-                <a:latin typeface="Cambria"/>
-                <a:cs typeface="Cambria"/>
-              </a:rPr>
-              <a:t xml:space="preserve">x</a:t>
-            </a:r>
-            <a:r>
-              <a:rPr lang="en-US" sz="2325" dirty="0">
-                <a:solidFill>
-                  <a:srgbClr val="16171D"/>
-                </a:solidFill>
-                <a:latin typeface="Cambria"/>
-                <a:cs typeface="Cambria"/>
-              </a:rPr>
-              <a:t xml:space="preserve"> + 13</a:t>
-            </a:r>
-            <a:endParaRPr lang="en-US" sz="2325" dirty="0"/>
-          </a:p>
-        </p:txBody>
-      </p:sp>
-    </p:spTree>
-  </p:cSld>
-  <p:clrMapOvr>
-    <a:masterClrMapping/>
-  </p:clrMapOvr>
-  <p:transition spd="med">
-    <p:fade/>
-  </p:transition>
-  <p:timing>
-    <p:tnLst>
-      <p:par>
-        <p:cTn id="1" dur="indefinite" restart="never" nodeType="tmRoot">
-          <p:childTnLst>
-            <p:seq concurrent="1" nextAc="seek">
-              <p:cTn id="2" dur="indefinite" nodeType="mainSeq">
-                <p:childTnLst>
-                  <p:par>
-                    <p:cTn id="8" fill="hold">
-                      <p:stCondLst>
-                        <p:cond delay="indefinite"/>
-                      </p:stCondLst>
-                      <p:childTnLst>
-                        <p:par>
-                          <p:cTn id="9" fill="hold">
-                            <p:stCondLst>
-                              <p:cond delay="0"/>
-                            </p:stCondLst>
-                            <p:childTnLst>
-                              <p:par>
-                                <p:cTn id="7" presetID="53" presetClass="entr" presetSubtype="16" fill="hold" nodeType="clickEffect">
-                                  <p:stCondLst>
-                                    <p:cond delay="0"/>
-                                  </p:stCondLst>
-                                  <p:childTnLst>
-                                    <p:set>
-                                      <p:cBhvr>
-                                        <p:cTn id="3" dur="1" fill="hold">
-                                          <p:stCondLst>
-                                            <p:cond delay="0"/>
-                                          </p:stCondLst>
-                                        </p:cTn>
-                                        <p:tgtEl>
-                                          <p:spTgt spid="6"/>
-                                        </p:tgtEl>
-                                        <p:attrNameLst>
-                                          <p:attrName>style.visibility</p:attrName>
-                                        </p:attrNameLst>
-                                      </p:cBhvr>
-                                      <p:to>
-                                        <p:strVal val="visible"/>
-                                      </p:to>
-                                    </p:set>
-                                    <p:animEffect transition="in" filter="fade">
-                                      <p:cBhvr>
-                                        <p:cTn id="4" dur="500"/>
-                                        <p:tgtEl>
-                                          <p:spTgt spid="6"/>
-                                        </p:tgtEl>
-                                      </p:cBhvr>
-                                    </p:animEffect>
-                                    <p:anim calcmode="lin" valueType="num">
-                                      <p:cBhvr>
-                                        <p:cTn id="5" dur="500" fill="hold"/>
-                                        <p:tgtEl>
-                                          <p:spTgt spid="6"/>
-                                        </p:tgtEl>
-                                        <p:attrNameLst>
-                                          <p:attrName>ppt_w</p:attrName>
-                                        </p:attrNameLst>
-                                      </p:cBhvr>
-                                      <p:tavLst>
-                                        <p:tav tm="0">
-                                          <p:val>
-                                            <p:fltVal val="0"/>
-                                          </p:val>
-                                        </p:tav>
-                                        <p:tav tm="100000">
-                                          <p:val>
-                                            <p:strVal val="#ppt_w"/>
-                                          </p:val>
-                                        </p:tav>
-                                      </p:tavLst>
-                                    </p:anim>
-                                    <p:anim calcmode="lin" valueType="num">
-                                      <p:cBhvr>
-                                        <p:cTn id="6" dur="500" fill="hold"/>
-                                        <p:tgtEl>
-                                          <p:spTgt spid="6"/>
                                         </p:tgtEl>
                                         <p:attrNameLst>
                                           <p:attrName>ppt_h</p:attrName>

--- a/IEP/lesson4-point-slope-form-IEP.pptx
+++ b/IEP/lesson4-point-slope-form-IEP.pptx
@@ -1962,6 +1962,40 @@
           </a:p>
         </p:txBody>
       </p:sp>
+      <p:sp>
+        <p:nvSpPr>
+          <p:cNvPr id="11" name="Slide Number 11"/>
+          <p:cNvSpPr txBox="1"/>
+          <p:nvPr/>
+        </p:nvSpPr>
+        <p:spPr>
+          <a:xfrm>
+            <a:off x="11277295" y="6611112"/>
+            <a:ext cx="685800" cy="201168"/>
+          </a:xfrm>
+          <a:prstGeom prst="rect">
+            <a:avLst/>
+          </a:prstGeom>
+          <a:noFill/>
+        </p:spPr>
+        <p:txBody>
+          <a:bodyPr wrap="none" lIns="0" tIns="0" rIns="0" bIns="0" anchor="b">
+            <a:noAutofit/>
+          </a:bodyPr>
+          <a:lstStyle/>
+          <a:p>
+            <a:pPr algn="r"/>
+            <a:fld id="{5C1A6E0B-3B1F-4D5E-9C7A-2F4B8D6E1A90}" type="slidenum">
+              <a:rPr lang="en-US" sz="1200" dirty="0">
+                <a:solidFill>
+                  <a:srgbClr val="5F6272"/>
+                </a:solidFill>
+              </a:rPr>
+              <a:t>1</a:t>
+            </a:fld>
+          </a:p>
+        </p:txBody>
+      </p:sp>
     </p:spTree>
   </p:cSld>
   <p:clrMapOvr>
@@ -2463,6 +2497,40 @@
               <a:t xml:space="preserve"> − 1</a:t>
             </a:r>
             <a:endParaRPr lang="en-US" sz="2325" dirty="0"/>
+          </a:p>
+        </p:txBody>
+      </p:sp>
+      <p:sp>
+        <p:nvSpPr>
+          <p:cNvPr id="9" name="Slide Number 9"/>
+          <p:cNvSpPr txBox="1"/>
+          <p:nvPr/>
+        </p:nvSpPr>
+        <p:spPr>
+          <a:xfrm>
+            <a:off x="11277295" y="6611112"/>
+            <a:ext cx="685800" cy="201168"/>
+          </a:xfrm>
+          <a:prstGeom prst="rect">
+            <a:avLst/>
+          </a:prstGeom>
+          <a:noFill/>
+        </p:spPr>
+        <p:txBody>
+          <a:bodyPr wrap="none" lIns="0" tIns="0" rIns="0" bIns="0" anchor="b">
+            <a:noAutofit/>
+          </a:bodyPr>
+          <a:lstStyle/>
+          <a:p>
+            <a:pPr algn="r"/>
+            <a:fld id="{5C1A6E0B-3B1F-4D5E-9C7A-2F4B8D6E1A90}" type="slidenum">
+              <a:rPr lang="en-US" sz="1200" dirty="0">
+                <a:solidFill>
+                  <a:srgbClr val="5F6272"/>
+                </a:solidFill>
+              </a:rPr>
+              <a:t>10</a:t>
+            </a:fld>
           </a:p>
         </p:txBody>
       </p:sp>
@@ -3238,6 +3306,40 @@
           </a:p>
         </p:txBody>
       </p:sp>
+      <p:sp>
+        <p:nvSpPr>
+          <p:cNvPr id="9" name="Slide Number 9"/>
+          <p:cNvSpPr txBox="1"/>
+          <p:nvPr/>
+        </p:nvSpPr>
+        <p:spPr>
+          <a:xfrm>
+            <a:off x="11277295" y="6611112"/>
+            <a:ext cx="685800" cy="201168"/>
+          </a:xfrm>
+          <a:prstGeom prst="rect">
+            <a:avLst/>
+          </a:prstGeom>
+          <a:noFill/>
+        </p:spPr>
+        <p:txBody>
+          <a:bodyPr wrap="none" lIns="0" tIns="0" rIns="0" bIns="0" anchor="b">
+            <a:noAutofit/>
+          </a:bodyPr>
+          <a:lstStyle/>
+          <a:p>
+            <a:pPr algn="r"/>
+            <a:fld id="{5C1A6E0B-3B1F-4D5E-9C7A-2F4B8D6E1A90}" type="slidenum">
+              <a:rPr lang="en-US" sz="1200" dirty="0">
+                <a:solidFill>
+                  <a:srgbClr val="5F6272"/>
+                </a:solidFill>
+              </a:rPr>
+              <a:t>11</a:t>
+            </a:fld>
+          </a:p>
+        </p:txBody>
+      </p:sp>
     </p:spTree>
   </p:cSld>
   <p:clrMapOvr>
@@ -6380,6 +6482,40 @@
           </a:p>
         </p:txBody>
       </p:sp>
+      <p:sp>
+        <p:nvSpPr>
+          <p:cNvPr id="86" name="Slide Number 86"/>
+          <p:cNvSpPr txBox="1"/>
+          <p:nvPr/>
+        </p:nvSpPr>
+        <p:spPr>
+          <a:xfrm>
+            <a:off x="11277295" y="6611112"/>
+            <a:ext cx="685800" cy="201168"/>
+          </a:xfrm>
+          <a:prstGeom prst="rect">
+            <a:avLst/>
+          </a:prstGeom>
+          <a:noFill/>
+        </p:spPr>
+        <p:txBody>
+          <a:bodyPr wrap="none" lIns="0" tIns="0" rIns="0" bIns="0" anchor="b">
+            <a:noAutofit/>
+          </a:bodyPr>
+          <a:lstStyle/>
+          <a:p>
+            <a:pPr algn="r"/>
+            <a:fld id="{5C1A6E0B-3B1F-4D5E-9C7A-2F4B8D6E1A90}" type="slidenum">
+              <a:rPr lang="en-US" sz="1200" dirty="0">
+                <a:solidFill>
+                  <a:srgbClr val="5F6272"/>
+                </a:solidFill>
+              </a:rPr>
+              <a:t>12</a:t>
+            </a:fld>
+          </a:p>
+        </p:txBody>
+      </p:sp>
     </p:spTree>
   </p:cSld>
   <p:clrMapOvr>
@@ -7397,6 +7533,40 @@
               <a:t xml:space="preserve"> = −3</a:t>
             </a:r>
             <a:endParaRPr lang="en-US" sz="2325" dirty="0"/>
+          </a:p>
+        </p:txBody>
+      </p:sp>
+      <p:sp>
+        <p:nvSpPr>
+          <p:cNvPr id="21" name="Slide Number 21"/>
+          <p:cNvSpPr txBox="1"/>
+          <p:nvPr/>
+        </p:nvSpPr>
+        <p:spPr>
+          <a:xfrm>
+            <a:off x="11277295" y="6611112"/>
+            <a:ext cx="685800" cy="201168"/>
+          </a:xfrm>
+          <a:prstGeom prst="rect">
+            <a:avLst/>
+          </a:prstGeom>
+          <a:noFill/>
+        </p:spPr>
+        <p:txBody>
+          <a:bodyPr wrap="none" lIns="0" tIns="0" rIns="0" bIns="0" anchor="b">
+            <a:noAutofit/>
+          </a:bodyPr>
+          <a:lstStyle/>
+          <a:p>
+            <a:pPr algn="r"/>
+            <a:fld id="{5C1A6E0B-3B1F-4D5E-9C7A-2F4B8D6E1A90}" type="slidenum">
+              <a:rPr lang="en-US" sz="1200" dirty="0">
+                <a:solidFill>
+                  <a:srgbClr val="5F6272"/>
+                </a:solidFill>
+              </a:rPr>
+              <a:t>13</a:t>
+            </a:fld>
           </a:p>
         </p:txBody>
       </p:sp>
@@ -8399,6 +8569,40 @@
           </a:p>
         </p:txBody>
       </p:sp>
+      <p:sp>
+        <p:nvSpPr>
+          <p:cNvPr id="13" name="Slide Number 13"/>
+          <p:cNvSpPr txBox="1"/>
+          <p:nvPr/>
+        </p:nvSpPr>
+        <p:spPr>
+          <a:xfrm>
+            <a:off x="11277295" y="6611112"/>
+            <a:ext cx="685800" cy="201168"/>
+          </a:xfrm>
+          <a:prstGeom prst="rect">
+            <a:avLst/>
+          </a:prstGeom>
+          <a:noFill/>
+        </p:spPr>
+        <p:txBody>
+          <a:bodyPr wrap="none" lIns="0" tIns="0" rIns="0" bIns="0" anchor="b">
+            <a:noAutofit/>
+          </a:bodyPr>
+          <a:lstStyle/>
+          <a:p>
+            <a:pPr algn="r"/>
+            <a:fld id="{5C1A6E0B-3B1F-4D5E-9C7A-2F4B8D6E1A90}" type="slidenum">
+              <a:rPr lang="en-US" sz="1200" dirty="0">
+                <a:solidFill>
+                  <a:srgbClr val="5F6272"/>
+                </a:solidFill>
+              </a:rPr>
+              <a:t>14</a:t>
+            </a:fld>
+          </a:p>
+        </p:txBody>
+      </p:sp>
     </p:spTree>
   </p:cSld>
   <p:clrMapOvr>
@@ -9004,6 +9208,40 @@
           </a:p>
         </p:txBody>
       </p:sp>
+      <p:sp>
+        <p:nvSpPr>
+          <p:cNvPr id="6" name="Slide Number 6"/>
+          <p:cNvSpPr txBox="1"/>
+          <p:nvPr/>
+        </p:nvSpPr>
+        <p:spPr>
+          <a:xfrm>
+            <a:off x="11277295" y="6611112"/>
+            <a:ext cx="685800" cy="201168"/>
+          </a:xfrm>
+          <a:prstGeom prst="rect">
+            <a:avLst/>
+          </a:prstGeom>
+          <a:noFill/>
+        </p:spPr>
+        <p:txBody>
+          <a:bodyPr wrap="none" lIns="0" tIns="0" rIns="0" bIns="0" anchor="b">
+            <a:noAutofit/>
+          </a:bodyPr>
+          <a:lstStyle/>
+          <a:p>
+            <a:pPr algn="r"/>
+            <a:fld id="{5C1A6E0B-3B1F-4D5E-9C7A-2F4B8D6E1A90}" type="slidenum">
+              <a:rPr lang="en-US" sz="1200" dirty="0">
+                <a:solidFill>
+                  <a:srgbClr val="5F6272"/>
+                </a:solidFill>
+              </a:rPr>
+              <a:t>15</a:t>
+            </a:fld>
+          </a:p>
+        </p:txBody>
+      </p:sp>
     </p:spTree>
   </p:cSld>
   <p:clrMapOvr>
@@ -9815,6 +10053,40 @@
               <a:t xml:space="preserve"> − 6</a:t>
             </a:r>
             <a:endParaRPr lang="en-US" sz="2325" dirty="0"/>
+          </a:p>
+        </p:txBody>
+      </p:sp>
+      <p:sp>
+        <p:nvSpPr>
+          <p:cNvPr id="12" name="Slide Number 12"/>
+          <p:cNvSpPr txBox="1"/>
+          <p:nvPr/>
+        </p:nvSpPr>
+        <p:spPr>
+          <a:xfrm>
+            <a:off x="11277295" y="6611112"/>
+            <a:ext cx="685800" cy="201168"/>
+          </a:xfrm>
+          <a:prstGeom prst="rect">
+            <a:avLst/>
+          </a:prstGeom>
+          <a:noFill/>
+        </p:spPr>
+        <p:txBody>
+          <a:bodyPr wrap="none" lIns="0" tIns="0" rIns="0" bIns="0" anchor="b">
+            <a:noAutofit/>
+          </a:bodyPr>
+          <a:lstStyle/>
+          <a:p>
+            <a:pPr algn="r"/>
+            <a:fld id="{5C1A6E0B-3B1F-4D5E-9C7A-2F4B8D6E1A90}" type="slidenum">
+              <a:rPr lang="en-US" sz="1200" dirty="0">
+                <a:solidFill>
+                  <a:srgbClr val="5F6272"/>
+                </a:solidFill>
+              </a:rPr>
+              <a:t>2</a:t>
+            </a:fld>
           </a:p>
         </p:txBody>
       </p:sp>
@@ -10948,6 +11220,40 @@
           </a:p>
         </p:txBody>
       </p:sp>
+      <p:sp>
+        <p:nvSpPr>
+          <p:cNvPr id="12" name="Slide Number 12"/>
+          <p:cNvSpPr txBox="1"/>
+          <p:nvPr/>
+        </p:nvSpPr>
+        <p:spPr>
+          <a:xfrm>
+            <a:off x="11277295" y="6611112"/>
+            <a:ext cx="685800" cy="201168"/>
+          </a:xfrm>
+          <a:prstGeom prst="rect">
+            <a:avLst/>
+          </a:prstGeom>
+          <a:noFill/>
+        </p:spPr>
+        <p:txBody>
+          <a:bodyPr wrap="none" lIns="0" tIns="0" rIns="0" bIns="0" anchor="b">
+            <a:noAutofit/>
+          </a:bodyPr>
+          <a:lstStyle/>
+          <a:p>
+            <a:pPr algn="r"/>
+            <a:fld id="{5C1A6E0B-3B1F-4D5E-9C7A-2F4B8D6E1A90}" type="slidenum">
+              <a:rPr lang="en-US" sz="1200" dirty="0">
+                <a:solidFill>
+                  <a:srgbClr val="5F6272"/>
+                </a:solidFill>
+              </a:rPr>
+              <a:t>3</a:t>
+            </a:fld>
+          </a:p>
+        </p:txBody>
+      </p:sp>
     </p:spTree>
   </p:cSld>
   <p:clrMapOvr>
@@ -12316,6 +12622,40 @@
           </a:p>
         </p:txBody>
       </p:sp>
+      <p:sp>
+        <p:nvSpPr>
+          <p:cNvPr id="16" name="Slide Number 16"/>
+          <p:cNvSpPr txBox="1"/>
+          <p:nvPr/>
+        </p:nvSpPr>
+        <p:spPr>
+          <a:xfrm>
+            <a:off x="11277295" y="6611112"/>
+            <a:ext cx="685800" cy="201168"/>
+          </a:xfrm>
+          <a:prstGeom prst="rect">
+            <a:avLst/>
+          </a:prstGeom>
+          <a:noFill/>
+        </p:spPr>
+        <p:txBody>
+          <a:bodyPr wrap="none" lIns="0" tIns="0" rIns="0" bIns="0" anchor="b">
+            <a:noAutofit/>
+          </a:bodyPr>
+          <a:lstStyle/>
+          <a:p>
+            <a:pPr algn="r"/>
+            <a:fld id="{5C1A6E0B-3B1F-4D5E-9C7A-2F4B8D6E1A90}" type="slidenum">
+              <a:rPr lang="en-US" sz="1200" dirty="0">
+                <a:solidFill>
+                  <a:srgbClr val="5F6272"/>
+                </a:solidFill>
+              </a:rPr>
+              <a:t>4</a:t>
+            </a:fld>
+          </a:p>
+        </p:txBody>
+      </p:sp>
     </p:spTree>
   </p:cSld>
   <p:clrMapOvr>
@@ -12888,6 +13228,40 @@
           </a:p>
         </p:txBody>
       </p:sp>
+      <p:sp>
+        <p:nvSpPr>
+          <p:cNvPr id="8" name="Slide Number 8"/>
+          <p:cNvSpPr txBox="1"/>
+          <p:nvPr/>
+        </p:nvSpPr>
+        <p:spPr>
+          <a:xfrm>
+            <a:off x="11277295" y="6611112"/>
+            <a:ext cx="685800" cy="201168"/>
+          </a:xfrm>
+          <a:prstGeom prst="rect">
+            <a:avLst/>
+          </a:prstGeom>
+          <a:noFill/>
+        </p:spPr>
+        <p:txBody>
+          <a:bodyPr wrap="none" lIns="0" tIns="0" rIns="0" bIns="0" anchor="b">
+            <a:noAutofit/>
+          </a:bodyPr>
+          <a:lstStyle/>
+          <a:p>
+            <a:pPr algn="r"/>
+            <a:fld id="{5C1A6E0B-3B1F-4D5E-9C7A-2F4B8D6E1A90}" type="slidenum">
+              <a:rPr lang="en-US" sz="1200" dirty="0">
+                <a:solidFill>
+                  <a:srgbClr val="5F6272"/>
+                </a:solidFill>
+              </a:rPr>
+              <a:t>5</a:t>
+            </a:fld>
+          </a:p>
+        </p:txBody>
+      </p:sp>
     </p:spTree>
   </p:cSld>
   <p:clrMapOvr>
@@ -14666,6 +15040,40 @@
               <a:t xml:space="preserve">(1, 4)</a:t>
             </a:r>
             <a:endParaRPr lang="en-US" sz="1125" dirty="0"/>
+          </a:p>
+        </p:txBody>
+      </p:sp>
+      <p:sp>
+        <p:nvSpPr>
+          <p:cNvPr id="51" name="Slide Number 51"/>
+          <p:cNvSpPr txBox="1"/>
+          <p:nvPr/>
+        </p:nvSpPr>
+        <p:spPr>
+          <a:xfrm>
+            <a:off x="11277295" y="6611112"/>
+            <a:ext cx="685800" cy="201168"/>
+          </a:xfrm>
+          <a:prstGeom prst="rect">
+            <a:avLst/>
+          </a:prstGeom>
+          <a:noFill/>
+        </p:spPr>
+        <p:txBody>
+          <a:bodyPr wrap="none" lIns="0" tIns="0" rIns="0" bIns="0" anchor="b">
+            <a:noAutofit/>
+          </a:bodyPr>
+          <a:lstStyle/>
+          <a:p>
+            <a:pPr algn="r"/>
+            <a:fld id="{5C1A6E0B-3B1F-4D5E-9C7A-2F4B8D6E1A90}" type="slidenum">
+              <a:rPr lang="en-US" sz="1200" dirty="0">
+                <a:solidFill>
+                  <a:srgbClr val="5F6272"/>
+                </a:solidFill>
+              </a:rPr>
+              <a:t>6</a:t>
+            </a:fld>
           </a:p>
         </p:txBody>
       </p:sp>
@@ -15368,6 +15776,40 @@
               <a:t xml:space="preserve"> − 3)</a:t>
             </a:r>
             <a:endParaRPr lang="en-US" sz="2325" dirty="0"/>
+          </a:p>
+        </p:txBody>
+      </p:sp>
+      <p:sp>
+        <p:nvSpPr>
+          <p:cNvPr id="8" name="Slide Number 8"/>
+          <p:cNvSpPr txBox="1"/>
+          <p:nvPr/>
+        </p:nvSpPr>
+        <p:spPr>
+          <a:xfrm>
+            <a:off x="11277295" y="6611112"/>
+            <a:ext cx="685800" cy="201168"/>
+          </a:xfrm>
+          <a:prstGeom prst="rect">
+            <a:avLst/>
+          </a:prstGeom>
+          <a:noFill/>
+        </p:spPr>
+        <p:txBody>
+          <a:bodyPr wrap="none" lIns="0" tIns="0" rIns="0" bIns="0" anchor="b">
+            <a:noAutofit/>
+          </a:bodyPr>
+          <a:lstStyle/>
+          <a:p>
+            <a:pPr algn="r"/>
+            <a:fld id="{5C1A6E0B-3B1F-4D5E-9C7A-2F4B8D6E1A90}" type="slidenum">
+              <a:rPr lang="en-US" sz="1200" dirty="0">
+                <a:solidFill>
+                  <a:srgbClr val="5F6272"/>
+                </a:solidFill>
+              </a:rPr>
+              <a:t>7</a:t>
+            </a:fld>
           </a:p>
         </p:txBody>
       </p:sp>
@@ -16307,6 +16749,40 @@
           </a:p>
         </p:txBody>
       </p:sp>
+      <p:sp>
+        <p:nvSpPr>
+          <p:cNvPr id="12" name="Slide Number 12"/>
+          <p:cNvSpPr txBox="1"/>
+          <p:nvPr/>
+        </p:nvSpPr>
+        <p:spPr>
+          <a:xfrm>
+            <a:off x="11277295" y="6611112"/>
+            <a:ext cx="685800" cy="201168"/>
+          </a:xfrm>
+          <a:prstGeom prst="rect">
+            <a:avLst/>
+          </a:prstGeom>
+          <a:noFill/>
+        </p:spPr>
+        <p:txBody>
+          <a:bodyPr wrap="none" lIns="0" tIns="0" rIns="0" bIns="0" anchor="b">
+            <a:noAutofit/>
+          </a:bodyPr>
+          <a:lstStyle/>
+          <a:p>
+            <a:pPr algn="r"/>
+            <a:fld id="{5C1A6E0B-3B1F-4D5E-9C7A-2F4B8D6E1A90}" type="slidenum">
+              <a:rPr lang="en-US" sz="1200" dirty="0">
+                <a:solidFill>
+                  <a:srgbClr val="5F6272"/>
+                </a:solidFill>
+              </a:rPr>
+              <a:t>8</a:t>
+            </a:fld>
+          </a:p>
+        </p:txBody>
+      </p:sp>
     </p:spTree>
   </p:cSld>
   <p:clrMapOvr>
@@ -17106,6 +17582,40 @@
               <a:t xml:space="preserve"> − 2)</a:t>
             </a:r>
             <a:endParaRPr lang="en-US" sz="2325" dirty="0"/>
+          </a:p>
+        </p:txBody>
+      </p:sp>
+      <p:sp>
+        <p:nvSpPr>
+          <p:cNvPr id="9" name="Slide Number 9"/>
+          <p:cNvSpPr txBox="1"/>
+          <p:nvPr/>
+        </p:nvSpPr>
+        <p:spPr>
+          <a:xfrm>
+            <a:off x="11277295" y="6611112"/>
+            <a:ext cx="685800" cy="201168"/>
+          </a:xfrm>
+          <a:prstGeom prst="rect">
+            <a:avLst/>
+          </a:prstGeom>
+          <a:noFill/>
+        </p:spPr>
+        <p:txBody>
+          <a:bodyPr wrap="none" lIns="0" tIns="0" rIns="0" bIns="0" anchor="b">
+            <a:noAutofit/>
+          </a:bodyPr>
+          <a:lstStyle/>
+          <a:p>
+            <a:pPr algn="r"/>
+            <a:fld id="{5C1A6E0B-3B1F-4D5E-9C7A-2F4B8D6E1A90}" type="slidenum">
+              <a:rPr lang="en-US" sz="1200" dirty="0">
+                <a:solidFill>
+                  <a:srgbClr val="5F6272"/>
+                </a:solidFill>
+              </a:rPr>
+              <a:t>9</a:t>
+            </a:fld>
           </a:p>
         </p:txBody>
       </p:sp>
